--- a/static/ppts/G6_Sci_T1_Variables.pptx
+++ b/static/ppts/G6_Sci_T1_Variables.pptx
@@ -10,10 +10,9 @@
     <p:sldId id="258" r:id="rId4"/>
     <p:sldId id="259" r:id="rId5"/>
     <p:sldId id="260" r:id="rId6"/>
-    <p:sldId id="261" r:id="rId7"/>
   </p:sldIdLst>
   <p:notesMasterIdLst>
-    <p:notesMasterId r:id="rId8"/>
+    <p:notesMasterId r:id="rId7"/>
   </p:notesMasterIdLst>
   <p:sldSz cx="9144000" cy="5143500"/>
   <p:notesSz cx="5143500" cy="9144000"/>
@@ -901,94 +900,6 @@
 </p:notes>
 </file>
 
-<file path=ppt/notesSlides/notesSlide6.xml><?xml version="1.0" encoding="utf-8"?>
-<p:notes xmlns:a="http://schemas.openxmlformats.org/drawingml/2006/main" xmlns:r="http://schemas.openxmlformats.org/officeDocument/2006/relationships" xmlns:p="http://schemas.openxmlformats.org/presentationml/2006/main">
-  <p:cSld>
-    <p:spTree>
-      <p:nvGrpSpPr>
-        <p:cNvPr id="1" name=""/>
-        <p:cNvGrpSpPr/>
-        <p:nvPr/>
-      </p:nvGrpSpPr>
-      <p:grpSpPr>
-        <a:xfrm>
-          <a:off x="0" y="0"/>
-          <a:ext cx="0" cy="0"/>
-          <a:chOff x="0" y="0"/>
-          <a:chExt cx="0" cy="0"/>
-        </a:xfrm>
-      </p:grpSpPr>
-      <p:sp>
-        <p:nvSpPr>
-          <p:cNvPr id="2" name="Slide Image Placeholder 1"/>
-          <p:cNvSpPr>
-            <a:spLocks noGrp="1" noRot="1" noChangeAspect="1"/>
-          </p:cNvSpPr>
-          <p:nvPr>
-            <p:ph type="sldImg"/>
-          </p:nvPr>
-        </p:nvSpPr>
-        <p:spPr/>
-      </p:sp>
-      <p:sp>
-        <p:nvSpPr>
-          <p:cNvPr id="3" name="Notes Placeholder 2"/>
-          <p:cNvSpPr>
-            <a:spLocks noGrp="1"/>
-          </p:cNvSpPr>
-          <p:nvPr>
-            <p:ph type="body" idx="1"/>
-          </p:nvPr>
-        </p:nvSpPr>
-        <p:spPr/>
-        <p:txBody>
-          <a:bodyPr/>
-          <a:lstStyle/>
-          <a:p>
-            <a:r>
-              <a:rPr lang="en-US" dirty="0"/>
-              <a:t/>
-            </a:r>
-            <a:endParaRPr lang="en-US" dirty="0"/>
-          </a:p>
-        </p:txBody>
-      </p:sp>
-      <p:sp>
-        <p:nvSpPr>
-          <p:cNvPr id="4" name="Slide Number Placeholder 3"/>
-          <p:cNvSpPr>
-            <a:spLocks noGrp="1"/>
-          </p:cNvSpPr>
-          <p:nvPr>
-            <p:ph type="sldNum" sz="quarter" idx="10"/>
-          </p:nvPr>
-        </p:nvSpPr>
-        <p:spPr/>
-        <p:txBody>
-          <a:bodyPr/>
-          <a:lstStyle/>
-          <a:p>
-            <a:fld id="{F7021451-1387-4CA6-816F-3879F97B5CBC}" type="slidenum">
-              <a:rPr lang="en-US"/>
-              <a:t>6</a:t>
-            </a:fld>
-            <a:endParaRPr lang="en-US"/>
-          </a:p>
-        </p:txBody>
-      </p:sp>
-    </p:spTree>
-    <p:extLst>
-      <p:ext uri="{BB962C8B-B14F-4D97-AF65-F5344CB8AC3E}">
-        <p14:creationId xmlns:p14="http://schemas.microsoft.com/office/powerpoint/2010/main" val="1024086991"/>
-      </p:ext>
-    </p:extLst>
-  </p:cSld>
-  <p:clrMapOvr>
-    <a:masterClrMapping/>
-  </p:clrMapOvr>
-</p:notes>
-</file>
-
 <file path=ppt/slideLayouts/slideLayout1.xml><?xml version="1.0" encoding="utf-8"?>
 <p:sldLayout xmlns:a="http://schemas.openxmlformats.org/drawingml/2006/main" xmlns:r="http://schemas.openxmlformats.org/officeDocument/2006/relationships" xmlns:p="http://schemas.openxmlformats.org/presentationml/2006/main" preserve="1">
   <p:cSld name="DEFAULT">
@@ -1302,7 +1213,7 @@
     <p:bg>
       <p:bgPr>
         <a:solidFill>
-          <a:srgbClr val="1A7A6F"/>
+          <a:srgbClr val="1B2A4A"/>
         </a:solidFill>
       </p:bgPr>
     </p:bg>
@@ -1322,14 +1233,34 @@
       </p:grpSpPr>
       <p:sp>
         <p:nvSpPr>
-          <p:cNvPr id="2" name="Text 0"/>
+          <p:cNvPr id="2" name="Shape 0"/>
           <p:cNvSpPr/>
           <p:nvPr/>
         </p:nvSpPr>
         <p:spPr>
           <a:xfrm>
-            <a:off x="731520" y="1371600"/>
-            <a:ext cx="7680960" cy="1371600"/>
+            <a:off x="0" y="0"/>
+            <a:ext cx="109728" cy="5143500"/>
+          </a:xfrm>
+          <a:prstGeom prst="rect">
+            <a:avLst/>
+          </a:prstGeom>
+          <a:solidFill>
+            <a:srgbClr val="2A9D8F"/>
+          </a:solidFill>
+          <a:ln/>
+        </p:spPr>
+      </p:sp>
+      <p:sp>
+        <p:nvSpPr>
+          <p:cNvPr id="3" name="Text 1"/>
+          <p:cNvSpPr/>
+          <p:nvPr/>
+        </p:nvSpPr>
+        <p:spPr>
+          <a:xfrm>
+            <a:off x="731520" y="1280160"/>
+            <a:ext cx="7772400" cy="1371600"/>
           </a:xfrm>
           <a:prstGeom prst="rect">
             <a:avLst/>
@@ -1345,30 +1276,69 @@
               <a:buNone/>
             </a:pPr>
             <a:r>
-              <a:rPr lang="en-US" sz="4000" b="1" dirty="0">
+              <a:rPr lang="en-US" sz="3600" b="1" dirty="0">
                 <a:solidFill>
                   <a:srgbClr val="FFFFFF"/>
+                </a:solidFill>
+                <a:latin typeface="Georgia" pitchFamily="34" charset="0"/>
+                <a:ea typeface="Georgia" pitchFamily="34" charset="-122"/>
+                <a:cs typeface="Georgia" pitchFamily="34" charset="-120"/>
+              </a:rPr>
+              <a:t>Variables</a:t>
+            </a:r>
+            <a:endParaRPr lang="en-US" sz="3600" dirty="0"/>
+          </a:p>
+        </p:txBody>
+      </p:sp>
+      <p:sp>
+        <p:nvSpPr>
+          <p:cNvPr id="4" name="Text 2"/>
+          <p:cNvSpPr/>
+          <p:nvPr/>
+        </p:nvSpPr>
+        <p:spPr>
+          <a:xfrm>
+            <a:off x="731520" y="2743200"/>
+            <a:ext cx="7772400" cy="548640"/>
+          </a:xfrm>
+          <a:prstGeom prst="rect">
+            <a:avLst/>
+          </a:prstGeom>
+          <a:noFill/>
+          <a:ln/>
+        </p:spPr>
+        <p:txBody>
+          <a:bodyPr wrap="square" rtlCol="0" anchor="ctr"/>
+          <a:lstStyle/>
+          <a:p>
+            <a:pPr indent="0" marL="0">
+              <a:buNone/>
+            </a:pPr>
+            <a:r>
+              <a:rPr lang="en-US" sz="1600" dirty="0">
+                <a:solidFill>
+                  <a:srgbClr val="9B9690"/>
                 </a:solidFill>
                 <a:latin typeface="Calibri" pitchFamily="34" charset="0"/>
                 <a:ea typeface="Calibri" pitchFamily="34" charset="-122"/>
                 <a:cs typeface="Calibri" pitchFamily="34" charset="-120"/>
               </a:rPr>
-              <a:t>Variables</a:t>
-            </a:r>
-            <a:endParaRPr lang="en-US" sz="4000" dirty="0"/>
-          </a:p>
-        </p:txBody>
-      </p:sp>
-      <p:sp>
-        <p:nvSpPr>
-          <p:cNvPr id="3" name="Text 1"/>
+              <a:t>G6 Science · Scientific Skills</a:t>
+            </a:r>
+            <a:endParaRPr lang="en-US" sz="1600" dirty="0"/>
+          </a:p>
+        </p:txBody>
+      </p:sp>
+      <p:sp>
+        <p:nvSpPr>
+          <p:cNvPr id="5" name="Text 3"/>
           <p:cNvSpPr/>
           <p:nvPr/>
         </p:nvSpPr>
         <p:spPr>
           <a:xfrm>
-            <a:off x="731520" y="2926080"/>
-            <a:ext cx="7680960" cy="548640"/>
+            <a:off x="731520" y="4389120"/>
+            <a:ext cx="7772400" cy="457200"/>
           </a:xfrm>
           <a:prstGeom prst="rect">
             <a:avLst/>
@@ -1384,17 +1354,17 @@
               <a:buNone/>
             </a:pPr>
             <a:r>
-              <a:rPr lang="en-US" sz="1600" i="1" dirty="0">
-                <a:solidFill>
-                  <a:srgbClr val="FFFFFF"/>
+              <a:rPr lang="en-US" sz="1000" dirty="0">
+                <a:solidFill>
+                  <a:srgbClr val="6B6660"/>
                 </a:solidFill>
                 <a:latin typeface="Calibri" pitchFamily="34" charset="0"/>
                 <a:ea typeface="Calibri" pitchFamily="34" charset="-122"/>
                 <a:cs typeface="Calibri" pitchFamily="34" charset="-120"/>
               </a:rPr>
-              <a:t>Grade 6 Science · Mr Zocchi</a:t>
-            </a:r>
-            <a:endParaRPr lang="en-US" sz="1600" dirty="0"/>
+              <a:t>Mr Zocchi · mrzocchi.com</a:t>
+            </a:r>
+            <a:endParaRPr lang="en-US" sz="1000" dirty="0"/>
           </a:p>
         </p:txBody>
       </p:sp>
@@ -1409,6 +1379,13 @@
 <file path=ppt/slides/slide2.xml><?xml version="1.0" encoding="utf-8"?>
 <p:sld xmlns:a="http://schemas.openxmlformats.org/drawingml/2006/main" xmlns:r="http://schemas.openxmlformats.org/officeDocument/2006/relationships" xmlns:p="http://schemas.openxmlformats.org/presentationml/2006/main">
   <p:cSld name="Slide 2">
+    <p:bg>
+      <p:bgPr>
+        <a:solidFill>
+          <a:srgbClr val="FFFFFF"/>
+        </a:solidFill>
+      </p:bgPr>
+    </p:bg>
     <p:spTree>
       <p:nvGrpSpPr>
         <p:cNvPr id="1" name=""/>
@@ -1432,13 +1409,13 @@
         <p:spPr>
           <a:xfrm>
             <a:off x="0" y="0"/>
-            <a:ext cx="9144000" cy="548640"/>
-          </a:xfrm>
-          <a:prstGeom prst="rect">
-            <a:avLst/>
-          </a:prstGeom>
-          <a:solidFill>
-            <a:srgbClr val="1A7A6F"/>
+            <a:ext cx="9144000" cy="54864"/>
+          </a:xfrm>
+          <a:prstGeom prst="rect">
+            <a:avLst/>
+          </a:prstGeom>
+          <a:solidFill>
+            <a:srgbClr val="2A9D8F"/>
           </a:solidFill>
           <a:ln/>
         </p:spPr>
@@ -1451,8 +1428,8 @@
         </p:nvSpPr>
         <p:spPr>
           <a:xfrm>
-            <a:off x="457200" y="45720"/>
-            <a:ext cx="8229600" cy="457200"/>
+            <a:off x="548640" y="274320"/>
+            <a:ext cx="8046720" cy="640080"/>
           </a:xfrm>
           <a:prstGeom prst="rect">
             <a:avLst/>
@@ -1461,125 +1438,186 @@
           <a:ln/>
         </p:spPr>
         <p:txBody>
-          <a:bodyPr wrap="square" rtlCol="0" anchor="ctr"/>
+          <a:bodyPr wrap="square" lIns="0" tIns="0" rIns="0" bIns="0" rtlCol="0" anchor="ctr"/>
           <a:lstStyle/>
           <a:p>
             <a:pPr indent="0" marL="0">
               <a:buNone/>
             </a:pPr>
             <a:r>
-              <a:rPr lang="en-US" sz="1800" b="1" dirty="0">
-                <a:solidFill>
-                  <a:srgbClr val="FFFFFF"/>
+              <a:rPr lang="en-US" sz="2600" b="1" dirty="0">
+                <a:solidFill>
+                  <a:srgbClr val="1B2A4A"/>
+                </a:solidFill>
+                <a:latin typeface="Georgia" pitchFamily="34" charset="0"/>
+                <a:ea typeface="Georgia" pitchFamily="34" charset="-122"/>
+                <a:cs typeface="Georgia" pitchFamily="34" charset="-120"/>
+              </a:rPr>
+              <a:t>What is a Variable?</a:t>
+            </a:r>
+            <a:endParaRPr lang="en-US" sz="2600" dirty="0"/>
+          </a:p>
+        </p:txBody>
+      </p:sp>
+      <p:sp>
+        <p:nvSpPr>
+          <p:cNvPr id="4" name="Text 2"/>
+          <p:cNvSpPr/>
+          <p:nvPr/>
+        </p:nvSpPr>
+        <p:spPr>
+          <a:xfrm>
+            <a:off x="548640" y="1097280"/>
+            <a:ext cx="8046720" cy="3474720"/>
+          </a:xfrm>
+          <a:prstGeom prst="rect">
+            <a:avLst/>
+          </a:prstGeom>
+          <a:noFill/>
+          <a:ln/>
+        </p:spPr>
+        <p:txBody>
+          <a:bodyPr wrap="square" rtlCol="0" anchor="t"/>
+          <a:lstStyle/>
+          <a:p>
+            <a:pPr marL="342900" indent="-342900">
+              <a:spcAft>
+                <a:spcPts val="800"/>
+              </a:spcAft>
+              <a:buSzPct val="100000"/>
+              <a:buChar char="•"/>
+            </a:pPr>
+            <a:r>
+              <a:rPr lang="en-US" sz="1500" dirty="0">
+                <a:solidFill>
+                  <a:srgbClr val="3D3A36"/>
                 </a:solidFill>
                 <a:latin typeface="Calibri" pitchFamily="34" charset="0"/>
                 <a:ea typeface="Calibri" pitchFamily="34" charset="-122"/>
                 <a:cs typeface="Calibri" pitchFamily="34" charset="-120"/>
               </a:rPr>
-              <a:t>What is a variable?</a:t>
-            </a:r>
-            <a:endParaRPr lang="en-US" sz="1800" dirty="0"/>
-          </a:p>
-        </p:txBody>
-      </p:sp>
-      <p:sp>
-        <p:nvSpPr>
-          <p:cNvPr id="4" name="Text 2"/>
-          <p:cNvSpPr/>
-          <p:nvPr/>
-        </p:nvSpPr>
-        <p:spPr>
-          <a:xfrm>
-            <a:off x="731520" y="1097280"/>
-            <a:ext cx="7680960" cy="3200400"/>
-          </a:xfrm>
-          <a:prstGeom prst="rect">
-            <a:avLst/>
-          </a:prstGeom>
-          <a:noFill/>
-          <a:ln/>
-        </p:spPr>
-        <p:txBody>
-          <a:bodyPr wrap="square" rtlCol="0" anchor="ctr"/>
-          <a:lstStyle/>
-          <a:p>
-            <a:pPr indent="0" marL="0">
-              <a:buNone/>
-            </a:pPr>
-            <a:r>
-              <a:rPr lang="en-US" sz="1600" dirty="0">
-                <a:solidFill>
-                  <a:srgbClr val="363636"/>
+              <a:t>A variable is anything that can change in an experiment</a:t>
+            </a:r>
+            <a:endParaRPr lang="en-US" sz="1500" dirty="0"/>
+          </a:p>
+          <a:p>
+            <a:pPr marL="342900" indent="-342900">
+              <a:spcAft>
+                <a:spcPts val="800"/>
+              </a:spcAft>
+              <a:buSzPct val="100000"/>
+              <a:buChar char="•"/>
+            </a:pPr>
+            <a:r>
+              <a:rPr lang="en-US" sz="1500" dirty="0">
+                <a:solidFill>
+                  <a:srgbClr val="3D3A36"/>
                 </a:solidFill>
                 <a:latin typeface="Calibri" pitchFamily="34" charset="0"/>
                 <a:ea typeface="Calibri" pitchFamily="34" charset="-122"/>
                 <a:cs typeface="Calibri" pitchFamily="34" charset="-120"/>
               </a:rPr>
-              <a:t>Content for: What is a variable?</a:t>
-            </a:r>
-            <a:endParaRPr lang="en-US" sz="1600" dirty="0"/>
-          </a:p>
-          <a:p>
-            <a:pPr indent="0" marL="0">
-              <a:buNone/>
-            </a:pPr>
-            <a:endParaRPr lang="en-US" sz="1600" dirty="0"/>
-          </a:p>
-          <a:p>
-            <a:pPr indent="0" marL="0">
-              <a:buNone/>
-            </a:pPr>
-            <a:r>
-              <a:rPr lang="en-US" sz="1600" dirty="0">
-                <a:solidFill>
-                  <a:srgbClr val="363636"/>
+              <a:t>To make a test FAIR, you must control your variables</a:t>
+            </a:r>
+            <a:endParaRPr lang="en-US" sz="1500" dirty="0"/>
+          </a:p>
+          <a:p>
+            <a:pPr marL="342900" indent="-342900">
+              <a:spcAft>
+                <a:spcPts val="800"/>
+              </a:spcAft>
+              <a:buSzPct val="100000"/>
+              <a:buChar char="•"/>
+            </a:pPr>
+            <a:r>
+              <a:rPr lang="en-US" sz="1500" dirty="0">
+                <a:solidFill>
+                  <a:srgbClr val="3D3A36"/>
                 </a:solidFill>
                 <a:latin typeface="Calibri" pitchFamily="34" charset="0"/>
                 <a:ea typeface="Calibri" pitchFamily="34" charset="-122"/>
                 <a:cs typeface="Calibri" pitchFamily="34" charset="-120"/>
               </a:rPr>
-              <a:t>Key points will be covered in class.</a:t>
-            </a:r>
-            <a:endParaRPr lang="en-US" sz="1600" dirty="0"/>
-          </a:p>
-        </p:txBody>
-      </p:sp>
-      <p:sp>
-        <p:nvSpPr>
-          <p:cNvPr id="5" name="Text 3"/>
-          <p:cNvSpPr/>
-          <p:nvPr/>
-        </p:nvSpPr>
-        <p:spPr>
-          <a:xfrm>
-            <a:off x="7772400" y="4663440"/>
-            <a:ext cx="1097280" cy="365760"/>
-          </a:xfrm>
-          <a:prstGeom prst="rect">
-            <a:avLst/>
-          </a:prstGeom>
-          <a:noFill/>
-          <a:ln/>
-        </p:spPr>
-        <p:txBody>
-          <a:bodyPr wrap="square" rtlCol="0" anchor="ctr"/>
-          <a:lstStyle/>
-          <a:p>
-            <a:pPr algn="r" indent="0" marL="0">
-              <a:buNone/>
-            </a:pPr>
-            <a:r>
-              <a:rPr lang="en-US" sz="1000" dirty="0">
-                <a:solidFill>
-                  <a:srgbClr val="999999"/>
+              <a:t>There are three types of variable in every experiment</a:t>
+            </a:r>
+            <a:endParaRPr lang="en-US" sz="1500" dirty="0"/>
+          </a:p>
+          <a:p>
+            <a:pPr marL="342900" indent="-342900">
+              <a:spcAft>
+                <a:spcPts val="800"/>
+              </a:spcAft>
+              <a:buSzPct val="100000"/>
+              <a:buChar char="•"/>
+            </a:pPr>
+            <a:r>
+              <a:rPr lang="en-US" sz="1500" dirty="0">
+                <a:solidFill>
+                  <a:srgbClr val="3D3A36"/>
                 </a:solidFill>
                 <a:latin typeface="Calibri" pitchFamily="34" charset="0"/>
                 <a:ea typeface="Calibri" pitchFamily="34" charset="-122"/>
                 <a:cs typeface="Calibri" pitchFamily="34" charset="-120"/>
               </a:rPr>
-              <a:t>2 / 6</a:t>
-            </a:r>
-            <a:endParaRPr lang="en-US" sz="1000" dirty="0"/>
+              <a:t>Understanding variables is essential for scientific investigations</a:t>
+            </a:r>
+            <a:endParaRPr lang="en-US" sz="1500" dirty="0"/>
+          </a:p>
+        </p:txBody>
+      </p:sp>
+      <p:sp>
+        <p:nvSpPr>
+          <p:cNvPr id="5" name="Shape 3"/>
+          <p:cNvSpPr/>
+          <p:nvPr/>
+        </p:nvSpPr>
+        <p:spPr>
+          <a:xfrm>
+            <a:off x="548640" y="4754880"/>
+            <a:ext cx="8046720" cy="9144"/>
+          </a:xfrm>
+          <a:prstGeom prst="rect">
+            <a:avLst/>
+          </a:prstGeom>
+          <a:solidFill>
+            <a:srgbClr val="F3F1EE"/>
+          </a:solidFill>
+          <a:ln/>
+        </p:spPr>
+      </p:sp>
+      <p:sp>
+        <p:nvSpPr>
+          <p:cNvPr id="6" name="Text 4"/>
+          <p:cNvSpPr/>
+          <p:nvPr/>
+        </p:nvSpPr>
+        <p:spPr>
+          <a:xfrm>
+            <a:off x="548640" y="4800600"/>
+            <a:ext cx="3657600" cy="274320"/>
+          </a:xfrm>
+          <a:prstGeom prst="rect">
+            <a:avLst/>
+          </a:prstGeom>
+          <a:noFill/>
+          <a:ln/>
+        </p:spPr>
+        <p:txBody>
+          <a:bodyPr wrap="square" rtlCol="0" anchor="ctr"/>
+          <a:lstStyle/>
+          <a:p>
+            <a:pPr indent="0" marL="0">
+              <a:buNone/>
+            </a:pPr>
+            <a:r>
+              <a:rPr lang="en-US" sz="800" dirty="0">
+                <a:solidFill>
+                  <a:srgbClr val="9B9690"/>
+                </a:solidFill>
+              </a:rPr>
+              <a:t>mrzocchi.com</a:t>
+            </a:r>
+            <a:endParaRPr lang="en-US" sz="800" dirty="0"/>
           </a:p>
         </p:txBody>
       </p:sp>
@@ -1594,6 +1632,13 @@
 <file path=ppt/slides/slide3.xml><?xml version="1.0" encoding="utf-8"?>
 <p:sld xmlns:a="http://schemas.openxmlformats.org/drawingml/2006/main" xmlns:r="http://schemas.openxmlformats.org/officeDocument/2006/relationships" xmlns:p="http://schemas.openxmlformats.org/presentationml/2006/main">
   <p:cSld name="Slide 3">
+    <p:bg>
+      <p:bgPr>
+        <a:solidFill>
+          <a:srgbClr val="FFFFFF"/>
+        </a:solidFill>
+      </p:bgPr>
+    </p:bg>
     <p:spTree>
       <p:nvGrpSpPr>
         <p:cNvPr id="1" name=""/>
@@ -1617,13 +1662,13 @@
         <p:spPr>
           <a:xfrm>
             <a:off x="0" y="0"/>
-            <a:ext cx="9144000" cy="548640"/>
-          </a:xfrm>
-          <a:prstGeom prst="rect">
-            <a:avLst/>
-          </a:prstGeom>
-          <a:solidFill>
-            <a:srgbClr val="1A7A6F"/>
+            <a:ext cx="9144000" cy="54864"/>
+          </a:xfrm>
+          <a:prstGeom prst="rect">
+            <a:avLst/>
+          </a:prstGeom>
+          <a:solidFill>
+            <a:srgbClr val="2A9D8F"/>
           </a:solidFill>
           <a:ln/>
         </p:spPr>
@@ -1636,8 +1681,8 @@
         </p:nvSpPr>
         <p:spPr>
           <a:xfrm>
-            <a:off x="457200" y="45720"/>
-            <a:ext cx="8229600" cy="457200"/>
+            <a:off x="548640" y="274320"/>
+            <a:ext cx="8046720" cy="640080"/>
           </a:xfrm>
           <a:prstGeom prst="rect">
             <a:avLst/>
@@ -1646,6 +1691,72 @@
           <a:ln/>
         </p:spPr>
         <p:txBody>
+          <a:bodyPr wrap="square" lIns="0" tIns="0" rIns="0" bIns="0" rtlCol="0" anchor="ctr"/>
+          <a:lstStyle/>
+          <a:p>
+            <a:pPr indent="0" marL="0">
+              <a:buNone/>
+            </a:pPr>
+            <a:r>
+              <a:rPr lang="en-US" sz="2600" b="1" dirty="0">
+                <a:solidFill>
+                  <a:srgbClr val="1B2A4A"/>
+                </a:solidFill>
+                <a:latin typeface="Georgia" pitchFamily="34" charset="0"/>
+                <a:ea typeface="Georgia" pitchFamily="34" charset="-122"/>
+                <a:cs typeface="Georgia" pitchFamily="34" charset="-120"/>
+              </a:rPr>
+              <a:t>Types of Variables</a:t>
+            </a:r>
+            <a:endParaRPr lang="en-US" sz="2600" dirty="0"/>
+          </a:p>
+        </p:txBody>
+      </p:sp>
+      <p:sp>
+        <p:nvSpPr>
+          <p:cNvPr id="4" name="Shape 2"/>
+          <p:cNvSpPr/>
+          <p:nvPr/>
+        </p:nvSpPr>
+        <p:spPr>
+          <a:xfrm>
+            <a:off x="457200" y="1097280"/>
+            <a:ext cx="3840480" cy="3474720"/>
+          </a:xfrm>
+          <a:prstGeom prst="rect">
+            <a:avLst/>
+          </a:prstGeom>
+          <a:solidFill>
+            <a:srgbClr val="F3F1EE"/>
+          </a:solidFill>
+          <a:ln/>
+          <a:effectLst>
+            <a:outerShdw sx="100000" sy="100000" kx="0" ky="0" algn="bl" rotWithShape="0" blurRad="50800" dist="25400" dir="8100000">
+              <a:srgbClr val="000000">
+                <a:alpha val="10000"/>
+              </a:srgbClr>
+            </a:outerShdw>
+          </a:effectLst>
+        </p:spPr>
+      </p:sp>
+      <p:sp>
+        <p:nvSpPr>
+          <p:cNvPr id="5" name="Text 3"/>
+          <p:cNvSpPr/>
+          <p:nvPr/>
+        </p:nvSpPr>
+        <p:spPr>
+          <a:xfrm>
+            <a:off x="640080" y="1234440"/>
+            <a:ext cx="3474720" cy="411480"/>
+          </a:xfrm>
+          <a:prstGeom prst="rect">
+            <a:avLst/>
+          </a:prstGeom>
+          <a:noFill/>
+          <a:ln/>
+        </p:spPr>
+        <p:txBody>
           <a:bodyPr wrap="square" rtlCol="0" anchor="ctr"/>
           <a:lstStyle/>
           <a:p>
@@ -1653,118 +1764,331 @@
               <a:buNone/>
             </a:pPr>
             <a:r>
-              <a:rPr lang="en-US" sz="1800" b="1" dirty="0">
-                <a:solidFill>
-                  <a:srgbClr val="FFFFFF"/>
+              <a:rPr lang="en-US" sz="1600" b="1" dirty="0">
+                <a:solidFill>
+                  <a:srgbClr val="1B2A4A"/>
+                </a:solidFill>
+                <a:latin typeface="Georgia" pitchFamily="34" charset="0"/>
+                <a:ea typeface="Georgia" pitchFamily="34" charset="-122"/>
+                <a:cs typeface="Georgia" pitchFamily="34" charset="-120"/>
+              </a:rPr>
+              <a:t>Independent Variable (IV)</a:t>
+            </a:r>
+            <a:endParaRPr lang="en-US" sz="1600" dirty="0"/>
+          </a:p>
+        </p:txBody>
+      </p:sp>
+      <p:sp>
+        <p:nvSpPr>
+          <p:cNvPr id="6" name="Text 4"/>
+          <p:cNvSpPr/>
+          <p:nvPr/>
+        </p:nvSpPr>
+        <p:spPr>
+          <a:xfrm>
+            <a:off x="640080" y="1737360"/>
+            <a:ext cx="3474720" cy="2651760"/>
+          </a:xfrm>
+          <a:prstGeom prst="rect">
+            <a:avLst/>
+          </a:prstGeom>
+          <a:noFill/>
+          <a:ln/>
+        </p:spPr>
+        <p:txBody>
+          <a:bodyPr wrap="square" rtlCol="0" anchor="t"/>
+          <a:lstStyle/>
+          <a:p>
+            <a:pPr marL="342900" indent="-342900">
+              <a:spcAft>
+                <a:spcPts val="600"/>
+              </a:spcAft>
+              <a:buSzPct val="100000"/>
+              <a:buChar char="•"/>
+            </a:pPr>
+            <a:r>
+              <a:rPr lang="en-US" sz="1300" dirty="0">
+                <a:solidFill>
+                  <a:srgbClr val="3D3A36"/>
                 </a:solidFill>
                 <a:latin typeface="Calibri" pitchFamily="34" charset="0"/>
                 <a:ea typeface="Calibri" pitchFamily="34" charset="-122"/>
                 <a:cs typeface="Calibri" pitchFamily="34" charset="-120"/>
               </a:rPr>
-              <a:t>Independent variable (IV)</a:t>
-            </a:r>
-            <a:endParaRPr lang="en-US" sz="1800" dirty="0"/>
-          </a:p>
-        </p:txBody>
-      </p:sp>
-      <p:sp>
-        <p:nvSpPr>
-          <p:cNvPr id="4" name="Text 2"/>
-          <p:cNvSpPr/>
-          <p:nvPr/>
-        </p:nvSpPr>
-        <p:spPr>
-          <a:xfrm>
-            <a:off x="731520" y="1097280"/>
-            <a:ext cx="7680960" cy="3200400"/>
-          </a:xfrm>
-          <a:prstGeom prst="rect">
-            <a:avLst/>
-          </a:prstGeom>
-          <a:noFill/>
-          <a:ln/>
-        </p:spPr>
-        <p:txBody>
-          <a:bodyPr wrap="square" rtlCol="0" anchor="ctr"/>
-          <a:lstStyle/>
-          <a:p>
-            <a:pPr indent="0" marL="0">
-              <a:buNone/>
-            </a:pPr>
-            <a:r>
-              <a:rPr lang="en-US" sz="1600" dirty="0">
-                <a:solidFill>
-                  <a:srgbClr val="363636"/>
+              <a:t>The variable YOU change</a:t>
+            </a:r>
+            <a:endParaRPr lang="en-US" sz="1300" dirty="0"/>
+          </a:p>
+          <a:p>
+            <a:pPr marL="342900" indent="-342900">
+              <a:spcAft>
+                <a:spcPts val="600"/>
+              </a:spcAft>
+              <a:buSzPct val="100000"/>
+              <a:buChar char="•"/>
+            </a:pPr>
+            <a:r>
+              <a:rPr lang="en-US" sz="1300" dirty="0">
+                <a:solidFill>
+                  <a:srgbClr val="3D3A36"/>
                 </a:solidFill>
                 <a:latin typeface="Calibri" pitchFamily="34" charset="0"/>
                 <a:ea typeface="Calibri" pitchFamily="34" charset="-122"/>
                 <a:cs typeface="Calibri" pitchFamily="34" charset="-120"/>
               </a:rPr>
-              <a:t>Content for: Independent variable (IV)</a:t>
-            </a:r>
-            <a:endParaRPr lang="en-US" sz="1600" dirty="0"/>
-          </a:p>
-          <a:p>
-            <a:pPr indent="0" marL="0">
-              <a:buNone/>
-            </a:pPr>
-            <a:endParaRPr lang="en-US" sz="1600" dirty="0"/>
-          </a:p>
-          <a:p>
-            <a:pPr indent="0" marL="0">
-              <a:buNone/>
-            </a:pPr>
-            <a:r>
-              <a:rPr lang="en-US" sz="1600" dirty="0">
-                <a:solidFill>
-                  <a:srgbClr val="363636"/>
+              <a:t>There should only be ONE</a:t>
+            </a:r>
+            <a:endParaRPr lang="en-US" sz="1300" dirty="0"/>
+          </a:p>
+          <a:p>
+            <a:pPr marL="342900" indent="-342900">
+              <a:spcAft>
+                <a:spcPts val="600"/>
+              </a:spcAft>
+              <a:buSzPct val="100000"/>
+              <a:buChar char="•"/>
+            </a:pPr>
+            <a:r>
+              <a:rPr lang="en-US" sz="1300" dirty="0">
+                <a:solidFill>
+                  <a:srgbClr val="3D3A36"/>
                 </a:solidFill>
                 <a:latin typeface="Calibri" pitchFamily="34" charset="0"/>
                 <a:ea typeface="Calibri" pitchFamily="34" charset="-122"/>
                 <a:cs typeface="Calibri" pitchFamily="34" charset="-120"/>
               </a:rPr>
-              <a:t>Key points will be covered in class.</a:t>
-            </a:r>
-            <a:endParaRPr lang="en-US" sz="1600" dirty="0"/>
-          </a:p>
-        </p:txBody>
-      </p:sp>
-      <p:sp>
-        <p:nvSpPr>
-          <p:cNvPr id="5" name="Text 3"/>
-          <p:cNvSpPr/>
-          <p:nvPr/>
-        </p:nvSpPr>
-        <p:spPr>
-          <a:xfrm>
-            <a:off x="7772400" y="4663440"/>
-            <a:ext cx="1097280" cy="365760"/>
-          </a:xfrm>
-          <a:prstGeom prst="rect">
-            <a:avLst/>
-          </a:prstGeom>
-          <a:noFill/>
-          <a:ln/>
-        </p:spPr>
-        <p:txBody>
-          <a:bodyPr wrap="square" rtlCol="0" anchor="ctr"/>
-          <a:lstStyle/>
-          <a:p>
-            <a:pPr algn="r" indent="0" marL="0">
-              <a:buNone/>
-            </a:pPr>
-            <a:r>
-              <a:rPr lang="en-US" sz="1000" dirty="0">
-                <a:solidFill>
-                  <a:srgbClr val="999999"/>
+              <a:t>Also called the 'input variable'</a:t>
+            </a:r>
+            <a:endParaRPr lang="en-US" sz="1300" dirty="0"/>
+          </a:p>
+          <a:p>
+            <a:pPr marL="342900" indent="-342900">
+              <a:spcAft>
+                <a:spcPts val="600"/>
+              </a:spcAft>
+              <a:buSzPct val="100000"/>
+              <a:buChar char="•"/>
+            </a:pPr>
+            <a:r>
+              <a:rPr lang="en-US" sz="1300" dirty="0">
+                <a:solidFill>
+                  <a:srgbClr val="3D3A36"/>
                 </a:solidFill>
                 <a:latin typeface="Calibri" pitchFamily="34" charset="0"/>
                 <a:ea typeface="Calibri" pitchFamily="34" charset="-122"/>
                 <a:cs typeface="Calibri" pitchFamily="34" charset="-120"/>
               </a:rPr>
-              <a:t>3 / 6</a:t>
-            </a:r>
-            <a:endParaRPr lang="en-US" sz="1000" dirty="0"/>
+              <a:t>Example: the amount of water given to a plant</a:t>
+            </a:r>
+            <a:endParaRPr lang="en-US" sz="1300" dirty="0"/>
+          </a:p>
+        </p:txBody>
+      </p:sp>
+      <p:sp>
+        <p:nvSpPr>
+          <p:cNvPr id="7" name="Shape 5"/>
+          <p:cNvSpPr/>
+          <p:nvPr/>
+        </p:nvSpPr>
+        <p:spPr>
+          <a:xfrm>
+            <a:off x="4846320" y="1097280"/>
+            <a:ext cx="3840480" cy="3474720"/>
+          </a:xfrm>
+          <a:prstGeom prst="rect">
+            <a:avLst/>
+          </a:prstGeom>
+          <a:solidFill>
+            <a:srgbClr val="F3F1EE"/>
+          </a:solidFill>
+          <a:ln/>
+          <a:effectLst>
+            <a:outerShdw sx="100000" sy="100000" kx="0" ky="0" algn="bl" rotWithShape="0" blurRad="50800" dist="25400" dir="8100000">
+              <a:srgbClr val="000000">
+                <a:alpha val="10000"/>
+              </a:srgbClr>
+            </a:outerShdw>
+          </a:effectLst>
+        </p:spPr>
+      </p:sp>
+      <p:sp>
+        <p:nvSpPr>
+          <p:cNvPr id="8" name="Text 6"/>
+          <p:cNvSpPr/>
+          <p:nvPr/>
+        </p:nvSpPr>
+        <p:spPr>
+          <a:xfrm>
+            <a:off x="5029200" y="1234440"/>
+            <a:ext cx="3474720" cy="411480"/>
+          </a:xfrm>
+          <a:prstGeom prst="rect">
+            <a:avLst/>
+          </a:prstGeom>
+          <a:noFill/>
+          <a:ln/>
+        </p:spPr>
+        <p:txBody>
+          <a:bodyPr wrap="square" rtlCol="0" anchor="ctr"/>
+          <a:lstStyle/>
+          <a:p>
+            <a:pPr indent="0" marL="0">
+              <a:buNone/>
+            </a:pPr>
+            <a:r>
+              <a:rPr lang="en-US" sz="1600" b="1" dirty="0">
+                <a:solidFill>
+                  <a:srgbClr val="1B2A4A"/>
+                </a:solidFill>
+                <a:latin typeface="Georgia" pitchFamily="34" charset="0"/>
+                <a:ea typeface="Georgia" pitchFamily="34" charset="-122"/>
+                <a:cs typeface="Georgia" pitchFamily="34" charset="-120"/>
+              </a:rPr>
+              <a:t>Dependent Variable (DV)</a:t>
+            </a:r>
+            <a:endParaRPr lang="en-US" sz="1600" dirty="0"/>
+          </a:p>
+        </p:txBody>
+      </p:sp>
+      <p:sp>
+        <p:nvSpPr>
+          <p:cNvPr id="9" name="Text 7"/>
+          <p:cNvSpPr/>
+          <p:nvPr/>
+        </p:nvSpPr>
+        <p:spPr>
+          <a:xfrm>
+            <a:off x="5029200" y="1737360"/>
+            <a:ext cx="3474720" cy="2651760"/>
+          </a:xfrm>
+          <a:prstGeom prst="rect">
+            <a:avLst/>
+          </a:prstGeom>
+          <a:noFill/>
+          <a:ln/>
+        </p:spPr>
+        <p:txBody>
+          <a:bodyPr wrap="square" rtlCol="0" anchor="t"/>
+          <a:lstStyle/>
+          <a:p>
+            <a:pPr marL="342900" indent="-342900">
+              <a:spcAft>
+                <a:spcPts val="600"/>
+              </a:spcAft>
+              <a:buSzPct val="100000"/>
+              <a:buChar char="•"/>
+            </a:pPr>
+            <a:r>
+              <a:rPr lang="en-US" sz="1300" dirty="0">
+                <a:solidFill>
+                  <a:srgbClr val="3D3A36"/>
+                </a:solidFill>
+                <a:latin typeface="Calibri" pitchFamily="34" charset="0"/>
+                <a:ea typeface="Calibri" pitchFamily="34" charset="-122"/>
+                <a:cs typeface="Calibri" pitchFamily="34" charset="-120"/>
+              </a:rPr>
+              <a:t>The variable you MEASURE</a:t>
+            </a:r>
+            <a:endParaRPr lang="en-US" sz="1300" dirty="0"/>
+          </a:p>
+          <a:p>
+            <a:pPr marL="342900" indent="-342900">
+              <a:spcAft>
+                <a:spcPts val="600"/>
+              </a:spcAft>
+              <a:buSzPct val="100000"/>
+              <a:buChar char="•"/>
+            </a:pPr>
+            <a:r>
+              <a:rPr lang="en-US" sz="1300" dirty="0">
+                <a:solidFill>
+                  <a:srgbClr val="3D3A36"/>
+                </a:solidFill>
+                <a:latin typeface="Calibri" pitchFamily="34" charset="0"/>
+                <a:ea typeface="Calibri" pitchFamily="34" charset="-122"/>
+                <a:cs typeface="Calibri" pitchFamily="34" charset="-120"/>
+              </a:rPr>
+              <a:t>It changes because of the IV</a:t>
+            </a:r>
+            <a:endParaRPr lang="en-US" sz="1300" dirty="0"/>
+          </a:p>
+          <a:p>
+            <a:pPr marL="342900" indent="-342900">
+              <a:spcAft>
+                <a:spcPts val="600"/>
+              </a:spcAft>
+              <a:buSzPct val="100000"/>
+              <a:buChar char="•"/>
+            </a:pPr>
+            <a:r>
+              <a:rPr lang="en-US" sz="1300" dirty="0">
+                <a:solidFill>
+                  <a:srgbClr val="3D3A36"/>
+                </a:solidFill>
+                <a:latin typeface="Calibri" pitchFamily="34" charset="0"/>
+                <a:ea typeface="Calibri" pitchFamily="34" charset="-122"/>
+                <a:cs typeface="Calibri" pitchFamily="34" charset="-120"/>
+              </a:rPr>
+              <a:t>Also called the 'output variable'</a:t>
+            </a:r>
+            <a:endParaRPr lang="en-US" sz="1300" dirty="0"/>
+          </a:p>
+          <a:p>
+            <a:pPr marL="342900" indent="-342900">
+              <a:spcAft>
+                <a:spcPts val="600"/>
+              </a:spcAft>
+              <a:buSzPct val="100000"/>
+              <a:buChar char="•"/>
+            </a:pPr>
+            <a:r>
+              <a:rPr lang="en-US" sz="1300" dirty="0">
+                <a:solidFill>
+                  <a:srgbClr val="3D3A36"/>
+                </a:solidFill>
+                <a:latin typeface="Calibri" pitchFamily="34" charset="0"/>
+                <a:ea typeface="Calibri" pitchFamily="34" charset="-122"/>
+                <a:cs typeface="Calibri" pitchFamily="34" charset="-120"/>
+              </a:rPr>
+              <a:t>Example: how tall the plant grows</a:t>
+            </a:r>
+            <a:endParaRPr lang="en-US" sz="1300" dirty="0"/>
+          </a:p>
+        </p:txBody>
+      </p:sp>
+      <p:sp>
+        <p:nvSpPr>
+          <p:cNvPr id="10" name="Text 8"/>
+          <p:cNvSpPr/>
+          <p:nvPr/>
+        </p:nvSpPr>
+        <p:spPr>
+          <a:xfrm>
+            <a:off x="548640" y="4800600"/>
+            <a:ext cx="3657600" cy="274320"/>
+          </a:xfrm>
+          <a:prstGeom prst="rect">
+            <a:avLst/>
+          </a:prstGeom>
+          <a:noFill/>
+          <a:ln/>
+        </p:spPr>
+        <p:txBody>
+          <a:bodyPr wrap="square" rtlCol="0" anchor="ctr"/>
+          <a:lstStyle/>
+          <a:p>
+            <a:pPr indent="0" marL="0">
+              <a:buNone/>
+            </a:pPr>
+            <a:r>
+              <a:rPr lang="en-US" sz="800" dirty="0">
+                <a:solidFill>
+                  <a:srgbClr val="9B9690"/>
+                </a:solidFill>
+              </a:rPr>
+              <a:t>mrzocchi.com</a:t>
+            </a:r>
+            <a:endParaRPr lang="en-US" sz="800" dirty="0"/>
           </a:p>
         </p:txBody>
       </p:sp>
@@ -1779,6 +2103,13 @@
 <file path=ppt/slides/slide4.xml><?xml version="1.0" encoding="utf-8"?>
 <p:sld xmlns:a="http://schemas.openxmlformats.org/drawingml/2006/main" xmlns:r="http://schemas.openxmlformats.org/officeDocument/2006/relationships" xmlns:p="http://schemas.openxmlformats.org/presentationml/2006/main">
   <p:cSld name="Slide 4">
+    <p:bg>
+      <p:bgPr>
+        <a:solidFill>
+          <a:srgbClr val="FFFFFF"/>
+        </a:solidFill>
+      </p:bgPr>
+    </p:bg>
     <p:spTree>
       <p:nvGrpSpPr>
         <p:cNvPr id="1" name=""/>
@@ -1802,13 +2133,13 @@
         <p:spPr>
           <a:xfrm>
             <a:off x="0" y="0"/>
-            <a:ext cx="9144000" cy="548640"/>
-          </a:xfrm>
-          <a:prstGeom prst="rect">
-            <a:avLst/>
-          </a:prstGeom>
-          <a:solidFill>
-            <a:srgbClr val="1A7A6F"/>
+            <a:ext cx="9144000" cy="54864"/>
+          </a:xfrm>
+          <a:prstGeom prst="rect">
+            <a:avLst/>
+          </a:prstGeom>
+          <a:solidFill>
+            <a:srgbClr val="2A9D8F"/>
           </a:solidFill>
           <a:ln/>
         </p:spPr>
@@ -1821,8 +2152,8 @@
         </p:nvSpPr>
         <p:spPr>
           <a:xfrm>
-            <a:off x="457200" y="45720"/>
-            <a:ext cx="8229600" cy="457200"/>
+            <a:off x="548640" y="274320"/>
+            <a:ext cx="8046720" cy="640080"/>
           </a:xfrm>
           <a:prstGeom prst="rect">
             <a:avLst/>
@@ -1831,125 +2162,207 @@
           <a:ln/>
         </p:spPr>
         <p:txBody>
-          <a:bodyPr wrap="square" rtlCol="0" anchor="ctr"/>
+          <a:bodyPr wrap="square" lIns="0" tIns="0" rIns="0" bIns="0" rtlCol="0" anchor="ctr"/>
           <a:lstStyle/>
           <a:p>
             <a:pPr indent="0" marL="0">
               <a:buNone/>
             </a:pPr>
             <a:r>
-              <a:rPr lang="en-US" sz="1800" b="1" dirty="0">
-                <a:solidFill>
-                  <a:srgbClr val="FFFFFF"/>
+              <a:rPr lang="en-US" sz="2600" b="1" dirty="0">
+                <a:solidFill>
+                  <a:srgbClr val="1B2A4A"/>
+                </a:solidFill>
+                <a:latin typeface="Georgia" pitchFamily="34" charset="0"/>
+                <a:ea typeface="Georgia" pitchFamily="34" charset="-122"/>
+                <a:cs typeface="Georgia" pitchFamily="34" charset="-120"/>
+              </a:rPr>
+              <a:t>Control Variables</a:t>
+            </a:r>
+            <a:endParaRPr lang="en-US" sz="2600" dirty="0"/>
+          </a:p>
+        </p:txBody>
+      </p:sp>
+      <p:sp>
+        <p:nvSpPr>
+          <p:cNvPr id="4" name="Text 2"/>
+          <p:cNvSpPr/>
+          <p:nvPr/>
+        </p:nvSpPr>
+        <p:spPr>
+          <a:xfrm>
+            <a:off x="548640" y="1097280"/>
+            <a:ext cx="8046720" cy="3474720"/>
+          </a:xfrm>
+          <a:prstGeom prst="rect">
+            <a:avLst/>
+          </a:prstGeom>
+          <a:noFill/>
+          <a:ln/>
+        </p:spPr>
+        <p:txBody>
+          <a:bodyPr wrap="square" rtlCol="0" anchor="t"/>
+          <a:lstStyle/>
+          <a:p>
+            <a:pPr marL="342900" indent="-342900">
+              <a:spcAft>
+                <a:spcPts val="800"/>
+              </a:spcAft>
+              <a:buSzPct val="100000"/>
+              <a:buChar char="•"/>
+            </a:pPr>
+            <a:r>
+              <a:rPr lang="en-US" sz="1500" dirty="0">
+                <a:solidFill>
+                  <a:srgbClr val="3D3A36"/>
                 </a:solidFill>
                 <a:latin typeface="Calibri" pitchFamily="34" charset="0"/>
                 <a:ea typeface="Calibri" pitchFamily="34" charset="-122"/>
                 <a:cs typeface="Calibri" pitchFamily="34" charset="-120"/>
               </a:rPr>
-              <a:t>Dependent variable (DV)</a:t>
-            </a:r>
-            <a:endParaRPr lang="en-US" sz="1800" dirty="0"/>
-          </a:p>
-        </p:txBody>
-      </p:sp>
-      <p:sp>
-        <p:nvSpPr>
-          <p:cNvPr id="4" name="Text 2"/>
-          <p:cNvSpPr/>
-          <p:nvPr/>
-        </p:nvSpPr>
-        <p:spPr>
-          <a:xfrm>
-            <a:off x="731520" y="1097280"/>
-            <a:ext cx="7680960" cy="3200400"/>
-          </a:xfrm>
-          <a:prstGeom prst="rect">
-            <a:avLst/>
-          </a:prstGeom>
-          <a:noFill/>
-          <a:ln/>
-        </p:spPr>
-        <p:txBody>
-          <a:bodyPr wrap="square" rtlCol="0" anchor="ctr"/>
-          <a:lstStyle/>
-          <a:p>
-            <a:pPr indent="0" marL="0">
-              <a:buNone/>
-            </a:pPr>
-            <a:r>
-              <a:rPr lang="en-US" sz="1600" dirty="0">
-                <a:solidFill>
-                  <a:srgbClr val="363636"/>
+              <a:t>Everything you keep the SAME to make the test fair</a:t>
+            </a:r>
+            <a:endParaRPr lang="en-US" sz="1500" dirty="0"/>
+          </a:p>
+          <a:p>
+            <a:pPr marL="342900" indent="-342900">
+              <a:spcAft>
+                <a:spcPts val="800"/>
+              </a:spcAft>
+              <a:buSzPct val="100000"/>
+              <a:buChar char="•"/>
+            </a:pPr>
+            <a:r>
+              <a:rPr lang="en-US" sz="1500" dirty="0">
+                <a:solidFill>
+                  <a:srgbClr val="3D3A36"/>
                 </a:solidFill>
                 <a:latin typeface="Calibri" pitchFamily="34" charset="0"/>
                 <a:ea typeface="Calibri" pitchFamily="34" charset="-122"/>
                 <a:cs typeface="Calibri" pitchFamily="34" charset="-120"/>
               </a:rPr>
-              <a:t>Content for: Dependent variable (DV)</a:t>
-            </a:r>
-            <a:endParaRPr lang="en-US" sz="1600" dirty="0"/>
-          </a:p>
-          <a:p>
-            <a:pPr indent="0" marL="0">
-              <a:buNone/>
-            </a:pPr>
-            <a:endParaRPr lang="en-US" sz="1600" dirty="0"/>
-          </a:p>
-          <a:p>
-            <a:pPr indent="0" marL="0">
-              <a:buNone/>
-            </a:pPr>
-            <a:r>
-              <a:rPr lang="en-US" sz="1600" dirty="0">
-                <a:solidFill>
-                  <a:srgbClr val="363636"/>
+              <a:t>If you don't control them, you won't know what caused the result</a:t>
+            </a:r>
+            <a:endParaRPr lang="en-US" sz="1500" dirty="0"/>
+          </a:p>
+          <a:p>
+            <a:pPr marL="342900" indent="-342900">
+              <a:spcAft>
+                <a:spcPts val="800"/>
+              </a:spcAft>
+              <a:buSzPct val="100000"/>
+              <a:buChar char="•"/>
+            </a:pPr>
+            <a:r>
+              <a:rPr lang="en-US" sz="1500" dirty="0">
+                <a:solidFill>
+                  <a:srgbClr val="3D3A36"/>
                 </a:solidFill>
                 <a:latin typeface="Calibri" pitchFamily="34" charset="0"/>
                 <a:ea typeface="Calibri" pitchFamily="34" charset="-122"/>
                 <a:cs typeface="Calibri" pitchFamily="34" charset="-120"/>
               </a:rPr>
-              <a:t>Key points will be covered in class.</a:t>
-            </a:r>
-            <a:endParaRPr lang="en-US" sz="1600" dirty="0"/>
-          </a:p>
-        </p:txBody>
-      </p:sp>
-      <p:sp>
-        <p:nvSpPr>
-          <p:cNvPr id="5" name="Text 3"/>
-          <p:cNvSpPr/>
-          <p:nvPr/>
-        </p:nvSpPr>
-        <p:spPr>
-          <a:xfrm>
-            <a:off x="7772400" y="4663440"/>
-            <a:ext cx="1097280" cy="365760"/>
-          </a:xfrm>
-          <a:prstGeom prst="rect">
-            <a:avLst/>
-          </a:prstGeom>
-          <a:noFill/>
-          <a:ln/>
-        </p:spPr>
-        <p:txBody>
-          <a:bodyPr wrap="square" rtlCol="0" anchor="ctr"/>
-          <a:lstStyle/>
-          <a:p>
-            <a:pPr algn="r" indent="0" marL="0">
-              <a:buNone/>
-            </a:pPr>
-            <a:r>
-              <a:rPr lang="en-US" sz="1000" dirty="0">
-                <a:solidFill>
-                  <a:srgbClr val="999999"/>
+              <a:t>Example: same soil type, same light, same pot size</a:t>
+            </a:r>
+            <a:endParaRPr lang="en-US" sz="1500" dirty="0"/>
+          </a:p>
+          <a:p>
+            <a:pPr marL="342900" indent="-342900">
+              <a:spcAft>
+                <a:spcPts val="800"/>
+              </a:spcAft>
+              <a:buSzPct val="100000"/>
+              <a:buChar char="•"/>
+            </a:pPr>
+            <a:r>
+              <a:rPr lang="en-US" sz="1500" dirty="0">
+                <a:solidFill>
+                  <a:srgbClr val="3D3A36"/>
                 </a:solidFill>
                 <a:latin typeface="Calibri" pitchFamily="34" charset="0"/>
                 <a:ea typeface="Calibri" pitchFamily="34" charset="-122"/>
                 <a:cs typeface="Calibri" pitchFamily="34" charset="-120"/>
               </a:rPr>
-              <a:t>4 / 6</a:t>
-            </a:r>
-            <a:endParaRPr lang="en-US" sz="1000" dirty="0"/>
+              <a:t>Also called 'constant variables'</a:t>
+            </a:r>
+            <a:endParaRPr lang="en-US" sz="1500" dirty="0"/>
+          </a:p>
+          <a:p>
+            <a:pPr marL="342900" indent="-342900">
+              <a:spcAft>
+                <a:spcPts val="800"/>
+              </a:spcAft>
+              <a:buSzPct val="100000"/>
+              <a:buChar char="•"/>
+            </a:pPr>
+            <a:r>
+              <a:rPr lang="en-US" sz="1500" dirty="0">
+                <a:solidFill>
+                  <a:srgbClr val="3D3A36"/>
+                </a:solidFill>
+                <a:latin typeface="Calibri" pitchFamily="34" charset="0"/>
+                <a:ea typeface="Calibri" pitchFamily="34" charset="-122"/>
+                <a:cs typeface="Calibri" pitchFamily="34" charset="-120"/>
+              </a:rPr>
+              <a:t>A fair test = only ONE variable changes (the IV)</a:t>
+            </a:r>
+            <a:endParaRPr lang="en-US" sz="1500" dirty="0"/>
+          </a:p>
+        </p:txBody>
+      </p:sp>
+      <p:sp>
+        <p:nvSpPr>
+          <p:cNvPr id="5" name="Shape 3"/>
+          <p:cNvSpPr/>
+          <p:nvPr/>
+        </p:nvSpPr>
+        <p:spPr>
+          <a:xfrm>
+            <a:off x="548640" y="4754880"/>
+            <a:ext cx="8046720" cy="9144"/>
+          </a:xfrm>
+          <a:prstGeom prst="rect">
+            <a:avLst/>
+          </a:prstGeom>
+          <a:solidFill>
+            <a:srgbClr val="F3F1EE"/>
+          </a:solidFill>
+          <a:ln/>
+        </p:spPr>
+      </p:sp>
+      <p:sp>
+        <p:nvSpPr>
+          <p:cNvPr id="6" name="Text 4"/>
+          <p:cNvSpPr/>
+          <p:nvPr/>
+        </p:nvSpPr>
+        <p:spPr>
+          <a:xfrm>
+            <a:off x="548640" y="4800600"/>
+            <a:ext cx="3657600" cy="274320"/>
+          </a:xfrm>
+          <a:prstGeom prst="rect">
+            <a:avLst/>
+          </a:prstGeom>
+          <a:noFill/>
+          <a:ln/>
+        </p:spPr>
+        <p:txBody>
+          <a:bodyPr wrap="square" rtlCol="0" anchor="ctr"/>
+          <a:lstStyle/>
+          <a:p>
+            <a:pPr indent="0" marL="0">
+              <a:buNone/>
+            </a:pPr>
+            <a:r>
+              <a:rPr lang="en-US" sz="800" dirty="0">
+                <a:solidFill>
+                  <a:srgbClr val="9B9690"/>
+                </a:solidFill>
+              </a:rPr>
+              <a:t>mrzocchi.com</a:t>
+            </a:r>
+            <a:endParaRPr lang="en-US" sz="800" dirty="0"/>
           </a:p>
         </p:txBody>
       </p:sp>
@@ -1964,6 +2377,13 @@
 <file path=ppt/slides/slide5.xml><?xml version="1.0" encoding="utf-8"?>
 <p:sld xmlns:a="http://schemas.openxmlformats.org/drawingml/2006/main" xmlns:r="http://schemas.openxmlformats.org/officeDocument/2006/relationships" xmlns:p="http://schemas.openxmlformats.org/presentationml/2006/main">
   <p:cSld name="Slide 5">
+    <p:bg>
+      <p:bgPr>
+        <a:solidFill>
+          <a:srgbClr val="1B2A4A"/>
+        </a:solidFill>
+      </p:bgPr>
+    </p:bg>
     <p:spTree>
       <p:nvGrpSpPr>
         <p:cNvPr id="1" name=""/>
@@ -1987,13 +2407,13 @@
         <p:spPr>
           <a:xfrm>
             <a:off x="0" y="0"/>
-            <a:ext cx="9144000" cy="548640"/>
-          </a:xfrm>
-          <a:prstGeom prst="rect">
-            <a:avLst/>
-          </a:prstGeom>
-          <a:solidFill>
-            <a:srgbClr val="1A7A6F"/>
+            <a:ext cx="9144000" cy="54864"/>
+          </a:xfrm>
+          <a:prstGeom prst="rect">
+            <a:avLst/>
+          </a:prstGeom>
+          <a:solidFill>
+            <a:srgbClr val="2A9D8F"/>
           </a:solidFill>
           <a:ln/>
         </p:spPr>
@@ -2006,8 +2426,8 @@
         </p:nvSpPr>
         <p:spPr>
           <a:xfrm>
-            <a:off x="457200" y="45720"/>
-            <a:ext cx="8229600" cy="457200"/>
+            <a:off x="548640" y="457200"/>
+            <a:ext cx="8046720" cy="640080"/>
           </a:xfrm>
           <a:prstGeom prst="rect">
             <a:avLst/>
@@ -2023,77 +2443,121 @@
               <a:buNone/>
             </a:pPr>
             <a:r>
-              <a:rPr lang="en-US" sz="1800" b="1" dirty="0">
+              <a:rPr lang="en-US" sz="2800" b="1" dirty="0">
                 <a:solidFill>
                   <a:srgbClr val="FFFFFF"/>
+                </a:solidFill>
+                <a:latin typeface="Georgia" pitchFamily="34" charset="0"/>
+                <a:ea typeface="Georgia" pitchFamily="34" charset="-122"/>
+                <a:cs typeface="Georgia" pitchFamily="34" charset="-120"/>
+              </a:rPr>
+              <a:t>Key Takeaways</a:t>
+            </a:r>
+            <a:endParaRPr lang="en-US" sz="2800" dirty="0"/>
+          </a:p>
+        </p:txBody>
+      </p:sp>
+      <p:sp>
+        <p:nvSpPr>
+          <p:cNvPr id="4" name="Text 2"/>
+          <p:cNvSpPr/>
+          <p:nvPr/>
+        </p:nvSpPr>
+        <p:spPr>
+          <a:xfrm>
+            <a:off x="731520" y="1371600"/>
+            <a:ext cx="7680960" cy="3200400"/>
+          </a:xfrm>
+          <a:prstGeom prst="rect">
+            <a:avLst/>
+          </a:prstGeom>
+          <a:noFill/>
+          <a:ln/>
+        </p:spPr>
+        <p:txBody>
+          <a:bodyPr wrap="square" rtlCol="0" anchor="t"/>
+          <a:lstStyle/>
+          <a:p>
+            <a:pPr marL="342900" indent="-342900">
+              <a:spcAft>
+                <a:spcPts val="1000"/>
+              </a:spcAft>
+              <a:buSzPct val="100000"/>
+              <a:buChar char="•"/>
+            </a:pPr>
+            <a:r>
+              <a:rPr lang="en-US" sz="1600" dirty="0">
+                <a:solidFill>
+                  <a:srgbClr val="CADCFC"/>
                 </a:solidFill>
                 <a:latin typeface="Calibri" pitchFamily="34" charset="0"/>
                 <a:ea typeface="Calibri" pitchFamily="34" charset="-122"/>
                 <a:cs typeface="Calibri" pitchFamily="34" charset="-120"/>
               </a:rPr>
-              <a:t>Controlled variables</a:t>
-            </a:r>
-            <a:endParaRPr lang="en-US" sz="1800" dirty="0"/>
-          </a:p>
-        </p:txBody>
-      </p:sp>
-      <p:sp>
-        <p:nvSpPr>
-          <p:cNvPr id="4" name="Text 2"/>
-          <p:cNvSpPr/>
-          <p:nvPr/>
-        </p:nvSpPr>
-        <p:spPr>
-          <a:xfrm>
-            <a:off x="731520" y="1097280"/>
-            <a:ext cx="7680960" cy="3200400"/>
-          </a:xfrm>
-          <a:prstGeom prst="rect">
-            <a:avLst/>
-          </a:prstGeom>
-          <a:noFill/>
-          <a:ln/>
-        </p:spPr>
-        <p:txBody>
-          <a:bodyPr wrap="square" rtlCol="0" anchor="ctr"/>
-          <a:lstStyle/>
-          <a:p>
-            <a:pPr indent="0" marL="0">
-              <a:buNone/>
+              <a:t>IV = what you change, DV = what you measure, CV = what you keep the same</a:t>
+            </a:r>
+            <a:endParaRPr lang="en-US" sz="1600" dirty="0"/>
+          </a:p>
+          <a:p>
+            <a:pPr marL="342900" indent="-342900">
+              <a:spcAft>
+                <a:spcPts val="1000"/>
+              </a:spcAft>
+              <a:buSzPct val="100000"/>
+              <a:buChar char="•"/>
             </a:pPr>
             <a:r>
               <a:rPr lang="en-US" sz="1600" dirty="0">
                 <a:solidFill>
-                  <a:srgbClr val="363636"/>
+                  <a:srgbClr val="CADCFC"/>
                 </a:solidFill>
                 <a:latin typeface="Calibri" pitchFamily="34" charset="0"/>
                 <a:ea typeface="Calibri" pitchFamily="34" charset="-122"/>
                 <a:cs typeface="Calibri" pitchFamily="34" charset="-120"/>
               </a:rPr>
-              <a:t>Content for: Controlled variables</a:t>
+              <a:t>A fair test changes only ONE variable</a:t>
             </a:r>
             <a:endParaRPr lang="en-US" sz="1600" dirty="0"/>
           </a:p>
           <a:p>
-            <a:pPr indent="0" marL="0">
-              <a:buNone/>
-            </a:pPr>
-            <a:endParaRPr lang="en-US" sz="1600" dirty="0"/>
-          </a:p>
-          <a:p>
-            <a:pPr indent="0" marL="0">
-              <a:buNone/>
+            <a:pPr marL="342900" indent="-342900">
+              <a:spcAft>
+                <a:spcPts val="1000"/>
+              </a:spcAft>
+              <a:buSzPct val="100000"/>
+              <a:buChar char="•"/>
             </a:pPr>
             <a:r>
               <a:rPr lang="en-US" sz="1600" dirty="0">
                 <a:solidFill>
-                  <a:srgbClr val="363636"/>
+                  <a:srgbClr val="CADCFC"/>
                 </a:solidFill>
                 <a:latin typeface="Calibri" pitchFamily="34" charset="0"/>
                 <a:ea typeface="Calibri" pitchFamily="34" charset="-122"/>
                 <a:cs typeface="Calibri" pitchFamily="34" charset="-120"/>
               </a:rPr>
-              <a:t>Key points will be covered in class.</a:t>
+              <a:t>Control variables make your results reliable</a:t>
+            </a:r>
+            <a:endParaRPr lang="en-US" sz="1600" dirty="0"/>
+          </a:p>
+          <a:p>
+            <a:pPr marL="342900" indent="-342900">
+              <a:spcAft>
+                <a:spcPts val="1000"/>
+              </a:spcAft>
+              <a:buSzPct val="100000"/>
+              <a:buChar char="•"/>
+            </a:pPr>
+            <a:r>
+              <a:rPr lang="en-US" sz="1600" dirty="0">
+                <a:solidFill>
+                  <a:srgbClr val="CADCFC"/>
+                </a:solidFill>
+                <a:latin typeface="Calibri" pitchFamily="34" charset="0"/>
+                <a:ea typeface="Calibri" pitchFamily="34" charset="-122"/>
+                <a:cs typeface="Calibri" pitchFamily="34" charset="-120"/>
+              </a:rPr>
+              <a:t>Always identify all three types before starting an experiment</a:t>
             </a:r>
             <a:endParaRPr lang="en-US" sz="1600" dirty="0"/>
           </a:p>
@@ -2107,8 +2571,8 @@
         </p:nvSpPr>
         <p:spPr>
           <a:xfrm>
-            <a:off x="7772400" y="4663440"/>
-            <a:ext cx="1097280" cy="365760"/>
+            <a:off x="548640" y="4572000"/>
+            <a:ext cx="3657600" cy="274320"/>
           </a:xfrm>
           <a:prstGeom prst="rect">
             <a:avLst/>
@@ -2120,204 +2584,16 @@
           <a:bodyPr wrap="square" rtlCol="0" anchor="ctr"/>
           <a:lstStyle/>
           <a:p>
-            <a:pPr algn="r" indent="0" marL="0">
-              <a:buNone/>
-            </a:pPr>
-            <a:r>
-              <a:rPr lang="en-US" sz="1000" dirty="0">
-                <a:solidFill>
-                  <a:srgbClr val="999999"/>
-                </a:solidFill>
-                <a:latin typeface="Calibri" pitchFamily="34" charset="0"/>
-                <a:ea typeface="Calibri" pitchFamily="34" charset="-122"/>
-                <a:cs typeface="Calibri" pitchFamily="34" charset="-120"/>
-              </a:rPr>
-              <a:t>5 / 6</a:t>
-            </a:r>
-            <a:endParaRPr lang="en-US" sz="1000" dirty="0"/>
-          </a:p>
-        </p:txBody>
-      </p:sp>
-    </p:spTree>
-  </p:cSld>
-  <p:clrMapOvr>
-    <a:masterClrMapping/>
-  </p:clrMapOvr>
-</p:sld>
-</file>
-
-<file path=ppt/slides/slide6.xml><?xml version="1.0" encoding="utf-8"?>
-<p:sld xmlns:a="http://schemas.openxmlformats.org/drawingml/2006/main" xmlns:r="http://schemas.openxmlformats.org/officeDocument/2006/relationships" xmlns:p="http://schemas.openxmlformats.org/presentationml/2006/main">
-  <p:cSld name="Slide 6">
-    <p:spTree>
-      <p:nvGrpSpPr>
-        <p:cNvPr id="1" name=""/>
-        <p:cNvGrpSpPr/>
-        <p:nvPr/>
-      </p:nvGrpSpPr>
-      <p:grpSpPr>
-        <a:xfrm>
-          <a:off x="0" y="0"/>
-          <a:ext cx="0" cy="0"/>
-          <a:chOff x="0" y="0"/>
-          <a:chExt cx="0" cy="0"/>
-        </a:xfrm>
-      </p:grpSpPr>
-      <p:sp>
-        <p:nvSpPr>
-          <p:cNvPr id="2" name="Shape 0"/>
-          <p:cNvSpPr/>
-          <p:nvPr/>
-        </p:nvSpPr>
-        <p:spPr>
-          <a:xfrm>
-            <a:off x="0" y="0"/>
-            <a:ext cx="9144000" cy="548640"/>
-          </a:xfrm>
-          <a:prstGeom prst="rect">
-            <a:avLst/>
-          </a:prstGeom>
-          <a:solidFill>
-            <a:srgbClr val="1A7A6F"/>
-          </a:solidFill>
-          <a:ln/>
-        </p:spPr>
-      </p:sp>
-      <p:sp>
-        <p:nvSpPr>
-          <p:cNvPr id="3" name="Text 1"/>
-          <p:cNvSpPr/>
-          <p:nvPr/>
-        </p:nvSpPr>
-        <p:spPr>
-          <a:xfrm>
-            <a:off x="457200" y="45720"/>
-            <a:ext cx="8229600" cy="457200"/>
-          </a:xfrm>
-          <a:prstGeom prst="rect">
-            <a:avLst/>
-          </a:prstGeom>
-          <a:noFill/>
-          <a:ln/>
-        </p:spPr>
-        <p:txBody>
-          <a:bodyPr wrap="square" rtlCol="0" anchor="ctr"/>
-          <a:lstStyle/>
-          <a:p>
             <a:pPr indent="0" marL="0">
               <a:buNone/>
             </a:pPr>
             <a:r>
-              <a:rPr lang="en-US" sz="1800" b="1" dirty="0">
-                <a:solidFill>
-                  <a:srgbClr val="FFFFFF"/>
-                </a:solidFill>
-                <a:latin typeface="Calibri" pitchFamily="34" charset="0"/>
-                <a:ea typeface="Calibri" pitchFamily="34" charset="-122"/>
-                <a:cs typeface="Calibri" pitchFamily="34" charset="-120"/>
-              </a:rPr>
-              <a:t>Fair test checklist</a:t>
-            </a:r>
-            <a:endParaRPr lang="en-US" sz="1800" dirty="0"/>
-          </a:p>
-        </p:txBody>
-      </p:sp>
-      <p:sp>
-        <p:nvSpPr>
-          <p:cNvPr id="4" name="Text 2"/>
-          <p:cNvSpPr/>
-          <p:nvPr/>
-        </p:nvSpPr>
-        <p:spPr>
-          <a:xfrm>
-            <a:off x="731520" y="1097280"/>
-            <a:ext cx="7680960" cy="3200400"/>
-          </a:xfrm>
-          <a:prstGeom prst="rect">
-            <a:avLst/>
-          </a:prstGeom>
-          <a:noFill/>
-          <a:ln/>
-        </p:spPr>
-        <p:txBody>
-          <a:bodyPr wrap="square" rtlCol="0" anchor="ctr"/>
-          <a:lstStyle/>
-          <a:p>
-            <a:pPr indent="0" marL="0">
-              <a:buNone/>
-            </a:pPr>
-            <a:r>
-              <a:rPr lang="en-US" sz="1600" dirty="0">
-                <a:solidFill>
-                  <a:srgbClr val="363636"/>
-                </a:solidFill>
-                <a:latin typeface="Calibri" pitchFamily="34" charset="0"/>
-                <a:ea typeface="Calibri" pitchFamily="34" charset="-122"/>
-                <a:cs typeface="Calibri" pitchFamily="34" charset="-120"/>
-              </a:rPr>
-              <a:t>Content for: Fair test checklist</a:t>
-            </a:r>
-            <a:endParaRPr lang="en-US" sz="1600" dirty="0"/>
-          </a:p>
-          <a:p>
-            <a:pPr indent="0" marL="0">
-              <a:buNone/>
-            </a:pPr>
-            <a:endParaRPr lang="en-US" sz="1600" dirty="0"/>
-          </a:p>
-          <a:p>
-            <a:pPr indent="0" marL="0">
-              <a:buNone/>
-            </a:pPr>
-            <a:r>
-              <a:rPr lang="en-US" sz="1600" dirty="0">
-                <a:solidFill>
-                  <a:srgbClr val="363636"/>
-                </a:solidFill>
-                <a:latin typeface="Calibri" pitchFamily="34" charset="0"/>
-                <a:ea typeface="Calibri" pitchFamily="34" charset="-122"/>
-                <a:cs typeface="Calibri" pitchFamily="34" charset="-120"/>
-              </a:rPr>
-              <a:t>Key points will be covered in class.</a:t>
-            </a:r>
-            <a:endParaRPr lang="en-US" sz="1600" dirty="0"/>
-          </a:p>
-        </p:txBody>
-      </p:sp>
-      <p:sp>
-        <p:nvSpPr>
-          <p:cNvPr id="5" name="Text 3"/>
-          <p:cNvSpPr/>
-          <p:nvPr/>
-        </p:nvSpPr>
-        <p:spPr>
-          <a:xfrm>
-            <a:off x="7772400" y="4663440"/>
-            <a:ext cx="1097280" cy="365760"/>
-          </a:xfrm>
-          <a:prstGeom prst="rect">
-            <a:avLst/>
-          </a:prstGeom>
-          <a:noFill/>
-          <a:ln/>
-        </p:spPr>
-        <p:txBody>
-          <a:bodyPr wrap="square" rtlCol="0" anchor="ctr"/>
-          <a:lstStyle/>
-          <a:p>
-            <a:pPr algn="r" indent="0" marL="0">
-              <a:buNone/>
-            </a:pPr>
-            <a:r>
               <a:rPr lang="en-US" sz="1000" dirty="0">
                 <a:solidFill>
-                  <a:srgbClr val="999999"/>
-                </a:solidFill>
-                <a:latin typeface="Calibri" pitchFamily="34" charset="0"/>
-                <a:ea typeface="Calibri" pitchFamily="34" charset="-122"/>
-                <a:cs typeface="Calibri" pitchFamily="34" charset="-120"/>
-              </a:rPr>
-              <a:t>6 / 6</a:t>
+                  <a:srgbClr val="6B6660"/>
+                </a:solidFill>
+              </a:rPr>
+              <a:t>mrzocchi.com</a:t>
             </a:r>
             <a:endParaRPr lang="en-US" sz="1000" dirty="0"/>
           </a:p>

--- a/static/ppts/G6_Sci_T1_Variables.pptx
+++ b/static/ppts/G6_Sci_T1_Variables.pptx
@@ -10,9 +10,10 @@
     <p:sldId id="258" r:id="rId4"/>
     <p:sldId id="259" r:id="rId5"/>
     <p:sldId id="260" r:id="rId6"/>
+    <p:sldId id="261" r:id="rId7"/>
   </p:sldIdLst>
   <p:notesMasterIdLst>
-    <p:notesMasterId r:id="rId7"/>
+    <p:notesMasterId r:id="rId8"/>
   </p:notesMasterIdLst>
   <p:sldSz cx="9144000" cy="5143500"/>
   <p:notesSz cx="5143500" cy="9144000"/>
@@ -900,6 +901,94 @@
 </p:notes>
 </file>
 
+<file path=ppt/notesSlides/notesSlide6.xml><?xml version="1.0" encoding="utf-8"?>
+<p:notes xmlns:a="http://schemas.openxmlformats.org/drawingml/2006/main" xmlns:r="http://schemas.openxmlformats.org/officeDocument/2006/relationships" xmlns:p="http://schemas.openxmlformats.org/presentationml/2006/main">
+  <p:cSld>
+    <p:spTree>
+      <p:nvGrpSpPr>
+        <p:cNvPr id="1" name=""/>
+        <p:cNvGrpSpPr/>
+        <p:nvPr/>
+      </p:nvGrpSpPr>
+      <p:grpSpPr>
+        <a:xfrm>
+          <a:off x="0" y="0"/>
+          <a:ext cx="0" cy="0"/>
+          <a:chOff x="0" y="0"/>
+          <a:chExt cx="0" cy="0"/>
+        </a:xfrm>
+      </p:grpSpPr>
+      <p:sp>
+        <p:nvSpPr>
+          <p:cNvPr id="2" name="Slide Image Placeholder 1"/>
+          <p:cNvSpPr>
+            <a:spLocks noGrp="1" noRot="1" noChangeAspect="1"/>
+          </p:cNvSpPr>
+          <p:nvPr>
+            <p:ph type="sldImg"/>
+          </p:nvPr>
+        </p:nvSpPr>
+        <p:spPr/>
+      </p:sp>
+      <p:sp>
+        <p:nvSpPr>
+          <p:cNvPr id="3" name="Notes Placeholder 2"/>
+          <p:cNvSpPr>
+            <a:spLocks noGrp="1"/>
+          </p:cNvSpPr>
+          <p:nvPr>
+            <p:ph type="body" idx="1"/>
+          </p:nvPr>
+        </p:nvSpPr>
+        <p:spPr/>
+        <p:txBody>
+          <a:bodyPr/>
+          <a:lstStyle/>
+          <a:p>
+            <a:r>
+              <a:rPr lang="en-US" dirty="0"/>
+              <a:t/>
+            </a:r>
+            <a:endParaRPr lang="en-US" dirty="0"/>
+          </a:p>
+        </p:txBody>
+      </p:sp>
+      <p:sp>
+        <p:nvSpPr>
+          <p:cNvPr id="4" name="Slide Number Placeholder 3"/>
+          <p:cNvSpPr>
+            <a:spLocks noGrp="1"/>
+          </p:cNvSpPr>
+          <p:nvPr>
+            <p:ph type="sldNum" sz="quarter" idx="10"/>
+          </p:nvPr>
+        </p:nvSpPr>
+        <p:spPr/>
+        <p:txBody>
+          <a:bodyPr/>
+          <a:lstStyle/>
+          <a:p>
+            <a:fld id="{F7021451-1387-4CA6-816F-3879F97B5CBC}" type="slidenum">
+              <a:rPr lang="en-US"/>
+              <a:t>6</a:t>
+            </a:fld>
+            <a:endParaRPr lang="en-US"/>
+          </a:p>
+        </p:txBody>
+      </p:sp>
+    </p:spTree>
+    <p:extLst>
+      <p:ext uri="{BB962C8B-B14F-4D97-AF65-F5344CB8AC3E}">
+        <p14:creationId xmlns:p14="http://schemas.microsoft.com/office/powerpoint/2010/main" val="1024086991"/>
+      </p:ext>
+    </p:extLst>
+  </p:cSld>
+  <p:clrMapOvr>
+    <a:masterClrMapping/>
+  </p:clrMapOvr>
+</p:notes>
+</file>
+
 <file path=ppt/slideLayouts/slideLayout1.xml><?xml version="1.0" encoding="utf-8"?>
 <p:sldLayout xmlns:a="http://schemas.openxmlformats.org/drawingml/2006/main" xmlns:r="http://schemas.openxmlformats.org/officeDocument/2006/relationships" xmlns:p="http://schemas.openxmlformats.org/presentationml/2006/main" preserve="1">
   <p:cSld name="DEFAULT">
@@ -1259,7 +1348,7 @@
         </p:nvSpPr>
         <p:spPr>
           <a:xfrm>
-            <a:off x="731520" y="1280160"/>
+            <a:off x="731520" y="1097280"/>
             <a:ext cx="7772400" cy="1371600"/>
           </a:xfrm>
           <a:prstGeom prst="rect">
@@ -1276,7 +1365,7 @@
               <a:buNone/>
             </a:pPr>
             <a:r>
-              <a:rPr lang="en-US" sz="3600" b="1" dirty="0">
+              <a:rPr lang="en-US" sz="4000" b="1" dirty="0">
                 <a:solidFill>
                   <a:srgbClr val="FFFFFF"/>
                 </a:solidFill>
@@ -1284,9 +1373,9 @@
                 <a:ea typeface="Georgia" pitchFamily="34" charset="-122"/>
                 <a:cs typeface="Georgia" pitchFamily="34" charset="-120"/>
               </a:rPr>
-              <a:t>Variables</a:t>
-            </a:r>
-            <a:endParaRPr lang="en-US" sz="3600" dirty="0"/>
+              <a:t>Variables in Science</a:t>
+            </a:r>
+            <a:endParaRPr lang="en-US" sz="4000" dirty="0"/>
           </a:p>
         </p:txBody>
       </p:sp>
@@ -1298,7 +1387,7 @@
         </p:nvSpPr>
         <p:spPr>
           <a:xfrm>
-            <a:off x="731520" y="2743200"/>
+            <a:off x="731520" y="2560320"/>
             <a:ext cx="7772400" cy="548640"/>
           </a:xfrm>
           <a:prstGeom prst="rect">
@@ -1317,13 +1406,13 @@
             <a:r>
               <a:rPr lang="en-US" sz="1600" dirty="0">
                 <a:solidFill>
-                  <a:srgbClr val="9B9690"/>
-                </a:solidFill>
-                <a:latin typeface="Calibri" pitchFamily="34" charset="0"/>
-                <a:ea typeface="Calibri" pitchFamily="34" charset="-122"/>
-                <a:cs typeface="Calibri" pitchFamily="34" charset="-120"/>
-              </a:rPr>
-              <a:t>G6 Science · Scientific Skills</a:t>
+                  <a:srgbClr val="E9C46A"/>
+                </a:solidFill>
+                <a:latin typeface="Calibri" pitchFamily="34" charset="0"/>
+                <a:ea typeface="Calibri" pitchFamily="34" charset="-122"/>
+                <a:cs typeface="Calibri" pitchFamily="34" charset="-120"/>
+              </a:rPr>
+              <a:t>Grade 6 Science · Mr Zocchi</a:t>
             </a:r>
             <a:endParaRPr lang="en-US" sz="1600" dirty="0"/>
           </a:p>
@@ -1331,14 +1420,36 @@
       </p:sp>
       <p:sp>
         <p:nvSpPr>
-          <p:cNvPr id="5" name="Text 3"/>
-          <p:cNvSpPr/>
-          <p:nvPr/>
-        </p:nvSpPr>
-        <p:spPr>
-          <a:xfrm>
-            <a:off x="731520" y="4389120"/>
-            <a:ext cx="7772400" cy="457200"/>
+          <p:cNvPr id="5" name="Shape 3"/>
+          <p:cNvSpPr/>
+          <p:nvPr/>
+        </p:nvSpPr>
+        <p:spPr>
+          <a:xfrm>
+            <a:off x="731520" y="3474720"/>
+            <a:ext cx="2011680" cy="411480"/>
+          </a:xfrm>
+          <a:prstGeom prst="roundRect">
+            <a:avLst>
+              <a:gd name="adj" fmla="val 17778"/>
+            </a:avLst>
+          </a:prstGeom>
+          <a:solidFill>
+            <a:srgbClr val="2A9D8F"/>
+          </a:solidFill>
+          <a:ln/>
+        </p:spPr>
+      </p:sp>
+      <p:sp>
+        <p:nvSpPr>
+          <p:cNvPr id="6" name="Text 4"/>
+          <p:cNvSpPr/>
+          <p:nvPr/>
+        </p:nvSpPr>
+        <p:spPr>
+          <a:xfrm>
+            <a:off x="731520" y="3474720"/>
+            <a:ext cx="2011680" cy="411480"/>
           </a:xfrm>
           <a:prstGeom prst="rect">
             <a:avLst/>
@@ -1350,21 +1461,21 @@
           <a:bodyPr wrap="square" rtlCol="0" anchor="ctr"/>
           <a:lstStyle/>
           <a:p>
-            <a:pPr indent="0" marL="0">
+            <a:pPr algn="ctr" indent="0" marL="0">
               <a:buNone/>
             </a:pPr>
             <a:r>
-              <a:rPr lang="en-US" sz="1000" dirty="0">
-                <a:solidFill>
-                  <a:srgbClr val="6B6660"/>
-                </a:solidFill>
-                <a:latin typeface="Calibri" pitchFamily="34" charset="0"/>
-                <a:ea typeface="Calibri" pitchFamily="34" charset="-122"/>
-                <a:cs typeface="Calibri" pitchFamily="34" charset="-120"/>
-              </a:rPr>
-              <a:t>Mr Zocchi · mrzocchi.com</a:t>
-            </a:r>
-            <a:endParaRPr lang="en-US" sz="1000" dirty="0"/>
+              <a:rPr lang="en-US" sz="1200" b="1" dirty="0">
+                <a:solidFill>
+                  <a:srgbClr val="FFFFFF"/>
+                </a:solidFill>
+                <a:latin typeface="Calibri" pitchFamily="34" charset="0"/>
+                <a:ea typeface="Calibri" pitchFamily="34" charset="-122"/>
+                <a:cs typeface="Calibri" pitchFamily="34" charset="-120"/>
+              </a:rPr>
+              <a:t>Term 1 · Scientific Skills</a:t>
+            </a:r>
+            <a:endParaRPr lang="en-US" sz="1200" dirty="0"/>
           </a:p>
         </p:txBody>
       </p:sp>
@@ -1382,7 +1493,7 @@
     <p:bg>
       <p:bgPr>
         <a:solidFill>
-          <a:srgbClr val="FFFFFF"/>
+          <a:srgbClr val="FAF8F5"/>
         </a:solidFill>
       </p:bgPr>
     </p:bg>
@@ -1428,8 +1539,8 @@
         </p:nvSpPr>
         <p:spPr>
           <a:xfrm>
-            <a:off x="548640" y="274320"/>
-            <a:ext cx="8046720" cy="640080"/>
+            <a:off x="7772400" y="4709160"/>
+            <a:ext cx="1097280" cy="320040"/>
           </a:xfrm>
           <a:prstGeom prst="rect">
             <a:avLst/>
@@ -1438,14 +1549,105 @@
           <a:ln/>
         </p:spPr>
         <p:txBody>
-          <a:bodyPr wrap="square" lIns="0" tIns="0" rIns="0" bIns="0" rtlCol="0" anchor="ctr"/>
+          <a:bodyPr wrap="square" rtlCol="0" anchor="ctr"/>
+          <a:lstStyle/>
+          <a:p>
+            <a:pPr algn="r" indent="0" marL="0">
+              <a:buNone/>
+            </a:pPr>
+            <a:r>
+              <a:rPr lang="en-US" sz="900" dirty="0">
+                <a:solidFill>
+                  <a:srgbClr val="6B6660"/>
+                </a:solidFill>
+                <a:latin typeface="Calibri" pitchFamily="34" charset="0"/>
+                <a:ea typeface="Calibri" pitchFamily="34" charset="-122"/>
+                <a:cs typeface="Calibri" pitchFamily="34" charset="-120"/>
+              </a:rPr>
+              <a:t>2 / 6</a:t>
+            </a:r>
+            <a:endParaRPr lang="en-US" sz="900" dirty="0"/>
+          </a:p>
+        </p:txBody>
+      </p:sp>
+      <p:sp>
+        <p:nvSpPr>
+          <p:cNvPr id="4" name="Shape 2"/>
+          <p:cNvSpPr/>
+          <p:nvPr/>
+        </p:nvSpPr>
+        <p:spPr>
+          <a:xfrm>
+            <a:off x="1371600" y="914400"/>
+            <a:ext cx="6400800" cy="3200400"/>
+          </a:xfrm>
+          <a:prstGeom prst="rect">
+            <a:avLst/>
+          </a:prstGeom>
+          <a:solidFill>
+            <a:srgbClr val="FFFFFF"/>
+          </a:solidFill>
+          <a:ln w="12700">
+            <a:solidFill>
+              <a:srgbClr val="E5E2DC"/>
+            </a:solidFill>
+            <a:prstDash val="solid"/>
+          </a:ln>
+          <a:effectLst>
+            <a:outerShdw sx="100000" sy="100000" kx="0" ky="0" algn="bl" rotWithShape="0" blurRad="50800" dist="25400" dir="8100000">
+              <a:srgbClr val="000000">
+                <a:alpha val="10000"/>
+              </a:srgbClr>
+            </a:outerShdw>
+          </a:effectLst>
+        </p:spPr>
+      </p:sp>
+      <p:sp>
+        <p:nvSpPr>
+          <p:cNvPr id="5" name="Shape 3"/>
+          <p:cNvSpPr/>
+          <p:nvPr/>
+        </p:nvSpPr>
+        <p:spPr>
+          <a:xfrm>
+            <a:off x="1371600" y="914400"/>
+            <a:ext cx="91440" cy="3200400"/>
+          </a:xfrm>
+          <a:prstGeom prst="rect">
+            <a:avLst/>
+          </a:prstGeom>
+          <a:solidFill>
+            <a:srgbClr val="2A9D8F"/>
+          </a:solidFill>
+          <a:ln/>
+        </p:spPr>
+      </p:sp>
+      <p:sp>
+        <p:nvSpPr>
+          <p:cNvPr id="6" name="Text 4"/>
+          <p:cNvSpPr/>
+          <p:nvPr/>
+        </p:nvSpPr>
+        <p:spPr>
+          <a:xfrm>
+            <a:off x="1828800" y="1097280"/>
+            <a:ext cx="5669280" cy="640080"/>
+          </a:xfrm>
+          <a:prstGeom prst="rect">
+            <a:avLst/>
+          </a:prstGeom>
+          <a:noFill/>
+          <a:ln/>
+        </p:spPr>
+        <p:txBody>
+          <a:bodyPr wrap="square" rtlCol="0" anchor="ctr"/>
           <a:lstStyle/>
           <a:p>
             <a:pPr indent="0" marL="0">
               <a:buNone/>
             </a:pPr>
             <a:r>
-              <a:rPr lang="en-US" sz="2600" b="1" dirty="0">
+              <a:rPr lang="en-US" sz="2400" b="1" dirty="0">
                 <a:solidFill>
                   <a:srgbClr val="1B2A4A"/>
                 </a:solidFill>
@@ -1455,20 +1657,20 @@
               </a:rPr>
               <a:t>What is a Variable?</a:t>
             </a:r>
-            <a:endParaRPr lang="en-US" sz="2600" dirty="0"/>
-          </a:p>
-        </p:txBody>
-      </p:sp>
-      <p:sp>
-        <p:nvSpPr>
-          <p:cNvPr id="4" name="Text 2"/>
-          <p:cNvSpPr/>
-          <p:nvPr/>
-        </p:nvSpPr>
-        <p:spPr>
-          <a:xfrm>
-            <a:off x="548640" y="1097280"/>
-            <a:ext cx="8046720" cy="3474720"/>
+            <a:endParaRPr lang="en-US" sz="2400" dirty="0"/>
+          </a:p>
+        </p:txBody>
+      </p:sp>
+      <p:sp>
+        <p:nvSpPr>
+          <p:cNvPr id="7" name="Text 5"/>
+          <p:cNvSpPr/>
+          <p:nvPr/>
+        </p:nvSpPr>
+        <p:spPr>
+          <a:xfrm>
+            <a:off x="1828800" y="1828800"/>
+            <a:ext cx="5669280" cy="2011680"/>
           </a:xfrm>
           <a:prstGeom prst="rect">
             <a:avLst/>
@@ -1480,12 +1682,11 @@
           <a:bodyPr wrap="square" rtlCol="0" anchor="t"/>
           <a:lstStyle/>
           <a:p>
-            <a:pPr marL="342900" indent="-342900">
-              <a:spcAft>
-                <a:spcPts val="800"/>
-              </a:spcAft>
-              <a:buSzPct val="100000"/>
-              <a:buChar char="•"/>
+            <a:pPr indent="0" marL="0">
+              <a:lnSpc>
+                <a:spcPct val="130000"/>
+              </a:lnSpc>
+              <a:buNone/>
             </a:pPr>
             <a:r>
               <a:rPr lang="en-US" sz="1500" dirty="0">
@@ -1496,128 +1697,9 @@
                 <a:ea typeface="Calibri" pitchFamily="34" charset="-122"/>
                 <a:cs typeface="Calibri" pitchFamily="34" charset="-120"/>
               </a:rPr>
-              <a:t>A variable is anything that can change in an experiment</a:t>
+              <a:t>A variable is anything in an experiment that can change. To run a fair test, scientists must identify and control variables carefully. There are three types of variables that every scientist must understand.</a:t>
             </a:r>
             <a:endParaRPr lang="en-US" sz="1500" dirty="0"/>
-          </a:p>
-          <a:p>
-            <a:pPr marL="342900" indent="-342900">
-              <a:spcAft>
-                <a:spcPts val="800"/>
-              </a:spcAft>
-              <a:buSzPct val="100000"/>
-              <a:buChar char="•"/>
-            </a:pPr>
-            <a:r>
-              <a:rPr lang="en-US" sz="1500" dirty="0">
-                <a:solidFill>
-                  <a:srgbClr val="3D3A36"/>
-                </a:solidFill>
-                <a:latin typeface="Calibri" pitchFamily="34" charset="0"/>
-                <a:ea typeface="Calibri" pitchFamily="34" charset="-122"/>
-                <a:cs typeface="Calibri" pitchFamily="34" charset="-120"/>
-              </a:rPr>
-              <a:t>To make a test FAIR, you must control your variables</a:t>
-            </a:r>
-            <a:endParaRPr lang="en-US" sz="1500" dirty="0"/>
-          </a:p>
-          <a:p>
-            <a:pPr marL="342900" indent="-342900">
-              <a:spcAft>
-                <a:spcPts val="800"/>
-              </a:spcAft>
-              <a:buSzPct val="100000"/>
-              <a:buChar char="•"/>
-            </a:pPr>
-            <a:r>
-              <a:rPr lang="en-US" sz="1500" dirty="0">
-                <a:solidFill>
-                  <a:srgbClr val="3D3A36"/>
-                </a:solidFill>
-                <a:latin typeface="Calibri" pitchFamily="34" charset="0"/>
-                <a:ea typeface="Calibri" pitchFamily="34" charset="-122"/>
-                <a:cs typeface="Calibri" pitchFamily="34" charset="-120"/>
-              </a:rPr>
-              <a:t>There are three types of variable in every experiment</a:t>
-            </a:r>
-            <a:endParaRPr lang="en-US" sz="1500" dirty="0"/>
-          </a:p>
-          <a:p>
-            <a:pPr marL="342900" indent="-342900">
-              <a:spcAft>
-                <a:spcPts val="800"/>
-              </a:spcAft>
-              <a:buSzPct val="100000"/>
-              <a:buChar char="•"/>
-            </a:pPr>
-            <a:r>
-              <a:rPr lang="en-US" sz="1500" dirty="0">
-                <a:solidFill>
-                  <a:srgbClr val="3D3A36"/>
-                </a:solidFill>
-                <a:latin typeface="Calibri" pitchFamily="34" charset="0"/>
-                <a:ea typeface="Calibri" pitchFamily="34" charset="-122"/>
-                <a:cs typeface="Calibri" pitchFamily="34" charset="-120"/>
-              </a:rPr>
-              <a:t>Understanding variables is essential for scientific investigations</a:t>
-            </a:r>
-            <a:endParaRPr lang="en-US" sz="1500" dirty="0"/>
-          </a:p>
-        </p:txBody>
-      </p:sp>
-      <p:sp>
-        <p:nvSpPr>
-          <p:cNvPr id="5" name="Shape 3"/>
-          <p:cNvSpPr/>
-          <p:nvPr/>
-        </p:nvSpPr>
-        <p:spPr>
-          <a:xfrm>
-            <a:off x="548640" y="4754880"/>
-            <a:ext cx="8046720" cy="9144"/>
-          </a:xfrm>
-          <a:prstGeom prst="rect">
-            <a:avLst/>
-          </a:prstGeom>
-          <a:solidFill>
-            <a:srgbClr val="F3F1EE"/>
-          </a:solidFill>
-          <a:ln/>
-        </p:spPr>
-      </p:sp>
-      <p:sp>
-        <p:nvSpPr>
-          <p:cNvPr id="6" name="Text 4"/>
-          <p:cNvSpPr/>
-          <p:nvPr/>
-        </p:nvSpPr>
-        <p:spPr>
-          <a:xfrm>
-            <a:off x="548640" y="4800600"/>
-            <a:ext cx="3657600" cy="274320"/>
-          </a:xfrm>
-          <a:prstGeom prst="rect">
-            <a:avLst/>
-          </a:prstGeom>
-          <a:noFill/>
-          <a:ln/>
-        </p:spPr>
-        <p:txBody>
-          <a:bodyPr wrap="square" rtlCol="0" anchor="ctr"/>
-          <a:lstStyle/>
-          <a:p>
-            <a:pPr indent="0" marL="0">
-              <a:buNone/>
-            </a:pPr>
-            <a:r>
-              <a:rPr lang="en-US" sz="800" dirty="0">
-                <a:solidFill>
-                  <a:srgbClr val="9B9690"/>
-                </a:solidFill>
-              </a:rPr>
-              <a:t>mrzocchi.com</a:t>
-            </a:r>
-            <a:endParaRPr lang="en-US" sz="800" dirty="0"/>
           </a:p>
         </p:txBody>
       </p:sp>
@@ -1635,7 +1717,7 @@
     <p:bg>
       <p:bgPr>
         <a:solidFill>
-          <a:srgbClr val="FFFFFF"/>
+          <a:srgbClr val="FAF8F5"/>
         </a:solidFill>
       </p:bgPr>
     </p:bg>
@@ -1681,8 +1763,8 @@
         </p:nvSpPr>
         <p:spPr>
           <a:xfrm>
-            <a:off x="548640" y="274320"/>
-            <a:ext cx="8046720" cy="640080"/>
+            <a:off x="7772400" y="4709160"/>
+            <a:ext cx="1097280" cy="320040"/>
           </a:xfrm>
           <a:prstGeom prst="rect">
             <a:avLst/>
@@ -1691,7 +1773,46 @@
           <a:ln/>
         </p:spPr>
         <p:txBody>
-          <a:bodyPr wrap="square" lIns="0" tIns="0" rIns="0" bIns="0" rtlCol="0" anchor="ctr"/>
+          <a:bodyPr wrap="square" rtlCol="0" anchor="ctr"/>
+          <a:lstStyle/>
+          <a:p>
+            <a:pPr algn="r" indent="0" marL="0">
+              <a:buNone/>
+            </a:pPr>
+            <a:r>
+              <a:rPr lang="en-US" sz="900" dirty="0">
+                <a:solidFill>
+                  <a:srgbClr val="6B6660"/>
+                </a:solidFill>
+                <a:latin typeface="Calibri" pitchFamily="34" charset="0"/>
+                <a:ea typeface="Calibri" pitchFamily="34" charset="-122"/>
+                <a:cs typeface="Calibri" pitchFamily="34" charset="-120"/>
+              </a:rPr>
+              <a:t>3 / 6</a:t>
+            </a:r>
+            <a:endParaRPr lang="en-US" sz="900" dirty="0"/>
+          </a:p>
+        </p:txBody>
+      </p:sp>
+      <p:sp>
+        <p:nvSpPr>
+          <p:cNvPr id="4" name="Text 2"/>
+          <p:cNvSpPr/>
+          <p:nvPr/>
+        </p:nvSpPr>
+        <p:spPr>
+          <a:xfrm>
+            <a:off x="457200" y="274320"/>
+            <a:ext cx="8229600" cy="640080"/>
+          </a:xfrm>
+          <a:prstGeom prst="rect">
+            <a:avLst/>
+          </a:prstGeom>
+          <a:noFill/>
+          <a:ln/>
+        </p:spPr>
+        <p:txBody>
+          <a:bodyPr wrap="square" rtlCol="0" anchor="ctr"/>
           <a:lstStyle/>
           <a:p>
             <a:pPr indent="0" marL="0">
@@ -1706,7 +1827,7 @@
                 <a:ea typeface="Georgia" pitchFamily="34" charset="-122"/>
                 <a:cs typeface="Georgia" pitchFamily="34" charset="-120"/>
               </a:rPr>
-              <a:t>Types of Variables</a:t>
+              <a:t>Three Types of Variables</a:t>
             </a:r>
             <a:endParaRPr lang="en-US" sz="2600" dirty="0"/>
           </a:p>
@@ -1714,22 +1835,27 @@
       </p:sp>
       <p:sp>
         <p:nvSpPr>
-          <p:cNvPr id="4" name="Shape 2"/>
-          <p:cNvSpPr/>
-          <p:nvPr/>
-        </p:nvSpPr>
-        <p:spPr>
-          <a:xfrm>
-            <a:off x="457200" y="1097280"/>
-            <a:ext cx="3840480" cy="3474720"/>
-          </a:xfrm>
-          <a:prstGeom prst="rect">
-            <a:avLst/>
-          </a:prstGeom>
-          <a:solidFill>
-            <a:srgbClr val="F3F1EE"/>
-          </a:solidFill>
-          <a:ln/>
+          <p:cNvPr id="5" name="Shape 3"/>
+          <p:cNvSpPr/>
+          <p:nvPr/>
+        </p:nvSpPr>
+        <p:spPr>
+          <a:xfrm>
+            <a:off x="457200" y="1188720"/>
+            <a:ext cx="2560320" cy="1828800"/>
+          </a:xfrm>
+          <a:prstGeom prst="rect">
+            <a:avLst/>
+          </a:prstGeom>
+          <a:solidFill>
+            <a:srgbClr val="FFFFFF"/>
+          </a:solidFill>
+          <a:ln w="12700">
+            <a:solidFill>
+              <a:srgbClr val="E5E2DC"/>
+            </a:solidFill>
+            <a:prstDash val="solid"/>
+          </a:ln>
           <a:effectLst>
             <a:outerShdw sx="100000" sy="100000" kx="0" ky="0" algn="bl" rotWithShape="0" blurRad="50800" dist="25400" dir="8100000">
               <a:srgbClr val="000000">
@@ -1741,14 +1867,34 @@
       </p:sp>
       <p:sp>
         <p:nvSpPr>
-          <p:cNvPr id="5" name="Text 3"/>
-          <p:cNvSpPr/>
-          <p:nvPr/>
-        </p:nvSpPr>
-        <p:spPr>
-          <a:xfrm>
-            <a:off x="640080" y="1234440"/>
-            <a:ext cx="3474720" cy="411480"/>
+          <p:cNvPr id="6" name="Shape 4"/>
+          <p:cNvSpPr/>
+          <p:nvPr/>
+        </p:nvSpPr>
+        <p:spPr>
+          <a:xfrm>
+            <a:off x="457200" y="1188720"/>
+            <a:ext cx="2560320" cy="54864"/>
+          </a:xfrm>
+          <a:prstGeom prst="rect">
+            <a:avLst/>
+          </a:prstGeom>
+          <a:solidFill>
+            <a:srgbClr val="2A9D8F"/>
+          </a:solidFill>
+          <a:ln/>
+        </p:spPr>
+      </p:sp>
+      <p:sp>
+        <p:nvSpPr>
+          <p:cNvPr id="7" name="Text 5"/>
+          <p:cNvSpPr/>
+          <p:nvPr/>
+        </p:nvSpPr>
+        <p:spPr>
+          <a:xfrm>
+            <a:off x="594360" y="1325880"/>
+            <a:ext cx="2286000" cy="365760"/>
           </a:xfrm>
           <a:prstGeom prst="rect">
             <a:avLst/>
@@ -1764,30 +1910,30 @@
               <a:buNone/>
             </a:pPr>
             <a:r>
-              <a:rPr lang="en-US" sz="1600" b="1" dirty="0">
+              <a:rPr lang="en-US" sz="1400" b="1" dirty="0">
                 <a:solidFill>
                   <a:srgbClr val="1B2A4A"/>
                 </a:solidFill>
-                <a:latin typeface="Georgia" pitchFamily="34" charset="0"/>
-                <a:ea typeface="Georgia" pitchFamily="34" charset="-122"/>
-                <a:cs typeface="Georgia" pitchFamily="34" charset="-120"/>
-              </a:rPr>
-              <a:t>Independent Variable (IV)</a:t>
-            </a:r>
-            <a:endParaRPr lang="en-US" sz="1600" dirty="0"/>
-          </a:p>
-        </p:txBody>
-      </p:sp>
-      <p:sp>
-        <p:nvSpPr>
-          <p:cNvPr id="6" name="Text 4"/>
-          <p:cNvSpPr/>
-          <p:nvPr/>
-        </p:nvSpPr>
-        <p:spPr>
-          <a:xfrm>
-            <a:off x="640080" y="1737360"/>
-            <a:ext cx="3474720" cy="2651760"/>
+                <a:latin typeface="Calibri" pitchFamily="34" charset="0"/>
+                <a:ea typeface="Calibri" pitchFamily="34" charset="-122"/>
+                <a:cs typeface="Calibri" pitchFamily="34" charset="-120"/>
+              </a:rPr>
+              <a:t>Independent Variable</a:t>
+            </a:r>
+            <a:endParaRPr lang="en-US" sz="1400" dirty="0"/>
+          </a:p>
+        </p:txBody>
+      </p:sp>
+      <p:sp>
+        <p:nvSpPr>
+          <p:cNvPr id="8" name="Text 6"/>
+          <p:cNvSpPr/>
+          <p:nvPr/>
+        </p:nvSpPr>
+        <p:spPr>
+          <a:xfrm>
+            <a:off x="594360" y="1737360"/>
+            <a:ext cx="2286000" cy="1097280"/>
           </a:xfrm>
           <a:prstGeom prst="rect">
             <a:avLst/>
@@ -1799,15 +1945,11 @@
           <a:bodyPr wrap="square" rtlCol="0" anchor="t"/>
           <a:lstStyle/>
           <a:p>
-            <a:pPr marL="342900" indent="-342900">
-              <a:spcAft>
-                <a:spcPts val="600"/>
-              </a:spcAft>
-              <a:buSzPct val="100000"/>
-              <a:buChar char="•"/>
-            </a:pPr>
-            <a:r>
-              <a:rPr lang="en-US" sz="1300" dirty="0">
+            <a:pPr indent="0" marL="0">
+              <a:buNone/>
+            </a:pPr>
+            <a:r>
+              <a:rPr lang="en-US" sz="1100" dirty="0">
                 <a:solidFill>
                   <a:srgbClr val="3D3A36"/>
                 </a:solidFill>
@@ -1815,93 +1957,35 @@
                 <a:ea typeface="Calibri" pitchFamily="34" charset="-122"/>
                 <a:cs typeface="Calibri" pitchFamily="34" charset="-120"/>
               </a:rPr>
-              <a:t>The variable YOU change</a:t>
-            </a:r>
-            <a:endParaRPr lang="en-US" sz="1300" dirty="0"/>
-          </a:p>
-          <a:p>
-            <a:pPr marL="342900" indent="-342900">
-              <a:spcAft>
-                <a:spcPts val="600"/>
-              </a:spcAft>
-              <a:buSzPct val="100000"/>
-              <a:buChar char="•"/>
-            </a:pPr>
-            <a:r>
-              <a:rPr lang="en-US" sz="1300" dirty="0">
-                <a:solidFill>
-                  <a:srgbClr val="3D3A36"/>
-                </a:solidFill>
-                <a:latin typeface="Calibri" pitchFamily="34" charset="0"/>
-                <a:ea typeface="Calibri" pitchFamily="34" charset="-122"/>
-                <a:cs typeface="Calibri" pitchFamily="34" charset="-120"/>
-              </a:rPr>
-              <a:t>There should only be ONE</a:t>
-            </a:r>
-            <a:endParaRPr lang="en-US" sz="1300" dirty="0"/>
-          </a:p>
-          <a:p>
-            <a:pPr marL="342900" indent="-342900">
-              <a:spcAft>
-                <a:spcPts val="600"/>
-              </a:spcAft>
-              <a:buSzPct val="100000"/>
-              <a:buChar char="•"/>
-            </a:pPr>
-            <a:r>
-              <a:rPr lang="en-US" sz="1300" dirty="0">
-                <a:solidFill>
-                  <a:srgbClr val="3D3A36"/>
-                </a:solidFill>
-                <a:latin typeface="Calibri" pitchFamily="34" charset="0"/>
-                <a:ea typeface="Calibri" pitchFamily="34" charset="-122"/>
-                <a:cs typeface="Calibri" pitchFamily="34" charset="-120"/>
-              </a:rPr>
-              <a:t>Also called the 'input variable'</a:t>
-            </a:r>
-            <a:endParaRPr lang="en-US" sz="1300" dirty="0"/>
-          </a:p>
-          <a:p>
-            <a:pPr marL="342900" indent="-342900">
-              <a:spcAft>
-                <a:spcPts val="600"/>
-              </a:spcAft>
-              <a:buSzPct val="100000"/>
-              <a:buChar char="•"/>
-            </a:pPr>
-            <a:r>
-              <a:rPr lang="en-US" sz="1300" dirty="0">
-                <a:solidFill>
-                  <a:srgbClr val="3D3A36"/>
-                </a:solidFill>
-                <a:latin typeface="Calibri" pitchFamily="34" charset="0"/>
-                <a:ea typeface="Calibri" pitchFamily="34" charset="-122"/>
-                <a:cs typeface="Calibri" pitchFamily="34" charset="-120"/>
-              </a:rPr>
-              <a:t>Example: the amount of water given to a plant</a:t>
-            </a:r>
-            <a:endParaRPr lang="en-US" sz="1300" dirty="0"/>
-          </a:p>
-        </p:txBody>
-      </p:sp>
-      <p:sp>
-        <p:nvSpPr>
-          <p:cNvPr id="7" name="Shape 5"/>
-          <p:cNvSpPr/>
-          <p:nvPr/>
-        </p:nvSpPr>
-        <p:spPr>
-          <a:xfrm>
-            <a:off x="4846320" y="1097280"/>
-            <a:ext cx="3840480" cy="3474720"/>
-          </a:xfrm>
-          <a:prstGeom prst="rect">
-            <a:avLst/>
-          </a:prstGeom>
-          <a:solidFill>
-            <a:srgbClr val="F3F1EE"/>
-          </a:solidFill>
-          <a:ln/>
+              <a:t>The ONE thing you deliberately change in the experiment. Example: the amount of water given to a plant each day.</a:t>
+            </a:r>
+            <a:endParaRPr lang="en-US" sz="1100" dirty="0"/>
+          </a:p>
+        </p:txBody>
+      </p:sp>
+      <p:sp>
+        <p:nvSpPr>
+          <p:cNvPr id="9" name="Shape 7"/>
+          <p:cNvSpPr/>
+          <p:nvPr/>
+        </p:nvSpPr>
+        <p:spPr>
+          <a:xfrm>
+            <a:off x="3291840" y="1188720"/>
+            <a:ext cx="2560320" cy="1828800"/>
+          </a:xfrm>
+          <a:prstGeom prst="rect">
+            <a:avLst/>
+          </a:prstGeom>
+          <a:solidFill>
+            <a:srgbClr val="FFFFFF"/>
+          </a:solidFill>
+          <a:ln w="12700">
+            <a:solidFill>
+              <a:srgbClr val="E5E2DC"/>
+            </a:solidFill>
+            <a:prstDash val="solid"/>
+          </a:ln>
           <a:effectLst>
             <a:outerShdw sx="100000" sy="100000" kx="0" ky="0" algn="bl" rotWithShape="0" blurRad="50800" dist="25400" dir="8100000">
               <a:srgbClr val="000000">
@@ -1913,14 +1997,34 @@
       </p:sp>
       <p:sp>
         <p:nvSpPr>
-          <p:cNvPr id="8" name="Text 6"/>
-          <p:cNvSpPr/>
-          <p:nvPr/>
-        </p:nvSpPr>
-        <p:spPr>
-          <a:xfrm>
-            <a:off x="5029200" y="1234440"/>
-            <a:ext cx="3474720" cy="411480"/>
+          <p:cNvPr id="10" name="Shape 8"/>
+          <p:cNvSpPr/>
+          <p:nvPr/>
+        </p:nvSpPr>
+        <p:spPr>
+          <a:xfrm>
+            <a:off x="3291840" y="1188720"/>
+            <a:ext cx="2560320" cy="54864"/>
+          </a:xfrm>
+          <a:prstGeom prst="rect">
+            <a:avLst/>
+          </a:prstGeom>
+          <a:solidFill>
+            <a:srgbClr val="2A9D8F"/>
+          </a:solidFill>
+          <a:ln/>
+        </p:spPr>
+      </p:sp>
+      <p:sp>
+        <p:nvSpPr>
+          <p:cNvPr id="11" name="Text 9"/>
+          <p:cNvSpPr/>
+          <p:nvPr/>
+        </p:nvSpPr>
+        <p:spPr>
+          <a:xfrm>
+            <a:off x="3429000" y="1325880"/>
+            <a:ext cx="2286000" cy="365760"/>
           </a:xfrm>
           <a:prstGeom prst="rect">
             <a:avLst/>
@@ -1936,30 +2040,30 @@
               <a:buNone/>
             </a:pPr>
             <a:r>
-              <a:rPr lang="en-US" sz="1600" b="1" dirty="0">
+              <a:rPr lang="en-US" sz="1400" b="1" dirty="0">
                 <a:solidFill>
                   <a:srgbClr val="1B2A4A"/>
                 </a:solidFill>
-                <a:latin typeface="Georgia" pitchFamily="34" charset="0"/>
-                <a:ea typeface="Georgia" pitchFamily="34" charset="-122"/>
-                <a:cs typeface="Georgia" pitchFamily="34" charset="-120"/>
-              </a:rPr>
-              <a:t>Dependent Variable (DV)</a:t>
-            </a:r>
-            <a:endParaRPr lang="en-US" sz="1600" dirty="0"/>
-          </a:p>
-        </p:txBody>
-      </p:sp>
-      <p:sp>
-        <p:nvSpPr>
-          <p:cNvPr id="9" name="Text 7"/>
-          <p:cNvSpPr/>
-          <p:nvPr/>
-        </p:nvSpPr>
-        <p:spPr>
-          <a:xfrm>
-            <a:off x="5029200" y="1737360"/>
-            <a:ext cx="3474720" cy="2651760"/>
+                <a:latin typeface="Calibri" pitchFamily="34" charset="0"/>
+                <a:ea typeface="Calibri" pitchFamily="34" charset="-122"/>
+                <a:cs typeface="Calibri" pitchFamily="34" charset="-120"/>
+              </a:rPr>
+              <a:t>Dependent Variable</a:t>
+            </a:r>
+            <a:endParaRPr lang="en-US" sz="1400" dirty="0"/>
+          </a:p>
+        </p:txBody>
+      </p:sp>
+      <p:sp>
+        <p:nvSpPr>
+          <p:cNvPr id="12" name="Text 10"/>
+          <p:cNvSpPr/>
+          <p:nvPr/>
+        </p:nvSpPr>
+        <p:spPr>
+          <a:xfrm>
+            <a:off x="3429000" y="1737360"/>
+            <a:ext cx="2286000" cy="1097280"/>
           </a:xfrm>
           <a:prstGeom prst="rect">
             <a:avLst/>
@@ -1971,15 +2075,11 @@
           <a:bodyPr wrap="square" rtlCol="0" anchor="t"/>
           <a:lstStyle/>
           <a:p>
-            <a:pPr marL="342900" indent="-342900">
-              <a:spcAft>
-                <a:spcPts val="600"/>
-              </a:spcAft>
-              <a:buSzPct val="100000"/>
-              <a:buChar char="•"/>
-            </a:pPr>
-            <a:r>
-              <a:rPr lang="en-US" sz="1300" dirty="0">
+            <a:pPr indent="0" marL="0">
+              <a:buNone/>
+            </a:pPr>
+            <a:r>
+              <a:rPr lang="en-US" sz="1100" dirty="0">
                 <a:solidFill>
                   <a:srgbClr val="3D3A36"/>
                 </a:solidFill>
@@ -1987,85 +2087,74 @@
                 <a:ea typeface="Calibri" pitchFamily="34" charset="-122"/>
                 <a:cs typeface="Calibri" pitchFamily="34" charset="-120"/>
               </a:rPr>
-              <a:t>The variable you MEASURE</a:t>
-            </a:r>
-            <a:endParaRPr lang="en-US" sz="1300" dirty="0"/>
-          </a:p>
-          <a:p>
-            <a:pPr marL="342900" indent="-342900">
-              <a:spcAft>
-                <a:spcPts val="600"/>
-              </a:spcAft>
-              <a:buSzPct val="100000"/>
-              <a:buChar char="•"/>
-            </a:pPr>
-            <a:r>
-              <a:rPr lang="en-US" sz="1300" dirty="0">
-                <a:solidFill>
-                  <a:srgbClr val="3D3A36"/>
-                </a:solidFill>
-                <a:latin typeface="Calibri" pitchFamily="34" charset="0"/>
-                <a:ea typeface="Calibri" pitchFamily="34" charset="-122"/>
-                <a:cs typeface="Calibri" pitchFamily="34" charset="-120"/>
-              </a:rPr>
-              <a:t>It changes because of the IV</a:t>
-            </a:r>
-            <a:endParaRPr lang="en-US" sz="1300" dirty="0"/>
-          </a:p>
-          <a:p>
-            <a:pPr marL="342900" indent="-342900">
-              <a:spcAft>
-                <a:spcPts val="600"/>
-              </a:spcAft>
-              <a:buSzPct val="100000"/>
-              <a:buChar char="•"/>
-            </a:pPr>
-            <a:r>
-              <a:rPr lang="en-US" sz="1300" dirty="0">
-                <a:solidFill>
-                  <a:srgbClr val="3D3A36"/>
-                </a:solidFill>
-                <a:latin typeface="Calibri" pitchFamily="34" charset="0"/>
-                <a:ea typeface="Calibri" pitchFamily="34" charset="-122"/>
-                <a:cs typeface="Calibri" pitchFamily="34" charset="-120"/>
-              </a:rPr>
-              <a:t>Also called the 'output variable'</a:t>
-            </a:r>
-            <a:endParaRPr lang="en-US" sz="1300" dirty="0"/>
-          </a:p>
-          <a:p>
-            <a:pPr marL="342900" indent="-342900">
-              <a:spcAft>
-                <a:spcPts val="600"/>
-              </a:spcAft>
-              <a:buSzPct val="100000"/>
-              <a:buChar char="•"/>
-            </a:pPr>
-            <a:r>
-              <a:rPr lang="en-US" sz="1300" dirty="0">
-                <a:solidFill>
-                  <a:srgbClr val="3D3A36"/>
-                </a:solidFill>
-                <a:latin typeface="Calibri" pitchFamily="34" charset="0"/>
-                <a:ea typeface="Calibri" pitchFamily="34" charset="-122"/>
-                <a:cs typeface="Calibri" pitchFamily="34" charset="-120"/>
-              </a:rPr>
-              <a:t>Example: how tall the plant grows</a:t>
-            </a:r>
-            <a:endParaRPr lang="en-US" sz="1300" dirty="0"/>
-          </a:p>
-        </p:txBody>
-      </p:sp>
-      <p:sp>
-        <p:nvSpPr>
-          <p:cNvPr id="10" name="Text 8"/>
-          <p:cNvSpPr/>
-          <p:nvPr/>
-        </p:nvSpPr>
-        <p:spPr>
-          <a:xfrm>
-            <a:off x="548640" y="4800600"/>
-            <a:ext cx="3657600" cy="274320"/>
+              <a:t>The thing you MEASURE or observe. It depends on the independent variable. Example: the height the plant grows.</a:t>
+            </a:r>
+            <a:endParaRPr lang="en-US" sz="1100" dirty="0"/>
+          </a:p>
+        </p:txBody>
+      </p:sp>
+      <p:sp>
+        <p:nvSpPr>
+          <p:cNvPr id="13" name="Shape 11"/>
+          <p:cNvSpPr/>
+          <p:nvPr/>
+        </p:nvSpPr>
+        <p:spPr>
+          <a:xfrm>
+            <a:off x="6126480" y="1188720"/>
+            <a:ext cx="2560320" cy="1828800"/>
+          </a:xfrm>
+          <a:prstGeom prst="rect">
+            <a:avLst/>
+          </a:prstGeom>
+          <a:solidFill>
+            <a:srgbClr val="FFFFFF"/>
+          </a:solidFill>
+          <a:ln w="12700">
+            <a:solidFill>
+              <a:srgbClr val="E5E2DC"/>
+            </a:solidFill>
+            <a:prstDash val="solid"/>
+          </a:ln>
+          <a:effectLst>
+            <a:outerShdw sx="100000" sy="100000" kx="0" ky="0" algn="bl" rotWithShape="0" blurRad="50800" dist="25400" dir="8100000">
+              <a:srgbClr val="000000">
+                <a:alpha val="10000"/>
+              </a:srgbClr>
+            </a:outerShdw>
+          </a:effectLst>
+        </p:spPr>
+      </p:sp>
+      <p:sp>
+        <p:nvSpPr>
+          <p:cNvPr id="14" name="Shape 12"/>
+          <p:cNvSpPr/>
+          <p:nvPr/>
+        </p:nvSpPr>
+        <p:spPr>
+          <a:xfrm>
+            <a:off x="6126480" y="1188720"/>
+            <a:ext cx="2560320" cy="54864"/>
+          </a:xfrm>
+          <a:prstGeom prst="rect">
+            <a:avLst/>
+          </a:prstGeom>
+          <a:solidFill>
+            <a:srgbClr val="2A9D8F"/>
+          </a:solidFill>
+          <a:ln/>
+        </p:spPr>
+      </p:sp>
+      <p:sp>
+        <p:nvSpPr>
+          <p:cNvPr id="15" name="Text 13"/>
+          <p:cNvSpPr/>
+          <p:nvPr/>
+        </p:nvSpPr>
+        <p:spPr>
+          <a:xfrm>
+            <a:off x="6263640" y="1325880"/>
+            <a:ext cx="2286000" cy="365760"/>
           </a:xfrm>
           <a:prstGeom prst="rect">
             <a:avLst/>
@@ -2081,14 +2170,56 @@
               <a:buNone/>
             </a:pPr>
             <a:r>
-              <a:rPr lang="en-US" sz="800" dirty="0">
-                <a:solidFill>
-                  <a:srgbClr val="9B9690"/>
-                </a:solidFill>
-              </a:rPr>
-              <a:t>mrzocchi.com</a:t>
-            </a:r>
-            <a:endParaRPr lang="en-US" sz="800" dirty="0"/>
+              <a:rPr lang="en-US" sz="1400" b="1" dirty="0">
+                <a:solidFill>
+                  <a:srgbClr val="1B2A4A"/>
+                </a:solidFill>
+                <a:latin typeface="Calibri" pitchFamily="34" charset="0"/>
+                <a:ea typeface="Calibri" pitchFamily="34" charset="-122"/>
+                <a:cs typeface="Calibri" pitchFamily="34" charset="-120"/>
+              </a:rPr>
+              <a:t>Controlled Variables</a:t>
+            </a:r>
+            <a:endParaRPr lang="en-US" sz="1400" dirty="0"/>
+          </a:p>
+        </p:txBody>
+      </p:sp>
+      <p:sp>
+        <p:nvSpPr>
+          <p:cNvPr id="16" name="Text 14"/>
+          <p:cNvSpPr/>
+          <p:nvPr/>
+        </p:nvSpPr>
+        <p:spPr>
+          <a:xfrm>
+            <a:off x="6263640" y="1737360"/>
+            <a:ext cx="2286000" cy="1097280"/>
+          </a:xfrm>
+          <a:prstGeom prst="rect">
+            <a:avLst/>
+          </a:prstGeom>
+          <a:noFill/>
+          <a:ln/>
+        </p:spPr>
+        <p:txBody>
+          <a:bodyPr wrap="square" rtlCol="0" anchor="t"/>
+          <a:lstStyle/>
+          <a:p>
+            <a:pPr indent="0" marL="0">
+              <a:buNone/>
+            </a:pPr>
+            <a:r>
+              <a:rPr lang="en-US" sz="1100" dirty="0">
+                <a:solidFill>
+                  <a:srgbClr val="3D3A36"/>
+                </a:solidFill>
+                <a:latin typeface="Calibri" pitchFamily="34" charset="0"/>
+                <a:ea typeface="Calibri" pitchFamily="34" charset="-122"/>
+                <a:cs typeface="Calibri" pitchFamily="34" charset="-120"/>
+              </a:rPr>
+              <a:t>Everything you keep THE SAME to make it a fair test. Example: same soil, same pot size, same sunlight, same plant type.</a:t>
+            </a:r>
+            <a:endParaRPr lang="en-US" sz="1100" dirty="0"/>
           </a:p>
         </p:txBody>
       </p:sp>
@@ -2106,7 +2237,7 @@
     <p:bg>
       <p:bgPr>
         <a:solidFill>
-          <a:srgbClr val="FFFFFF"/>
+          <a:srgbClr val="FAF8F5"/>
         </a:solidFill>
       </p:bgPr>
     </p:bg>
@@ -2152,8 +2283,8 @@
         </p:nvSpPr>
         <p:spPr>
           <a:xfrm>
-            <a:off x="548640" y="274320"/>
-            <a:ext cx="8046720" cy="640080"/>
+            <a:off x="7772400" y="4709160"/>
+            <a:ext cx="1097280" cy="320040"/>
           </a:xfrm>
           <a:prstGeom prst="rect">
             <a:avLst/>
@@ -2162,7 +2293,46 @@
           <a:ln/>
         </p:spPr>
         <p:txBody>
-          <a:bodyPr wrap="square" lIns="0" tIns="0" rIns="0" bIns="0" rtlCol="0" anchor="ctr"/>
+          <a:bodyPr wrap="square" rtlCol="0" anchor="ctr"/>
+          <a:lstStyle/>
+          <a:p>
+            <a:pPr algn="r" indent="0" marL="0">
+              <a:buNone/>
+            </a:pPr>
+            <a:r>
+              <a:rPr lang="en-US" sz="900" dirty="0">
+                <a:solidFill>
+                  <a:srgbClr val="6B6660"/>
+                </a:solidFill>
+                <a:latin typeface="Calibri" pitchFamily="34" charset="0"/>
+                <a:ea typeface="Calibri" pitchFamily="34" charset="-122"/>
+                <a:cs typeface="Calibri" pitchFamily="34" charset="-120"/>
+              </a:rPr>
+              <a:t>4 / 6</a:t>
+            </a:r>
+            <a:endParaRPr lang="en-US" sz="900" dirty="0"/>
+          </a:p>
+        </p:txBody>
+      </p:sp>
+      <p:sp>
+        <p:nvSpPr>
+          <p:cNvPr id="4" name="Text 2"/>
+          <p:cNvSpPr/>
+          <p:nvPr/>
+        </p:nvSpPr>
+        <p:spPr>
+          <a:xfrm>
+            <a:off x="457200" y="274320"/>
+            <a:ext cx="8229600" cy="640080"/>
+          </a:xfrm>
+          <a:prstGeom prst="rect">
+            <a:avLst/>
+          </a:prstGeom>
+          <a:noFill/>
+          <a:ln/>
+        </p:spPr>
+        <p:txBody>
+          <a:bodyPr wrap="square" rtlCol="0" anchor="ctr"/>
           <a:lstStyle/>
           <a:p>
             <a:pPr indent="0" marL="0">
@@ -2177,7 +2347,7 @@
                 <a:ea typeface="Georgia" pitchFamily="34" charset="-122"/>
                 <a:cs typeface="Georgia" pitchFamily="34" charset="-120"/>
               </a:rPr>
-              <a:t>Control Variables</a:t>
+              <a:t>Fair Tests</a:t>
             </a:r>
             <a:endParaRPr lang="en-US" sz="2600" dirty="0"/>
           </a:p>
@@ -2185,14 +2355,14 @@
       </p:sp>
       <p:sp>
         <p:nvSpPr>
-          <p:cNvPr id="4" name="Text 2"/>
-          <p:cNvSpPr/>
-          <p:nvPr/>
-        </p:nvSpPr>
-        <p:spPr>
-          <a:xfrm>
-            <a:off x="548640" y="1097280"/>
-            <a:ext cx="8046720" cy="3474720"/>
+          <p:cNvPr id="5" name="Text 3"/>
+          <p:cNvSpPr/>
+          <p:nvPr/>
+        </p:nvSpPr>
+        <p:spPr>
+          <a:xfrm>
+            <a:off x="457200" y="1188720"/>
+            <a:ext cx="3840480" cy="3474720"/>
           </a:xfrm>
           <a:prstGeom prst="rect">
             <a:avLst/>
@@ -2206,13 +2376,13 @@
           <a:p>
             <a:pPr marL="342900" indent="-342900">
               <a:spcAft>
-                <a:spcPts val="800"/>
+                <a:spcPts val="600"/>
               </a:spcAft>
               <a:buSzPct val="100000"/>
               <a:buChar char="•"/>
             </a:pPr>
             <a:r>
-              <a:rPr lang="en-US" sz="1500" dirty="0">
+              <a:rPr lang="en-US" sz="1400" dirty="0">
                 <a:solidFill>
                   <a:srgbClr val="3D3A36"/>
                 </a:solidFill>
@@ -2220,20 +2390,20 @@
                 <a:ea typeface="Calibri" pitchFamily="34" charset="-122"/>
                 <a:cs typeface="Calibri" pitchFamily="34" charset="-120"/>
               </a:rPr>
-              <a:t>Everything you keep the SAME to make the test fair</a:t>
-            </a:r>
-            <a:endParaRPr lang="en-US" sz="1500" dirty="0"/>
+              <a:t>A fair test changes ONLY the independent variable</a:t>
+            </a:r>
+            <a:endParaRPr lang="en-US" sz="1400" dirty="0"/>
           </a:p>
           <a:p>
             <a:pPr marL="342900" indent="-342900">
               <a:spcAft>
-                <a:spcPts val="800"/>
+                <a:spcPts val="600"/>
               </a:spcAft>
               <a:buSzPct val="100000"/>
               <a:buChar char="•"/>
             </a:pPr>
             <a:r>
-              <a:rPr lang="en-US" sz="1500" dirty="0">
+              <a:rPr lang="en-US" sz="1400" dirty="0">
                 <a:solidFill>
                   <a:srgbClr val="3D3A36"/>
                 </a:solidFill>
@@ -2241,20 +2411,20 @@
                 <a:ea typeface="Calibri" pitchFamily="34" charset="-122"/>
                 <a:cs typeface="Calibri" pitchFamily="34" charset="-120"/>
               </a:rPr>
-              <a:t>If you don't control them, you won't know what caused the result</a:t>
-            </a:r>
-            <a:endParaRPr lang="en-US" sz="1500" dirty="0"/>
+              <a:t>If you change more than one thing, you cannot tell which caused the result</a:t>
+            </a:r>
+            <a:endParaRPr lang="en-US" sz="1400" dirty="0"/>
           </a:p>
           <a:p>
             <a:pPr marL="342900" indent="-342900">
               <a:spcAft>
-                <a:spcPts val="800"/>
+                <a:spcPts val="600"/>
               </a:spcAft>
               <a:buSzPct val="100000"/>
               <a:buChar char="•"/>
             </a:pPr>
             <a:r>
-              <a:rPr lang="en-US" sz="1500" dirty="0">
+              <a:rPr lang="en-US" sz="1400" dirty="0">
                 <a:solidFill>
                   <a:srgbClr val="3D3A36"/>
                 </a:solidFill>
@@ -2262,20 +2432,20 @@
                 <a:ea typeface="Calibri" pitchFamily="34" charset="-122"/>
                 <a:cs typeface="Calibri" pitchFamily="34" charset="-120"/>
               </a:rPr>
-              <a:t>Example: same soil type, same light, same pot size</a:t>
-            </a:r>
-            <a:endParaRPr lang="en-US" sz="1500" dirty="0"/>
+              <a:t>Controlled variables make the comparison valid</a:t>
+            </a:r>
+            <a:endParaRPr lang="en-US" sz="1400" dirty="0"/>
           </a:p>
           <a:p>
             <a:pPr marL="342900" indent="-342900">
               <a:spcAft>
-                <a:spcPts val="800"/>
+                <a:spcPts val="600"/>
               </a:spcAft>
               <a:buSzPct val="100000"/>
               <a:buChar char="•"/>
             </a:pPr>
             <a:r>
-              <a:rPr lang="en-US" sz="1500" dirty="0">
+              <a:rPr lang="en-US" sz="1400" dirty="0">
                 <a:solidFill>
                   <a:srgbClr val="3D3A36"/>
                 </a:solidFill>
@@ -2283,63 +2453,74 @@
                 <a:ea typeface="Calibri" pitchFamily="34" charset="-122"/>
                 <a:cs typeface="Calibri" pitchFamily="34" charset="-120"/>
               </a:rPr>
-              <a:t>Also called 'constant variables'</a:t>
-            </a:r>
-            <a:endParaRPr lang="en-US" sz="1500" dirty="0"/>
-          </a:p>
-          <a:p>
-            <a:pPr marL="342900" indent="-342900">
-              <a:spcAft>
-                <a:spcPts val="800"/>
-              </a:spcAft>
-              <a:buSzPct val="100000"/>
-              <a:buChar char="•"/>
-            </a:pPr>
-            <a:r>
-              <a:rPr lang="en-US" sz="1500" dirty="0">
-                <a:solidFill>
-                  <a:srgbClr val="3D3A36"/>
-                </a:solidFill>
-                <a:latin typeface="Calibri" pitchFamily="34" charset="0"/>
-                <a:ea typeface="Calibri" pitchFamily="34" charset="-122"/>
-                <a:cs typeface="Calibri" pitchFamily="34" charset="-120"/>
-              </a:rPr>
-              <a:t>A fair test = only ONE variable changes (the IV)</a:t>
-            </a:r>
-            <a:endParaRPr lang="en-US" sz="1500" dirty="0"/>
-          </a:p>
-        </p:txBody>
-      </p:sp>
-      <p:sp>
-        <p:nvSpPr>
-          <p:cNvPr id="5" name="Shape 3"/>
-          <p:cNvSpPr/>
-          <p:nvPr/>
-        </p:nvSpPr>
-        <p:spPr>
-          <a:xfrm>
-            <a:off x="548640" y="4754880"/>
-            <a:ext cx="8046720" cy="9144"/>
-          </a:xfrm>
-          <a:prstGeom prst="rect">
-            <a:avLst/>
-          </a:prstGeom>
-          <a:solidFill>
-            <a:srgbClr val="F3F1EE"/>
+              <a:t>Example: Testing which fertiliser helps plants grow tallest — you must use the same pot, soil, water, and sunlight for each plant</a:t>
+            </a:r>
+            <a:endParaRPr lang="en-US" sz="1400" dirty="0"/>
+          </a:p>
+        </p:txBody>
+      </p:sp>
+      <p:sp>
+        <p:nvSpPr>
+          <p:cNvPr id="6" name="Shape 4"/>
+          <p:cNvSpPr/>
+          <p:nvPr/>
+        </p:nvSpPr>
+        <p:spPr>
+          <a:xfrm>
+            <a:off x="4846320" y="1188720"/>
+            <a:ext cx="3840480" cy="3474720"/>
+          </a:xfrm>
+          <a:prstGeom prst="rect">
+            <a:avLst/>
+          </a:prstGeom>
+          <a:solidFill>
+            <a:srgbClr val="FFFFFF"/>
+          </a:solidFill>
+          <a:ln w="12700">
+            <a:solidFill>
+              <a:srgbClr val="E5E2DC"/>
+            </a:solidFill>
+            <a:prstDash val="solid"/>
+          </a:ln>
+          <a:effectLst>
+            <a:outerShdw sx="100000" sy="100000" kx="0" ky="0" algn="bl" rotWithShape="0" blurRad="50800" dist="25400" dir="8100000">
+              <a:srgbClr val="000000">
+                <a:alpha val="10000"/>
+              </a:srgbClr>
+            </a:outerShdw>
+          </a:effectLst>
+        </p:spPr>
+      </p:sp>
+      <p:sp>
+        <p:nvSpPr>
+          <p:cNvPr id="7" name="Shape 5"/>
+          <p:cNvSpPr/>
+          <p:nvPr/>
+        </p:nvSpPr>
+        <p:spPr>
+          <a:xfrm>
+            <a:off x="4846320" y="1188720"/>
+            <a:ext cx="3840480" cy="54864"/>
+          </a:xfrm>
+          <a:prstGeom prst="rect">
+            <a:avLst/>
+          </a:prstGeom>
+          <a:solidFill>
+            <a:srgbClr val="2A9D8F"/>
           </a:solidFill>
           <a:ln/>
         </p:spPr>
       </p:sp>
       <p:sp>
         <p:nvSpPr>
-          <p:cNvPr id="6" name="Text 4"/>
-          <p:cNvSpPr/>
-          <p:nvPr/>
-        </p:nvSpPr>
-        <p:spPr>
-          <a:xfrm>
-            <a:off x="548640" y="4800600"/>
-            <a:ext cx="3657600" cy="274320"/>
+          <p:cNvPr id="8" name="Text 6"/>
+          <p:cNvSpPr/>
+          <p:nvPr/>
+        </p:nvSpPr>
+        <p:spPr>
+          <a:xfrm>
+            <a:off x="5120640" y="1371600"/>
+            <a:ext cx="3291840" cy="3108960"/>
           </a:xfrm>
           <a:prstGeom prst="rect">
             <a:avLst/>
@@ -2348,21 +2529,136 @@
           <a:ln/>
         </p:spPr>
         <p:txBody>
-          <a:bodyPr wrap="square" rtlCol="0" anchor="ctr"/>
+          <a:bodyPr wrap="square" rtlCol="0" anchor="t"/>
           <a:lstStyle/>
           <a:p>
             <a:pPr indent="0" marL="0">
+              <a:spcAft>
+                <a:spcPts val="400"/>
+              </a:spcAft>
               <a:buNone/>
             </a:pPr>
             <a:r>
-              <a:rPr lang="en-US" sz="800" dirty="0">
-                <a:solidFill>
-                  <a:srgbClr val="9B9690"/>
-                </a:solidFill>
-              </a:rPr>
-              <a:t>mrzocchi.com</a:t>
-            </a:r>
-            <a:endParaRPr lang="en-US" sz="800" dirty="0"/>
+              <a:rPr lang="en-US" sz="1600" b="1" dirty="0">
+                <a:solidFill>
+                  <a:srgbClr val="1B2A4A"/>
+                </a:solidFill>
+                <a:latin typeface="Calibri" pitchFamily="34" charset="0"/>
+                <a:ea typeface="Calibri" pitchFamily="34" charset="-122"/>
+                <a:cs typeface="Calibri" pitchFamily="34" charset="-120"/>
+              </a:rPr>
+              <a:t>Common Mistakes</a:t>
+            </a:r>
+            <a:endParaRPr lang="en-US" sz="1600" dirty="0"/>
+          </a:p>
+          <a:p>
+            <a:pPr indent="0" marL="0">
+              <a:spcAft>
+                <a:spcPts val="400"/>
+              </a:spcAft>
+              <a:buNone/>
+            </a:pPr>
+            <a:endParaRPr lang="en-US" sz="1600" dirty="0"/>
+          </a:p>
+          <a:p>
+            <a:pPr indent="0" marL="0">
+              <a:spcAft>
+                <a:spcPts val="400"/>
+              </a:spcAft>
+              <a:buNone/>
+            </a:pPr>
+            <a:r>
+              <a:rPr lang="en-US" sz="1300" dirty="0">
+                <a:solidFill>
+                  <a:srgbClr val="3D3A36"/>
+                </a:solidFill>
+                <a:latin typeface="Calibri" pitchFamily="34" charset="0"/>
+                <a:ea typeface="Calibri" pitchFamily="34" charset="-122"/>
+                <a:cs typeface="Calibri" pitchFamily="34" charset="-120"/>
+              </a:rPr>
+              <a:t>Changing two things at once (not a fair test)</a:t>
+            </a:r>
+            <a:endParaRPr lang="en-US" sz="1600" dirty="0"/>
+          </a:p>
+          <a:p>
+            <a:pPr indent="0" marL="0">
+              <a:spcAft>
+                <a:spcPts val="400"/>
+              </a:spcAft>
+              <a:buNone/>
+            </a:pPr>
+            <a:r>
+              <a:rPr lang="en-US" sz="1300" dirty="0">
+                <a:solidFill>
+                  <a:srgbClr val="3D3A36"/>
+                </a:solidFill>
+                <a:latin typeface="Calibri" pitchFamily="34" charset="0"/>
+                <a:ea typeface="Calibri" pitchFamily="34" charset="-122"/>
+                <a:cs typeface="Calibri" pitchFamily="34" charset="-120"/>
+              </a:rPr>
+              <a:t>Forgetting to measure the dependent variable</a:t>
+            </a:r>
+            <a:endParaRPr lang="en-US" sz="1600" dirty="0"/>
+          </a:p>
+          <a:p>
+            <a:pPr indent="0" marL="0">
+              <a:spcAft>
+                <a:spcPts val="400"/>
+              </a:spcAft>
+              <a:buNone/>
+            </a:pPr>
+            <a:r>
+              <a:rPr lang="en-US" sz="1300" dirty="0">
+                <a:solidFill>
+                  <a:srgbClr val="3D3A36"/>
+                </a:solidFill>
+                <a:latin typeface="Calibri" pitchFamily="34" charset="0"/>
+                <a:ea typeface="Calibri" pitchFamily="34" charset="-122"/>
+                <a:cs typeface="Calibri" pitchFamily="34" charset="-120"/>
+              </a:rPr>
+              <a:t>Not keeping controlled variables constant</a:t>
+            </a:r>
+            <a:endParaRPr lang="en-US" sz="1600" dirty="0"/>
+          </a:p>
+          <a:p>
+            <a:pPr indent="0" marL="0">
+              <a:spcAft>
+                <a:spcPts val="400"/>
+              </a:spcAft>
+              <a:buNone/>
+            </a:pPr>
+            <a:r>
+              <a:rPr lang="en-US" sz="1300" dirty="0">
+                <a:solidFill>
+                  <a:srgbClr val="3D3A36"/>
+                </a:solidFill>
+                <a:latin typeface="Calibri" pitchFamily="34" charset="0"/>
+                <a:ea typeface="Calibri" pitchFamily="34" charset="-122"/>
+                <a:cs typeface="Calibri" pitchFamily="34" charset="-120"/>
+              </a:rPr>
+              <a:t>Not repeating the experiment for reliability</a:t>
+            </a:r>
+            <a:endParaRPr lang="en-US" sz="1600" dirty="0"/>
+          </a:p>
+          <a:p>
+            <a:pPr indent="0" marL="0">
+              <a:spcAft>
+                <a:spcPts val="400"/>
+              </a:spcAft>
+              <a:buNone/>
+            </a:pPr>
+            <a:r>
+              <a:rPr lang="en-US" sz="1300" dirty="0">
+                <a:solidFill>
+                  <a:srgbClr val="3D3A36"/>
+                </a:solidFill>
+                <a:latin typeface="Calibri" pitchFamily="34" charset="0"/>
+                <a:ea typeface="Calibri" pitchFamily="34" charset="-122"/>
+                <a:cs typeface="Calibri" pitchFamily="34" charset="-120"/>
+              </a:rPr>
+              <a:t>Confusing independent and dependent variables</a:t>
+            </a:r>
+            <a:endParaRPr lang="en-US" sz="1600" dirty="0"/>
           </a:p>
         </p:txBody>
       </p:sp>
@@ -2377,6 +2673,326 @@
 <file path=ppt/slides/slide5.xml><?xml version="1.0" encoding="utf-8"?>
 <p:sld xmlns:a="http://schemas.openxmlformats.org/drawingml/2006/main" xmlns:r="http://schemas.openxmlformats.org/officeDocument/2006/relationships" xmlns:p="http://schemas.openxmlformats.org/presentationml/2006/main">
   <p:cSld name="Slide 5">
+    <p:bg>
+      <p:bgPr>
+        <a:solidFill>
+          <a:srgbClr val="FAF8F5"/>
+        </a:solidFill>
+      </p:bgPr>
+    </p:bg>
+    <p:spTree>
+      <p:nvGrpSpPr>
+        <p:cNvPr id="1" name=""/>
+        <p:cNvGrpSpPr/>
+        <p:nvPr/>
+      </p:nvGrpSpPr>
+      <p:grpSpPr>
+        <a:xfrm>
+          <a:off x="0" y="0"/>
+          <a:ext cx="0" cy="0"/>
+          <a:chOff x="0" y="0"/>
+          <a:chExt cx="0" cy="0"/>
+        </a:xfrm>
+      </p:grpSpPr>
+      <p:sp>
+        <p:nvSpPr>
+          <p:cNvPr id="2" name="Shape 0"/>
+          <p:cNvSpPr/>
+          <p:nvPr/>
+        </p:nvSpPr>
+        <p:spPr>
+          <a:xfrm>
+            <a:off x="0" y="0"/>
+            <a:ext cx="9144000" cy="54864"/>
+          </a:xfrm>
+          <a:prstGeom prst="rect">
+            <a:avLst/>
+          </a:prstGeom>
+          <a:solidFill>
+            <a:srgbClr val="2A9D8F"/>
+          </a:solidFill>
+          <a:ln/>
+        </p:spPr>
+      </p:sp>
+      <p:sp>
+        <p:nvSpPr>
+          <p:cNvPr id="3" name="Text 1"/>
+          <p:cNvSpPr/>
+          <p:nvPr/>
+        </p:nvSpPr>
+        <p:spPr>
+          <a:xfrm>
+            <a:off x="7772400" y="4709160"/>
+            <a:ext cx="1097280" cy="320040"/>
+          </a:xfrm>
+          <a:prstGeom prst="rect">
+            <a:avLst/>
+          </a:prstGeom>
+          <a:noFill/>
+          <a:ln/>
+        </p:spPr>
+        <p:txBody>
+          <a:bodyPr wrap="square" rtlCol="0" anchor="ctr"/>
+          <a:lstStyle/>
+          <a:p>
+            <a:pPr algn="r" indent="0" marL="0">
+              <a:buNone/>
+            </a:pPr>
+            <a:r>
+              <a:rPr lang="en-US" sz="900" dirty="0">
+                <a:solidFill>
+                  <a:srgbClr val="6B6660"/>
+                </a:solidFill>
+                <a:latin typeface="Calibri" pitchFamily="34" charset="0"/>
+                <a:ea typeface="Calibri" pitchFamily="34" charset="-122"/>
+                <a:cs typeface="Calibri" pitchFamily="34" charset="-120"/>
+              </a:rPr>
+              <a:t>5 / 6</a:t>
+            </a:r>
+            <a:endParaRPr lang="en-US" sz="900" dirty="0"/>
+          </a:p>
+        </p:txBody>
+      </p:sp>
+      <p:sp>
+        <p:nvSpPr>
+          <p:cNvPr id="4" name="Text 2"/>
+          <p:cNvSpPr/>
+          <p:nvPr/>
+        </p:nvSpPr>
+        <p:spPr>
+          <a:xfrm>
+            <a:off x="457200" y="274320"/>
+            <a:ext cx="8229600" cy="640080"/>
+          </a:xfrm>
+          <a:prstGeom prst="rect">
+            <a:avLst/>
+          </a:prstGeom>
+          <a:noFill/>
+          <a:ln/>
+        </p:spPr>
+        <p:txBody>
+          <a:bodyPr wrap="square" rtlCol="0" anchor="ctr"/>
+          <a:lstStyle/>
+          <a:p>
+            <a:pPr indent="0" marL="0">
+              <a:buNone/>
+            </a:pPr>
+            <a:r>
+              <a:rPr lang="en-US" sz="2600" b="1" dirty="0">
+                <a:solidFill>
+                  <a:srgbClr val="1B2A4A"/>
+                </a:solidFill>
+                <a:latin typeface="Georgia" pitchFamily="34" charset="0"/>
+                <a:ea typeface="Georgia" pitchFamily="34" charset="-122"/>
+                <a:cs typeface="Georgia" pitchFamily="34" charset="-120"/>
+              </a:rPr>
+              <a:t>Practice: Identify the Variables</a:t>
+            </a:r>
+            <a:endParaRPr lang="en-US" sz="2600" dirty="0"/>
+          </a:p>
+        </p:txBody>
+      </p:sp>
+      <p:sp>
+        <p:nvSpPr>
+          <p:cNvPr id="5" name="Text 3"/>
+          <p:cNvSpPr/>
+          <p:nvPr/>
+        </p:nvSpPr>
+        <p:spPr>
+          <a:xfrm>
+            <a:off x="457200" y="1097280"/>
+            <a:ext cx="8229600" cy="3657600"/>
+          </a:xfrm>
+          <a:prstGeom prst="rect">
+            <a:avLst/>
+          </a:prstGeom>
+          <a:noFill/>
+          <a:ln/>
+        </p:spPr>
+        <p:txBody>
+          <a:bodyPr wrap="square" rtlCol="0" anchor="t"/>
+          <a:lstStyle/>
+          <a:p>
+            <a:pPr marL="342900" indent="-342900">
+              <a:spcAft>
+                <a:spcPts val="800"/>
+              </a:spcAft>
+              <a:buSzPct val="100000"/>
+              <a:buChar char="•"/>
+            </a:pPr>
+            <a:r>
+              <a:rPr lang="en-US" sz="1400" dirty="0">
+                <a:solidFill>
+                  <a:srgbClr val="3D3A36"/>
+                </a:solidFill>
+                <a:latin typeface="Calibri" pitchFamily="34" charset="0"/>
+                <a:ea typeface="Calibri" pitchFamily="34" charset="-122"/>
+                <a:cs typeface="Calibri" pitchFamily="34" charset="-120"/>
+              </a:rPr>
+              <a:t>'Does the temperature of water affect how fast sugar dissolves?'</a:t>
+            </a:r>
+            <a:endParaRPr lang="en-US" sz="1400" dirty="0"/>
+          </a:p>
+          <a:p>
+            <a:pPr marL="342900" indent="-342900">
+              <a:spcAft>
+                <a:spcPts val="800"/>
+              </a:spcAft>
+              <a:buSzPct val="100000"/>
+              <a:buChar char="•"/>
+            </a:pPr>
+            <a:r>
+              <a:rPr lang="en-US" sz="1400" dirty="0">
+                <a:solidFill>
+                  <a:srgbClr val="3D3A36"/>
+                </a:solidFill>
+                <a:latin typeface="Calibri" pitchFamily="34" charset="0"/>
+                <a:ea typeface="Calibri" pitchFamily="34" charset="-122"/>
+                <a:cs typeface="Calibri" pitchFamily="34" charset="-120"/>
+              </a:rPr>
+              <a:t>Independent variable: temperature of water</a:t>
+            </a:r>
+            <a:endParaRPr lang="en-US" sz="1400" dirty="0"/>
+          </a:p>
+          <a:p>
+            <a:pPr marL="342900" indent="-342900">
+              <a:spcAft>
+                <a:spcPts val="800"/>
+              </a:spcAft>
+              <a:buSzPct val="100000"/>
+              <a:buChar char="•"/>
+            </a:pPr>
+            <a:r>
+              <a:rPr lang="en-US" sz="1400" dirty="0">
+                <a:solidFill>
+                  <a:srgbClr val="3D3A36"/>
+                </a:solidFill>
+                <a:latin typeface="Calibri" pitchFamily="34" charset="0"/>
+                <a:ea typeface="Calibri" pitchFamily="34" charset="-122"/>
+                <a:cs typeface="Calibri" pitchFamily="34" charset="-120"/>
+              </a:rPr>
+              <a:t>Dependent variable: time for sugar to dissolve</a:t>
+            </a:r>
+            <a:endParaRPr lang="en-US" sz="1400" dirty="0"/>
+          </a:p>
+          <a:p>
+            <a:pPr marL="342900" indent="-342900">
+              <a:spcAft>
+                <a:spcPts val="800"/>
+              </a:spcAft>
+              <a:buSzPct val="100000"/>
+              <a:buChar char="•"/>
+            </a:pPr>
+            <a:r>
+              <a:rPr lang="en-US" sz="1400" dirty="0">
+                <a:solidFill>
+                  <a:srgbClr val="3D3A36"/>
+                </a:solidFill>
+                <a:latin typeface="Calibri" pitchFamily="34" charset="0"/>
+                <a:ea typeface="Calibri" pitchFamily="34" charset="-122"/>
+                <a:cs typeface="Calibri" pitchFamily="34" charset="-120"/>
+              </a:rPr>
+              <a:t>Controlled variables: amount of sugar, volume of water, type of sugar, stirring method</a:t>
+            </a:r>
+            <a:endParaRPr lang="en-US" sz="1400" dirty="0"/>
+          </a:p>
+          <a:p>
+            <a:pPr marL="342900" indent="-342900">
+              <a:spcAft>
+                <a:spcPts val="800"/>
+              </a:spcAft>
+              <a:buSzPct val="100000"/>
+              <a:buChar char="•"/>
+            </a:pPr>
+            <a:r>
+              <a:rPr lang="en-US" sz="1400" dirty="0">
+                <a:solidFill>
+                  <a:srgbClr val="3D3A36"/>
+                </a:solidFill>
+                <a:latin typeface="Calibri" pitchFamily="34" charset="0"/>
+                <a:ea typeface="Calibri" pitchFamily="34" charset="-122"/>
+                <a:cs typeface="Calibri" pitchFamily="34" charset="-120"/>
+              </a:rPr>
+              <a:t>'Does the colour of light affect plant growth?'</a:t>
+            </a:r>
+            <a:endParaRPr lang="en-US" sz="1400" dirty="0"/>
+          </a:p>
+          <a:p>
+            <a:pPr marL="342900" indent="-342900">
+              <a:spcAft>
+                <a:spcPts val="800"/>
+              </a:spcAft>
+              <a:buSzPct val="100000"/>
+              <a:buChar char="•"/>
+            </a:pPr>
+            <a:r>
+              <a:rPr lang="en-US" sz="1400" dirty="0">
+                <a:solidFill>
+                  <a:srgbClr val="3D3A36"/>
+                </a:solidFill>
+                <a:latin typeface="Calibri" pitchFamily="34" charset="0"/>
+                <a:ea typeface="Calibri" pitchFamily="34" charset="-122"/>
+                <a:cs typeface="Calibri" pitchFamily="34" charset="-120"/>
+              </a:rPr>
+              <a:t>Independent variable: colour of light</a:t>
+            </a:r>
+            <a:endParaRPr lang="en-US" sz="1400" dirty="0"/>
+          </a:p>
+          <a:p>
+            <a:pPr marL="342900" indent="-342900">
+              <a:spcAft>
+                <a:spcPts val="800"/>
+              </a:spcAft>
+              <a:buSzPct val="100000"/>
+              <a:buChar char="•"/>
+            </a:pPr>
+            <a:r>
+              <a:rPr lang="en-US" sz="1400" dirty="0">
+                <a:solidFill>
+                  <a:srgbClr val="3D3A36"/>
+                </a:solidFill>
+                <a:latin typeface="Calibri" pitchFamily="34" charset="0"/>
+                <a:ea typeface="Calibri" pitchFamily="34" charset="-122"/>
+                <a:cs typeface="Calibri" pitchFamily="34" charset="-120"/>
+              </a:rPr>
+              <a:t>Dependent variable: height of plant</a:t>
+            </a:r>
+            <a:endParaRPr lang="en-US" sz="1400" dirty="0"/>
+          </a:p>
+          <a:p>
+            <a:pPr marL="342900" indent="-342900">
+              <a:spcAft>
+                <a:spcPts val="800"/>
+              </a:spcAft>
+              <a:buSzPct val="100000"/>
+              <a:buChar char="•"/>
+            </a:pPr>
+            <a:r>
+              <a:rPr lang="en-US" sz="1400" dirty="0">
+                <a:solidFill>
+                  <a:srgbClr val="3D3A36"/>
+                </a:solidFill>
+                <a:latin typeface="Calibri" pitchFamily="34" charset="0"/>
+                <a:ea typeface="Calibri" pitchFamily="34" charset="-122"/>
+                <a:cs typeface="Calibri" pitchFamily="34" charset="-120"/>
+              </a:rPr>
+              <a:t>Controlled variables: same plant type, same water, same soil, same duration</a:t>
+            </a:r>
+            <a:endParaRPr lang="en-US" sz="1400" dirty="0"/>
+          </a:p>
+        </p:txBody>
+      </p:sp>
+    </p:spTree>
+  </p:cSld>
+  <p:clrMapOvr>
+    <a:masterClrMapping/>
+  </p:clrMapOvr>
+</p:sld>
+</file>
+
+<file path=ppt/slides/slide6.xml><?xml version="1.0" encoding="utf-8"?>
+<p:sld xmlns:a="http://schemas.openxmlformats.org/drawingml/2006/main" xmlns:r="http://schemas.openxmlformats.org/officeDocument/2006/relationships" xmlns:p="http://schemas.openxmlformats.org/presentationml/2006/main">
+  <p:cSld name="Slide 6">
     <p:bg>
       <p:bgPr>
         <a:solidFill>
@@ -2407,13 +3023,13 @@
         <p:spPr>
           <a:xfrm>
             <a:off x="0" y="0"/>
-            <a:ext cx="9144000" cy="54864"/>
-          </a:xfrm>
-          <a:prstGeom prst="rect">
-            <a:avLst/>
-          </a:prstGeom>
-          <a:solidFill>
-            <a:srgbClr val="2A9D8F"/>
+            <a:ext cx="109728" cy="5143500"/>
+          </a:xfrm>
+          <a:prstGeom prst="rect">
+            <a:avLst/>
+          </a:prstGeom>
+          <a:solidFill>
+            <a:srgbClr val="E9C46A"/>
           </a:solidFill>
           <a:ln/>
         </p:spPr>
@@ -2426,8 +3042,8 @@
         </p:nvSpPr>
         <p:spPr>
           <a:xfrm>
-            <a:off x="548640" y="457200"/>
-            <a:ext cx="8046720" cy="640080"/>
+            <a:off x="731520" y="457200"/>
+            <a:ext cx="7772400" cy="731520"/>
           </a:xfrm>
           <a:prstGeom prst="rect">
             <a:avLst/>
@@ -2443,7 +3059,7 @@
               <a:buNone/>
             </a:pPr>
             <a:r>
-              <a:rPr lang="en-US" sz="2800" b="1" dirty="0">
+              <a:rPr lang="en-US" sz="3200" b="1" dirty="0">
                 <a:solidFill>
                   <a:srgbClr val="FFFFFF"/>
                 </a:solidFill>
@@ -2453,7 +3069,7 @@
               </a:rPr>
               <a:t>Key Takeaways</a:t>
             </a:r>
-            <a:endParaRPr lang="en-US" sz="2800" dirty="0"/>
+            <a:endParaRPr lang="en-US" sz="3200" dirty="0"/>
           </a:p>
         </p:txBody>
       </p:sp>
@@ -2465,8 +3081,8 @@
         </p:nvSpPr>
         <p:spPr>
           <a:xfrm>
-            <a:off x="731520" y="1371600"/>
-            <a:ext cx="7680960" cy="3200400"/>
+            <a:off x="731520" y="1463040"/>
+            <a:ext cx="7772400" cy="3200400"/>
           </a:xfrm>
           <a:prstGeom prst="rect">
             <a:avLst/>
@@ -2486,7 +3102,7 @@
               <a:buChar char="•"/>
             </a:pPr>
             <a:r>
-              <a:rPr lang="en-US" sz="1600" dirty="0">
+              <a:rPr lang="en-US" sz="1500" dirty="0">
                 <a:solidFill>
                   <a:srgbClr val="CADCFC"/>
                 </a:solidFill>
@@ -2494,9 +3110,9 @@
                 <a:ea typeface="Calibri" pitchFamily="34" charset="-122"/>
                 <a:cs typeface="Calibri" pitchFamily="34" charset="-120"/>
               </a:rPr>
-              <a:t>IV = what you change, DV = what you measure, CV = what you keep the same</a:t>
-            </a:r>
-            <a:endParaRPr lang="en-US" sz="1600" dirty="0"/>
+              <a:t>Independent variable = what you change</a:t>
+            </a:r>
+            <a:endParaRPr lang="en-US" sz="1500" dirty="0"/>
           </a:p>
           <a:p>
             <a:pPr marL="342900" indent="-342900">
@@ -2507,7 +3123,7 @@
               <a:buChar char="•"/>
             </a:pPr>
             <a:r>
-              <a:rPr lang="en-US" sz="1600" dirty="0">
+              <a:rPr lang="en-US" sz="1500" dirty="0">
                 <a:solidFill>
                   <a:srgbClr val="CADCFC"/>
                 </a:solidFill>
@@ -2515,9 +3131,9 @@
                 <a:ea typeface="Calibri" pitchFamily="34" charset="-122"/>
                 <a:cs typeface="Calibri" pitchFamily="34" charset="-120"/>
               </a:rPr>
-              <a:t>A fair test changes only ONE variable</a:t>
-            </a:r>
-            <a:endParaRPr lang="en-US" sz="1600" dirty="0"/>
+              <a:t>Dependent variable = what you measure</a:t>
+            </a:r>
+            <a:endParaRPr lang="en-US" sz="1500" dirty="0"/>
           </a:p>
           <a:p>
             <a:pPr marL="342900" indent="-342900">
@@ -2528,7 +3144,7 @@
               <a:buChar char="•"/>
             </a:pPr>
             <a:r>
-              <a:rPr lang="en-US" sz="1600" dirty="0">
+              <a:rPr lang="en-US" sz="1500" dirty="0">
                 <a:solidFill>
                   <a:srgbClr val="CADCFC"/>
                 </a:solidFill>
@@ -2536,9 +3152,9 @@
                 <a:ea typeface="Calibri" pitchFamily="34" charset="-122"/>
                 <a:cs typeface="Calibri" pitchFamily="34" charset="-120"/>
               </a:rPr>
-              <a:t>Control variables make your results reliable</a:t>
-            </a:r>
-            <a:endParaRPr lang="en-US" sz="1600" dirty="0"/>
+              <a:t>Controlled variables = what you keep the same</a:t>
+            </a:r>
+            <a:endParaRPr lang="en-US" sz="1500" dirty="0"/>
           </a:p>
           <a:p>
             <a:pPr marL="342900" indent="-342900">
@@ -2549,7 +3165,7 @@
               <a:buChar char="•"/>
             </a:pPr>
             <a:r>
-              <a:rPr lang="en-US" sz="1600" dirty="0">
+              <a:rPr lang="en-US" sz="1500" dirty="0">
                 <a:solidFill>
                   <a:srgbClr val="CADCFC"/>
                 </a:solidFill>
@@ -2557,9 +3173,30 @@
                 <a:ea typeface="Calibri" pitchFamily="34" charset="-122"/>
                 <a:cs typeface="Calibri" pitchFamily="34" charset="-120"/>
               </a:rPr>
-              <a:t>Always identify all three types before starting an experiment</a:t>
-            </a:r>
-            <a:endParaRPr lang="en-US" sz="1600" dirty="0"/>
+              <a:t>A fair test changes ONLY ONE variable</a:t>
+            </a:r>
+            <a:endParaRPr lang="en-US" sz="1500" dirty="0"/>
+          </a:p>
+          <a:p>
+            <a:pPr marL="342900" indent="-342900">
+              <a:spcAft>
+                <a:spcPts val="1000"/>
+              </a:spcAft>
+              <a:buSzPct val="100000"/>
+              <a:buChar char="•"/>
+            </a:pPr>
+            <a:r>
+              <a:rPr lang="en-US" sz="1500" dirty="0">
+                <a:solidFill>
+                  <a:srgbClr val="CADCFC"/>
+                </a:solidFill>
+                <a:latin typeface="Calibri" pitchFamily="34" charset="0"/>
+                <a:ea typeface="Calibri" pitchFamily="34" charset="-122"/>
+                <a:cs typeface="Calibri" pitchFamily="34" charset="-120"/>
+              </a:rPr>
+              <a:t>Always repeat experiments for reliability</a:t>
+            </a:r>
+            <a:endParaRPr lang="en-US" sz="1500" dirty="0"/>
           </a:p>
         </p:txBody>
       </p:sp>
@@ -2571,8 +3208,8 @@
         </p:nvSpPr>
         <p:spPr>
           <a:xfrm>
-            <a:off x="548640" y="4572000"/>
-            <a:ext cx="3657600" cy="274320"/>
+            <a:off x="731520" y="4572000"/>
+            <a:ext cx="7772400" cy="365760"/>
           </a:xfrm>
           <a:prstGeom prst="rect">
             <a:avLst/>
@@ -2588,14 +3225,17 @@
               <a:buNone/>
             </a:pPr>
             <a:r>
-              <a:rPr lang="en-US" sz="1000" dirty="0">
-                <a:solidFill>
-                  <a:srgbClr val="6B6660"/>
-                </a:solidFill>
+              <a:rPr lang="en-US" sz="1100" dirty="0">
+                <a:solidFill>
+                  <a:srgbClr val="E9C46A"/>
+                </a:solidFill>
+                <a:latin typeface="Calibri" pitchFamily="34" charset="0"/>
+                <a:ea typeface="Calibri" pitchFamily="34" charset="-122"/>
+                <a:cs typeface="Calibri" pitchFamily="34" charset="-120"/>
               </a:rPr>
               <a:t>mrzocchi.com</a:t>
             </a:r>
-            <a:endParaRPr lang="en-US" sz="1000" dirty="0"/>
+            <a:endParaRPr lang="en-US" sz="1100" dirty="0"/>
           </a:p>
         </p:txBody>
       </p:sp>

--- a/static/ppts/G6_Sci_T1_Variables.pptx
+++ b/static/ppts/G6_Sci_T1_Variables.pptx
@@ -11,9 +11,12 @@
     <p:sldId id="259" r:id="rId5"/>
     <p:sldId id="260" r:id="rId6"/>
     <p:sldId id="261" r:id="rId7"/>
+    <p:sldId id="262" r:id="rId8"/>
+    <p:sldId id="263" r:id="rId9"/>
+    <p:sldId id="264" r:id="rId10"/>
   </p:sldIdLst>
   <p:notesMasterIdLst>
-    <p:notesMasterId r:id="rId8"/>
+    <p:notesMasterId r:id="rId11"/>
   </p:notesMasterIdLst>
   <p:sldSz cx="9144000" cy="5143500"/>
   <p:notesSz cx="5143500" cy="9144000"/>
@@ -989,6 +992,270 @@
 </p:notes>
 </file>
 
+<file path=ppt/notesSlides/notesSlide7.xml><?xml version="1.0" encoding="utf-8"?>
+<p:notes xmlns:a="http://schemas.openxmlformats.org/drawingml/2006/main" xmlns:r="http://schemas.openxmlformats.org/officeDocument/2006/relationships" xmlns:p="http://schemas.openxmlformats.org/presentationml/2006/main">
+  <p:cSld>
+    <p:spTree>
+      <p:nvGrpSpPr>
+        <p:cNvPr id="1" name=""/>
+        <p:cNvGrpSpPr/>
+        <p:nvPr/>
+      </p:nvGrpSpPr>
+      <p:grpSpPr>
+        <a:xfrm>
+          <a:off x="0" y="0"/>
+          <a:ext cx="0" cy="0"/>
+          <a:chOff x="0" y="0"/>
+          <a:chExt cx="0" cy="0"/>
+        </a:xfrm>
+      </p:grpSpPr>
+      <p:sp>
+        <p:nvSpPr>
+          <p:cNvPr id="2" name="Slide Image Placeholder 1"/>
+          <p:cNvSpPr>
+            <a:spLocks noGrp="1" noRot="1" noChangeAspect="1"/>
+          </p:cNvSpPr>
+          <p:nvPr>
+            <p:ph type="sldImg"/>
+          </p:nvPr>
+        </p:nvSpPr>
+        <p:spPr/>
+      </p:sp>
+      <p:sp>
+        <p:nvSpPr>
+          <p:cNvPr id="3" name="Notes Placeholder 2"/>
+          <p:cNvSpPr>
+            <a:spLocks noGrp="1"/>
+          </p:cNvSpPr>
+          <p:nvPr>
+            <p:ph type="body" idx="1"/>
+          </p:nvPr>
+        </p:nvSpPr>
+        <p:spPr/>
+        <p:txBody>
+          <a:bodyPr/>
+          <a:lstStyle/>
+          <a:p>
+            <a:r>
+              <a:rPr lang="en-US" dirty="0"/>
+              <a:t/>
+            </a:r>
+            <a:endParaRPr lang="en-US" dirty="0"/>
+          </a:p>
+        </p:txBody>
+      </p:sp>
+      <p:sp>
+        <p:nvSpPr>
+          <p:cNvPr id="4" name="Slide Number Placeholder 3"/>
+          <p:cNvSpPr>
+            <a:spLocks noGrp="1"/>
+          </p:cNvSpPr>
+          <p:nvPr>
+            <p:ph type="sldNum" sz="quarter" idx="10"/>
+          </p:nvPr>
+        </p:nvSpPr>
+        <p:spPr/>
+        <p:txBody>
+          <a:bodyPr/>
+          <a:lstStyle/>
+          <a:p>
+            <a:fld id="{F7021451-1387-4CA6-816F-3879F97B5CBC}" type="slidenum">
+              <a:rPr lang="en-US"/>
+              <a:t>7</a:t>
+            </a:fld>
+            <a:endParaRPr lang="en-US"/>
+          </a:p>
+        </p:txBody>
+      </p:sp>
+    </p:spTree>
+    <p:extLst>
+      <p:ext uri="{BB962C8B-B14F-4D97-AF65-F5344CB8AC3E}">
+        <p14:creationId xmlns:p14="http://schemas.microsoft.com/office/powerpoint/2010/main" val="1024086991"/>
+      </p:ext>
+    </p:extLst>
+  </p:cSld>
+  <p:clrMapOvr>
+    <a:masterClrMapping/>
+  </p:clrMapOvr>
+</p:notes>
+</file>
+
+<file path=ppt/notesSlides/notesSlide8.xml><?xml version="1.0" encoding="utf-8"?>
+<p:notes xmlns:a="http://schemas.openxmlformats.org/drawingml/2006/main" xmlns:r="http://schemas.openxmlformats.org/officeDocument/2006/relationships" xmlns:p="http://schemas.openxmlformats.org/presentationml/2006/main">
+  <p:cSld>
+    <p:spTree>
+      <p:nvGrpSpPr>
+        <p:cNvPr id="1" name=""/>
+        <p:cNvGrpSpPr/>
+        <p:nvPr/>
+      </p:nvGrpSpPr>
+      <p:grpSpPr>
+        <a:xfrm>
+          <a:off x="0" y="0"/>
+          <a:ext cx="0" cy="0"/>
+          <a:chOff x="0" y="0"/>
+          <a:chExt cx="0" cy="0"/>
+        </a:xfrm>
+      </p:grpSpPr>
+      <p:sp>
+        <p:nvSpPr>
+          <p:cNvPr id="2" name="Slide Image Placeholder 1"/>
+          <p:cNvSpPr>
+            <a:spLocks noGrp="1" noRot="1" noChangeAspect="1"/>
+          </p:cNvSpPr>
+          <p:nvPr>
+            <p:ph type="sldImg"/>
+          </p:nvPr>
+        </p:nvSpPr>
+        <p:spPr/>
+      </p:sp>
+      <p:sp>
+        <p:nvSpPr>
+          <p:cNvPr id="3" name="Notes Placeholder 2"/>
+          <p:cNvSpPr>
+            <a:spLocks noGrp="1"/>
+          </p:cNvSpPr>
+          <p:nvPr>
+            <p:ph type="body" idx="1"/>
+          </p:nvPr>
+        </p:nvSpPr>
+        <p:spPr/>
+        <p:txBody>
+          <a:bodyPr/>
+          <a:lstStyle/>
+          <a:p>
+            <a:r>
+              <a:rPr lang="en-US" dirty="0"/>
+              <a:t/>
+            </a:r>
+            <a:endParaRPr lang="en-US" dirty="0"/>
+          </a:p>
+        </p:txBody>
+      </p:sp>
+      <p:sp>
+        <p:nvSpPr>
+          <p:cNvPr id="4" name="Slide Number Placeholder 3"/>
+          <p:cNvSpPr>
+            <a:spLocks noGrp="1"/>
+          </p:cNvSpPr>
+          <p:nvPr>
+            <p:ph type="sldNum" sz="quarter" idx="10"/>
+          </p:nvPr>
+        </p:nvSpPr>
+        <p:spPr/>
+        <p:txBody>
+          <a:bodyPr/>
+          <a:lstStyle/>
+          <a:p>
+            <a:fld id="{F7021451-1387-4CA6-816F-3879F97B5CBC}" type="slidenum">
+              <a:rPr lang="en-US"/>
+              <a:t>8</a:t>
+            </a:fld>
+            <a:endParaRPr lang="en-US"/>
+          </a:p>
+        </p:txBody>
+      </p:sp>
+    </p:spTree>
+    <p:extLst>
+      <p:ext uri="{BB962C8B-B14F-4D97-AF65-F5344CB8AC3E}">
+        <p14:creationId xmlns:p14="http://schemas.microsoft.com/office/powerpoint/2010/main" val="1024086991"/>
+      </p:ext>
+    </p:extLst>
+  </p:cSld>
+  <p:clrMapOvr>
+    <a:masterClrMapping/>
+  </p:clrMapOvr>
+</p:notes>
+</file>
+
+<file path=ppt/notesSlides/notesSlide9.xml><?xml version="1.0" encoding="utf-8"?>
+<p:notes xmlns:a="http://schemas.openxmlformats.org/drawingml/2006/main" xmlns:r="http://schemas.openxmlformats.org/officeDocument/2006/relationships" xmlns:p="http://schemas.openxmlformats.org/presentationml/2006/main">
+  <p:cSld>
+    <p:spTree>
+      <p:nvGrpSpPr>
+        <p:cNvPr id="1" name=""/>
+        <p:cNvGrpSpPr/>
+        <p:nvPr/>
+      </p:nvGrpSpPr>
+      <p:grpSpPr>
+        <a:xfrm>
+          <a:off x="0" y="0"/>
+          <a:ext cx="0" cy="0"/>
+          <a:chOff x="0" y="0"/>
+          <a:chExt cx="0" cy="0"/>
+        </a:xfrm>
+      </p:grpSpPr>
+      <p:sp>
+        <p:nvSpPr>
+          <p:cNvPr id="2" name="Slide Image Placeholder 1"/>
+          <p:cNvSpPr>
+            <a:spLocks noGrp="1" noRot="1" noChangeAspect="1"/>
+          </p:cNvSpPr>
+          <p:nvPr>
+            <p:ph type="sldImg"/>
+          </p:nvPr>
+        </p:nvSpPr>
+        <p:spPr/>
+      </p:sp>
+      <p:sp>
+        <p:nvSpPr>
+          <p:cNvPr id="3" name="Notes Placeholder 2"/>
+          <p:cNvSpPr>
+            <a:spLocks noGrp="1"/>
+          </p:cNvSpPr>
+          <p:nvPr>
+            <p:ph type="body" idx="1"/>
+          </p:nvPr>
+        </p:nvSpPr>
+        <p:spPr/>
+        <p:txBody>
+          <a:bodyPr/>
+          <a:lstStyle/>
+          <a:p>
+            <a:r>
+              <a:rPr lang="en-US" dirty="0"/>
+              <a:t/>
+            </a:r>
+            <a:endParaRPr lang="en-US" dirty="0"/>
+          </a:p>
+        </p:txBody>
+      </p:sp>
+      <p:sp>
+        <p:nvSpPr>
+          <p:cNvPr id="4" name="Slide Number Placeholder 3"/>
+          <p:cNvSpPr>
+            <a:spLocks noGrp="1"/>
+          </p:cNvSpPr>
+          <p:nvPr>
+            <p:ph type="sldNum" sz="quarter" idx="10"/>
+          </p:nvPr>
+        </p:nvSpPr>
+        <p:spPr/>
+        <p:txBody>
+          <a:bodyPr/>
+          <a:lstStyle/>
+          <a:p>
+            <a:fld id="{F7021451-1387-4CA6-816F-3879F97B5CBC}" type="slidenum">
+              <a:rPr lang="en-US"/>
+              <a:t>9</a:t>
+            </a:fld>
+            <a:endParaRPr lang="en-US"/>
+          </a:p>
+        </p:txBody>
+      </p:sp>
+    </p:spTree>
+    <p:extLst>
+      <p:ext uri="{BB962C8B-B14F-4D97-AF65-F5344CB8AC3E}">
+        <p14:creationId xmlns:p14="http://schemas.microsoft.com/office/powerpoint/2010/main" val="1024086991"/>
+      </p:ext>
+    </p:extLst>
+  </p:cSld>
+  <p:clrMapOvr>
+    <a:masterClrMapping/>
+  </p:clrMapOvr>
+</p:notes>
+</file>
+
 <file path=ppt/slideLayouts/slideLayout1.xml><?xml version="1.0" encoding="utf-8"?>
 <p:sldLayout xmlns:a="http://schemas.openxmlformats.org/drawingml/2006/main" xmlns:r="http://schemas.openxmlformats.org/officeDocument/2006/relationships" xmlns:p="http://schemas.openxmlformats.org/presentationml/2006/main" preserve="1">
   <p:cSld name="DEFAULT">
@@ -1299,13 +1566,6 @@
 <file path=ppt/slides/slide1.xml><?xml version="1.0" encoding="utf-8"?>
 <p:sld xmlns:a="http://schemas.openxmlformats.org/drawingml/2006/main" xmlns:r="http://schemas.openxmlformats.org/officeDocument/2006/relationships" xmlns:p="http://schemas.openxmlformats.org/presentationml/2006/main">
   <p:cSld name="Slide 1">
-    <p:bg>
-      <p:bgPr>
-        <a:solidFill>
-          <a:srgbClr val="1B2A4A"/>
-        </a:solidFill>
-      </p:bgPr>
-    </p:bg>
     <p:spTree>
       <p:nvGrpSpPr>
         <p:cNvPr id="1" name=""/>
@@ -1329,7 +1589,27 @@
         <p:spPr>
           <a:xfrm>
             <a:off x="0" y="0"/>
-            <a:ext cx="109728" cy="5143500"/>
+            <a:ext cx="9144000" cy="5143500"/>
+          </a:xfrm>
+          <a:prstGeom prst="rect">
+            <a:avLst/>
+          </a:prstGeom>
+          <a:solidFill>
+            <a:srgbClr val="1B2A4A"/>
+          </a:solidFill>
+          <a:ln/>
+        </p:spPr>
+      </p:sp>
+      <p:sp>
+        <p:nvSpPr>
+          <p:cNvPr id="3" name="Shape 1"/>
+          <p:cNvSpPr/>
+          <p:nvPr/>
+        </p:nvSpPr>
+        <p:spPr>
+          <a:xfrm>
+            <a:off x="0" y="4777740"/>
+            <a:ext cx="9144000" cy="365760"/>
           </a:xfrm>
           <a:prstGeom prst="rect">
             <a:avLst/>
@@ -1342,14 +1622,36 @@
       </p:sp>
       <p:sp>
         <p:nvSpPr>
-          <p:cNvPr id="3" name="Text 1"/>
-          <p:cNvSpPr/>
-          <p:nvPr/>
-        </p:nvSpPr>
-        <p:spPr>
-          <a:xfrm>
-            <a:off x="731520" y="1097280"/>
-            <a:ext cx="7772400" cy="1371600"/>
+          <p:cNvPr id="4" name="Shape 2"/>
+          <p:cNvSpPr/>
+          <p:nvPr/>
+        </p:nvSpPr>
+        <p:spPr>
+          <a:xfrm>
+            <a:off x="6858000" y="-1371600"/>
+            <a:ext cx="4572000" cy="4572000"/>
+          </a:xfrm>
+          <a:prstGeom prst="ellipse">
+            <a:avLst/>
+          </a:prstGeom>
+          <a:solidFill>
+            <a:srgbClr val="2A9D8F">
+              <a:alpha val="12000"/>
+            </a:srgbClr>
+          </a:solidFill>
+          <a:ln/>
+        </p:spPr>
+      </p:sp>
+      <p:sp>
+        <p:nvSpPr>
+          <p:cNvPr id="5" name="Text 3"/>
+          <p:cNvSpPr/>
+          <p:nvPr/>
+        </p:nvSpPr>
+        <p:spPr>
+          <a:xfrm>
+            <a:off x="731520" y="914400"/>
+            <a:ext cx="7680960" cy="457200"/>
           </a:xfrm>
           <a:prstGeom prst="rect">
             <a:avLst/>
@@ -1365,7 +1667,46 @@
               <a:buNone/>
             </a:pPr>
             <a:r>
-              <a:rPr lang="en-US" sz="4000" b="1" dirty="0">
+              <a:rPr lang="en-US" sz="1300" b="1" spc="500" kern="0" dirty="0">
+                <a:solidFill>
+                  <a:srgbClr val="2A9D8F"/>
+                </a:solidFill>
+                <a:latin typeface="Calibri" pitchFamily="34" charset="0"/>
+                <a:ea typeface="Calibri" pitchFamily="34" charset="-122"/>
+                <a:cs typeface="Calibri" pitchFamily="34" charset="-120"/>
+              </a:rPr>
+              <a:t>GRADE 6 SCIENCE</a:t>
+            </a:r>
+            <a:endParaRPr lang="en-US" sz="1300" dirty="0"/>
+          </a:p>
+        </p:txBody>
+      </p:sp>
+      <p:sp>
+        <p:nvSpPr>
+          <p:cNvPr id="6" name="Text 4"/>
+          <p:cNvSpPr/>
+          <p:nvPr/>
+        </p:nvSpPr>
+        <p:spPr>
+          <a:xfrm>
+            <a:off x="731520" y="1463040"/>
+            <a:ext cx="6858000" cy="1645920"/>
+          </a:xfrm>
+          <a:prstGeom prst="rect">
+            <a:avLst/>
+          </a:prstGeom>
+          <a:noFill/>
+          <a:ln/>
+        </p:spPr>
+        <p:txBody>
+          <a:bodyPr wrap="square" rtlCol="0" anchor="t"/>
+          <a:lstStyle/>
+          <a:p>
+            <a:pPr indent="0" marL="0">
+              <a:buNone/>
+            </a:pPr>
+            <a:r>
+              <a:rPr lang="en-US" sz="3800" b="1" dirty="0">
                 <a:solidFill>
                   <a:srgbClr val="FFFFFF"/>
                 </a:solidFill>
@@ -1373,22 +1714,22 @@
                 <a:ea typeface="Georgia" pitchFamily="34" charset="-122"/>
                 <a:cs typeface="Georgia" pitchFamily="34" charset="-120"/>
               </a:rPr>
-              <a:t>Variables in Science</a:t>
-            </a:r>
-            <a:endParaRPr lang="en-US" sz="4000" dirty="0"/>
-          </a:p>
-        </p:txBody>
-      </p:sp>
-      <p:sp>
-        <p:nvSpPr>
-          <p:cNvPr id="4" name="Text 2"/>
-          <p:cNvSpPr/>
-          <p:nvPr/>
-        </p:nvSpPr>
-        <p:spPr>
-          <a:xfrm>
-            <a:off x="731520" y="2560320"/>
-            <a:ext cx="7772400" cy="548640"/>
+              <a:t>Variables</a:t>
+            </a:r>
+            <a:endParaRPr lang="en-US" sz="3800" dirty="0"/>
+          </a:p>
+        </p:txBody>
+      </p:sp>
+      <p:sp>
+        <p:nvSpPr>
+          <p:cNvPr id="7" name="Text 5"/>
+          <p:cNvSpPr/>
+          <p:nvPr/>
+        </p:nvSpPr>
+        <p:spPr>
+          <a:xfrm>
+            <a:off x="731520" y="3200400"/>
+            <a:ext cx="6400800" cy="548640"/>
           </a:xfrm>
           <a:prstGeom prst="rect">
             <a:avLst/>
@@ -1404,15 +1745,15 @@
               <a:buNone/>
             </a:pPr>
             <a:r>
-              <a:rPr lang="en-US" sz="1600" dirty="0">
-                <a:solidFill>
-                  <a:srgbClr val="E9C46A"/>
+              <a:rPr lang="en-US" sz="1600" i="1" dirty="0">
+                <a:solidFill>
+                  <a:srgbClr val="9B9690"/>
                 </a:solidFill>
                 <a:latin typeface="Calibri" pitchFamily="34" charset="0"/>
                 <a:ea typeface="Calibri" pitchFamily="34" charset="-122"/>
                 <a:cs typeface="Calibri" pitchFamily="34" charset="-120"/>
               </a:rPr>
-              <a:t>Grade 6 Science · Mr Zocchi</a:t>
+              <a:t>Understanding what changes in an experiment</a:t>
             </a:r>
             <a:endParaRPr lang="en-US" sz="1600" dirty="0"/>
           </a:p>
@@ -1420,36 +1761,14 @@
       </p:sp>
       <p:sp>
         <p:nvSpPr>
-          <p:cNvPr id="5" name="Shape 3"/>
-          <p:cNvSpPr/>
-          <p:nvPr/>
-        </p:nvSpPr>
-        <p:spPr>
-          <a:xfrm>
-            <a:off x="731520" y="3474720"/>
-            <a:ext cx="2011680" cy="411480"/>
-          </a:xfrm>
-          <a:prstGeom prst="roundRect">
-            <a:avLst>
-              <a:gd name="adj" fmla="val 17778"/>
-            </a:avLst>
-          </a:prstGeom>
-          <a:solidFill>
-            <a:srgbClr val="2A9D8F"/>
-          </a:solidFill>
-          <a:ln/>
-        </p:spPr>
-      </p:sp>
-      <p:sp>
-        <p:nvSpPr>
-          <p:cNvPr id="6" name="Text 4"/>
-          <p:cNvSpPr/>
-          <p:nvPr/>
-        </p:nvSpPr>
-        <p:spPr>
-          <a:xfrm>
-            <a:off x="731520" y="3474720"/>
-            <a:ext cx="2011680" cy="411480"/>
+          <p:cNvPr id="8" name="Text 6"/>
+          <p:cNvSpPr/>
+          <p:nvPr/>
+        </p:nvSpPr>
+        <p:spPr>
+          <a:xfrm>
+            <a:off x="731520" y="4297680"/>
+            <a:ext cx="2743200" cy="365760"/>
           </a:xfrm>
           <a:prstGeom prst="rect">
             <a:avLst/>
@@ -1461,21 +1780,21 @@
           <a:bodyPr wrap="square" rtlCol="0" anchor="ctr"/>
           <a:lstStyle/>
           <a:p>
-            <a:pPr algn="ctr" indent="0" marL="0">
+            <a:pPr indent="0" marL="0">
               <a:buNone/>
             </a:pPr>
             <a:r>
-              <a:rPr lang="en-US" sz="1200" b="1" dirty="0">
-                <a:solidFill>
-                  <a:srgbClr val="FFFFFF"/>
+              <a:rPr lang="en-US" sz="1100" dirty="0">
+                <a:solidFill>
+                  <a:srgbClr val="9B9690"/>
                 </a:solidFill>
                 <a:latin typeface="Calibri" pitchFamily="34" charset="0"/>
                 <a:ea typeface="Calibri" pitchFamily="34" charset="-122"/>
                 <a:cs typeface="Calibri" pitchFamily="34" charset="-120"/>
               </a:rPr>
-              <a:t>Term 1 · Scientific Skills</a:t>
-            </a:r>
-            <a:endParaRPr lang="en-US" sz="1200" dirty="0"/>
+              <a:t>mrzocchi.com</a:t>
+            </a:r>
+            <a:endParaRPr lang="en-US" sz="1100" dirty="0"/>
           </a:p>
         </p:txBody>
       </p:sp>
@@ -1520,7 +1839,47 @@
         <p:spPr>
           <a:xfrm>
             <a:off x="0" y="0"/>
-            <a:ext cx="9144000" cy="54864"/>
+            <a:ext cx="9144000" cy="822960"/>
+          </a:xfrm>
+          <a:prstGeom prst="rect">
+            <a:avLst/>
+          </a:prstGeom>
+          <a:solidFill>
+            <a:srgbClr val="FFFFFF"/>
+          </a:solidFill>
+          <a:ln/>
+        </p:spPr>
+      </p:sp>
+      <p:sp>
+        <p:nvSpPr>
+          <p:cNvPr id="3" name="Shape 1"/>
+          <p:cNvSpPr/>
+          <p:nvPr/>
+        </p:nvSpPr>
+        <p:spPr>
+          <a:xfrm>
+            <a:off x="0" y="804672"/>
+            <a:ext cx="9144000" cy="27432"/>
+          </a:xfrm>
+          <a:prstGeom prst="rect">
+            <a:avLst/>
+          </a:prstGeom>
+          <a:solidFill>
+            <a:srgbClr val="E5E2DC"/>
+          </a:solidFill>
+          <a:ln/>
+        </p:spPr>
+      </p:sp>
+      <p:sp>
+        <p:nvSpPr>
+          <p:cNvPr id="4" name="Shape 2"/>
+          <p:cNvSpPr/>
+          <p:nvPr/>
+        </p:nvSpPr>
+        <p:spPr>
+          <a:xfrm>
+            <a:off x="548640" y="201168"/>
+            <a:ext cx="54864" cy="420624"/>
           </a:xfrm>
           <a:prstGeom prst="rect">
             <a:avLst/>
@@ -1533,14 +1892,14 @@
       </p:sp>
       <p:sp>
         <p:nvSpPr>
-          <p:cNvPr id="3" name="Text 1"/>
-          <p:cNvSpPr/>
-          <p:nvPr/>
-        </p:nvSpPr>
-        <p:spPr>
-          <a:xfrm>
-            <a:off x="7772400" y="4709160"/>
-            <a:ext cx="1097280" cy="320040"/>
+          <p:cNvPr id="5" name="Text 3"/>
+          <p:cNvSpPr/>
+          <p:nvPr/>
+        </p:nvSpPr>
+        <p:spPr>
+          <a:xfrm>
+            <a:off x="777240" y="137160"/>
+            <a:ext cx="7772400" cy="548640"/>
           </a:xfrm>
           <a:prstGeom prst="rect">
             <a:avLst/>
@@ -1549,37 +1908,37 @@
           <a:ln/>
         </p:spPr>
         <p:txBody>
-          <a:bodyPr wrap="square" rtlCol="0" anchor="ctr"/>
-          <a:lstStyle/>
-          <a:p>
-            <a:pPr algn="r" indent="0" marL="0">
+          <a:bodyPr wrap="square" lIns="0" tIns="0" rIns="0" bIns="0" rtlCol="0" anchor="ctr"/>
+          <a:lstStyle/>
+          <a:p>
+            <a:pPr indent="0" marL="0">
               <a:buNone/>
             </a:pPr>
             <a:r>
-              <a:rPr lang="en-US" sz="900" dirty="0">
-                <a:solidFill>
-                  <a:srgbClr val="6B6660"/>
-                </a:solidFill>
-                <a:latin typeface="Calibri" pitchFamily="34" charset="0"/>
-                <a:ea typeface="Calibri" pitchFamily="34" charset="-122"/>
-                <a:cs typeface="Calibri" pitchFamily="34" charset="-120"/>
-              </a:rPr>
-              <a:t>2 / 6</a:t>
-            </a:r>
-            <a:endParaRPr lang="en-US" sz="900" dirty="0"/>
-          </a:p>
-        </p:txBody>
-      </p:sp>
-      <p:sp>
-        <p:nvSpPr>
-          <p:cNvPr id="4" name="Shape 2"/>
-          <p:cNvSpPr/>
-          <p:nvPr/>
-        </p:nvSpPr>
-        <p:spPr>
-          <a:xfrm>
-            <a:off x="1371600" y="914400"/>
-            <a:ext cx="6400800" cy="3200400"/>
+              <a:rPr lang="en-US" sz="2000" b="1" dirty="0">
+                <a:solidFill>
+                  <a:srgbClr val="1B2A4A"/>
+                </a:solidFill>
+                <a:latin typeface="Georgia" pitchFamily="34" charset="0"/>
+                <a:ea typeface="Georgia" pitchFamily="34" charset="-122"/>
+                <a:cs typeface="Georgia" pitchFamily="34" charset="-120"/>
+              </a:rPr>
+              <a:t>Key Vocabulary</a:t>
+            </a:r>
+            <a:endParaRPr lang="en-US" sz="2000" dirty="0"/>
+          </a:p>
+        </p:txBody>
+      </p:sp>
+      <p:sp>
+        <p:nvSpPr>
+          <p:cNvPr id="6" name="Shape 4"/>
+          <p:cNvSpPr/>
+          <p:nvPr/>
+        </p:nvSpPr>
+        <p:spPr>
+          <a:xfrm>
+            <a:off x="731520" y="1051560"/>
+            <a:ext cx="3657600" cy="658368"/>
           </a:xfrm>
           <a:prstGeom prst="rect">
             <a:avLst/>
@@ -1587,12 +1946,7 @@
           <a:solidFill>
             <a:srgbClr val="FFFFFF"/>
           </a:solidFill>
-          <a:ln w="12700">
-            <a:solidFill>
-              <a:srgbClr val="E5E2DC"/>
-            </a:solidFill>
-            <a:prstDash val="solid"/>
-          </a:ln>
+          <a:ln/>
           <a:effectLst>
             <a:outerShdw sx="100000" sy="100000" kx="0" ky="0" algn="bl" rotWithShape="0" blurRad="50800" dist="25400" dir="8100000">
               <a:srgbClr val="000000">
@@ -1604,14 +1958,14 @@
       </p:sp>
       <p:sp>
         <p:nvSpPr>
-          <p:cNvPr id="5" name="Shape 3"/>
-          <p:cNvSpPr/>
-          <p:nvPr/>
-        </p:nvSpPr>
-        <p:spPr>
-          <a:xfrm>
-            <a:off x="1371600" y="914400"/>
-            <a:ext cx="91440" cy="3200400"/>
+          <p:cNvPr id="7" name="Shape 5"/>
+          <p:cNvSpPr/>
+          <p:nvPr/>
+        </p:nvSpPr>
+        <p:spPr>
+          <a:xfrm>
+            <a:off x="731520" y="1051560"/>
+            <a:ext cx="54864" cy="658368"/>
           </a:xfrm>
           <a:prstGeom prst="rect">
             <a:avLst/>
@@ -1624,14 +1978,14 @@
       </p:sp>
       <p:sp>
         <p:nvSpPr>
-          <p:cNvPr id="6" name="Text 4"/>
-          <p:cNvSpPr/>
-          <p:nvPr/>
-        </p:nvSpPr>
-        <p:spPr>
-          <a:xfrm>
-            <a:off x="1828800" y="1097280"/>
-            <a:ext cx="5669280" cy="640080"/>
+          <p:cNvPr id="8" name="Text 6"/>
+          <p:cNvSpPr/>
+          <p:nvPr/>
+        </p:nvSpPr>
+        <p:spPr>
+          <a:xfrm>
+            <a:off x="914400" y="1051560"/>
+            <a:ext cx="1463040" cy="658368"/>
           </a:xfrm>
           <a:prstGeom prst="rect">
             <a:avLst/>
@@ -1640,14 +1994,14 @@
           <a:ln/>
         </p:spPr>
         <p:txBody>
-          <a:bodyPr wrap="square" rtlCol="0" anchor="ctr"/>
+          <a:bodyPr wrap="square" lIns="0" tIns="0" rIns="0" bIns="0" rtlCol="0" anchor="ctr"/>
           <a:lstStyle/>
           <a:p>
             <a:pPr indent="0" marL="0">
               <a:buNone/>
             </a:pPr>
             <a:r>
-              <a:rPr lang="en-US" sz="2400" b="1" dirty="0">
+              <a:rPr lang="en-US" sz="1300" b="1" dirty="0">
                 <a:solidFill>
                   <a:srgbClr val="1B2A4A"/>
                 </a:solidFill>
@@ -1655,22 +2009,22 @@
                 <a:ea typeface="Georgia" pitchFamily="34" charset="-122"/>
                 <a:cs typeface="Georgia" pitchFamily="34" charset="-120"/>
               </a:rPr>
-              <a:t>What is a Variable?</a:t>
-            </a:r>
-            <a:endParaRPr lang="en-US" sz="2400" dirty="0"/>
-          </a:p>
-        </p:txBody>
-      </p:sp>
-      <p:sp>
-        <p:nvSpPr>
-          <p:cNvPr id="7" name="Text 5"/>
-          <p:cNvSpPr/>
-          <p:nvPr/>
-        </p:nvSpPr>
-        <p:spPr>
-          <a:xfrm>
-            <a:off x="1828800" y="1828800"/>
-            <a:ext cx="5669280" cy="2011680"/>
+              <a:t>Variable</a:t>
+            </a:r>
+            <a:endParaRPr lang="en-US" sz="1300" dirty="0"/>
+          </a:p>
+        </p:txBody>
+      </p:sp>
+      <p:sp>
+        <p:nvSpPr>
+          <p:cNvPr id="9" name="Text 7"/>
+          <p:cNvSpPr/>
+          <p:nvPr/>
+        </p:nvSpPr>
+        <p:spPr>
+          <a:xfrm>
+            <a:off x="2377440" y="1051560"/>
+            <a:ext cx="1920240" cy="658368"/>
           </a:xfrm>
           <a:prstGeom prst="rect">
             <a:avLst/>
@@ -1679,27 +2033,649 @@
           <a:ln/>
         </p:spPr>
         <p:txBody>
-          <a:bodyPr wrap="square" rtlCol="0" anchor="t"/>
+          <a:bodyPr wrap="square" lIns="0" tIns="0" rIns="0" bIns="0" rtlCol="0" anchor="ctr"/>
           <a:lstStyle/>
           <a:p>
             <a:pPr indent="0" marL="0">
-              <a:lnSpc>
-                <a:spcPct val="130000"/>
-              </a:lnSpc>
               <a:buNone/>
             </a:pPr>
             <a:r>
-              <a:rPr lang="en-US" sz="1500" dirty="0">
-                <a:solidFill>
-                  <a:srgbClr val="3D3A36"/>
+              <a:rPr lang="en-US" sz="1100" dirty="0">
+                <a:solidFill>
+                  <a:srgbClr val="6B6660"/>
                 </a:solidFill>
                 <a:latin typeface="Calibri" pitchFamily="34" charset="0"/>
                 <a:ea typeface="Calibri" pitchFamily="34" charset="-122"/>
                 <a:cs typeface="Calibri" pitchFamily="34" charset="-120"/>
               </a:rPr>
-              <a:t>A variable is anything in an experiment that can change. To run a fair test, scientists must identify and control variables carefully. There are three types of variables that every scientist must understand.</a:t>
-            </a:r>
-            <a:endParaRPr lang="en-US" sz="1500" dirty="0"/>
+              <a:t>Anything that can change</a:t>
+            </a:r>
+            <a:endParaRPr lang="en-US" sz="1100" dirty="0"/>
+          </a:p>
+        </p:txBody>
+      </p:sp>
+      <p:sp>
+        <p:nvSpPr>
+          <p:cNvPr id="10" name="Shape 8"/>
+          <p:cNvSpPr/>
+          <p:nvPr/>
+        </p:nvSpPr>
+        <p:spPr>
+          <a:xfrm>
+            <a:off x="4754880" y="1051560"/>
+            <a:ext cx="3657600" cy="658368"/>
+          </a:xfrm>
+          <a:prstGeom prst="rect">
+            <a:avLst/>
+          </a:prstGeom>
+          <a:solidFill>
+            <a:srgbClr val="FFFFFF"/>
+          </a:solidFill>
+          <a:ln/>
+          <a:effectLst>
+            <a:outerShdw sx="100000" sy="100000" kx="0" ky="0" algn="bl" rotWithShape="0" blurRad="50800" dist="25400" dir="8100000">
+              <a:srgbClr val="000000">
+                <a:alpha val="10000"/>
+              </a:srgbClr>
+            </a:outerShdw>
+          </a:effectLst>
+        </p:spPr>
+      </p:sp>
+      <p:sp>
+        <p:nvSpPr>
+          <p:cNvPr id="11" name="Shape 9"/>
+          <p:cNvSpPr/>
+          <p:nvPr/>
+        </p:nvSpPr>
+        <p:spPr>
+          <a:xfrm>
+            <a:off x="4754880" y="1051560"/>
+            <a:ext cx="54864" cy="658368"/>
+          </a:xfrm>
+          <a:prstGeom prst="rect">
+            <a:avLst/>
+          </a:prstGeom>
+          <a:solidFill>
+            <a:srgbClr val="2A9D8F"/>
+          </a:solidFill>
+          <a:ln/>
+        </p:spPr>
+      </p:sp>
+      <p:sp>
+        <p:nvSpPr>
+          <p:cNvPr id="12" name="Text 10"/>
+          <p:cNvSpPr/>
+          <p:nvPr/>
+        </p:nvSpPr>
+        <p:spPr>
+          <a:xfrm>
+            <a:off x="4937760" y="1051560"/>
+            <a:ext cx="1463040" cy="658368"/>
+          </a:xfrm>
+          <a:prstGeom prst="rect">
+            <a:avLst/>
+          </a:prstGeom>
+          <a:noFill/>
+          <a:ln/>
+        </p:spPr>
+        <p:txBody>
+          <a:bodyPr wrap="square" lIns="0" tIns="0" rIns="0" bIns="0" rtlCol="0" anchor="ctr"/>
+          <a:lstStyle/>
+          <a:p>
+            <a:pPr indent="0" marL="0">
+              <a:buNone/>
+            </a:pPr>
+            <a:r>
+              <a:rPr lang="en-US" sz="1300" b="1" dirty="0">
+                <a:solidFill>
+                  <a:srgbClr val="1B2A4A"/>
+                </a:solidFill>
+                <a:latin typeface="Georgia" pitchFamily="34" charset="0"/>
+                <a:ea typeface="Georgia" pitchFamily="34" charset="-122"/>
+                <a:cs typeface="Georgia" pitchFamily="34" charset="-120"/>
+              </a:rPr>
+              <a:t>Independent</a:t>
+            </a:r>
+            <a:endParaRPr lang="en-US" sz="1300" dirty="0"/>
+          </a:p>
+        </p:txBody>
+      </p:sp>
+      <p:sp>
+        <p:nvSpPr>
+          <p:cNvPr id="13" name="Text 11"/>
+          <p:cNvSpPr/>
+          <p:nvPr/>
+        </p:nvSpPr>
+        <p:spPr>
+          <a:xfrm>
+            <a:off x="6400800" y="1051560"/>
+            <a:ext cx="1920240" cy="658368"/>
+          </a:xfrm>
+          <a:prstGeom prst="rect">
+            <a:avLst/>
+          </a:prstGeom>
+          <a:noFill/>
+          <a:ln/>
+        </p:spPr>
+        <p:txBody>
+          <a:bodyPr wrap="square" lIns="0" tIns="0" rIns="0" bIns="0" rtlCol="0" anchor="ctr"/>
+          <a:lstStyle/>
+          <a:p>
+            <a:pPr indent="0" marL="0">
+              <a:buNone/>
+            </a:pPr>
+            <a:r>
+              <a:rPr lang="en-US" sz="1100" dirty="0">
+                <a:solidFill>
+                  <a:srgbClr val="6B6660"/>
+                </a:solidFill>
+                <a:latin typeface="Calibri" pitchFamily="34" charset="0"/>
+                <a:ea typeface="Calibri" pitchFamily="34" charset="-122"/>
+                <a:cs typeface="Calibri" pitchFamily="34" charset="-120"/>
+              </a:rPr>
+              <a:t>The variable YOU change</a:t>
+            </a:r>
+            <a:endParaRPr lang="en-US" sz="1100" dirty="0"/>
+          </a:p>
+        </p:txBody>
+      </p:sp>
+      <p:sp>
+        <p:nvSpPr>
+          <p:cNvPr id="14" name="Shape 12"/>
+          <p:cNvSpPr/>
+          <p:nvPr/>
+        </p:nvSpPr>
+        <p:spPr>
+          <a:xfrm>
+            <a:off x="731520" y="1819656"/>
+            <a:ext cx="3657600" cy="658368"/>
+          </a:xfrm>
+          <a:prstGeom prst="rect">
+            <a:avLst/>
+          </a:prstGeom>
+          <a:solidFill>
+            <a:srgbClr val="FFFFFF"/>
+          </a:solidFill>
+          <a:ln/>
+          <a:effectLst>
+            <a:outerShdw sx="100000" sy="100000" kx="0" ky="0" algn="bl" rotWithShape="0" blurRad="50800" dist="25400" dir="8100000">
+              <a:srgbClr val="000000">
+                <a:alpha val="10000"/>
+              </a:srgbClr>
+            </a:outerShdw>
+          </a:effectLst>
+        </p:spPr>
+      </p:sp>
+      <p:sp>
+        <p:nvSpPr>
+          <p:cNvPr id="15" name="Shape 13"/>
+          <p:cNvSpPr/>
+          <p:nvPr/>
+        </p:nvSpPr>
+        <p:spPr>
+          <a:xfrm>
+            <a:off x="731520" y="1819656"/>
+            <a:ext cx="54864" cy="658368"/>
+          </a:xfrm>
+          <a:prstGeom prst="rect">
+            <a:avLst/>
+          </a:prstGeom>
+          <a:solidFill>
+            <a:srgbClr val="2A9D8F"/>
+          </a:solidFill>
+          <a:ln/>
+        </p:spPr>
+      </p:sp>
+      <p:sp>
+        <p:nvSpPr>
+          <p:cNvPr id="16" name="Text 14"/>
+          <p:cNvSpPr/>
+          <p:nvPr/>
+        </p:nvSpPr>
+        <p:spPr>
+          <a:xfrm>
+            <a:off x="914400" y="1819656"/>
+            <a:ext cx="1463040" cy="658368"/>
+          </a:xfrm>
+          <a:prstGeom prst="rect">
+            <a:avLst/>
+          </a:prstGeom>
+          <a:noFill/>
+          <a:ln/>
+        </p:spPr>
+        <p:txBody>
+          <a:bodyPr wrap="square" lIns="0" tIns="0" rIns="0" bIns="0" rtlCol="0" anchor="ctr"/>
+          <a:lstStyle/>
+          <a:p>
+            <a:pPr indent="0" marL="0">
+              <a:buNone/>
+            </a:pPr>
+            <a:r>
+              <a:rPr lang="en-US" sz="1300" b="1" dirty="0">
+                <a:solidFill>
+                  <a:srgbClr val="1B2A4A"/>
+                </a:solidFill>
+                <a:latin typeface="Georgia" pitchFamily="34" charset="0"/>
+                <a:ea typeface="Georgia" pitchFamily="34" charset="-122"/>
+                <a:cs typeface="Georgia" pitchFamily="34" charset="-120"/>
+              </a:rPr>
+              <a:t>Dependent</a:t>
+            </a:r>
+            <a:endParaRPr lang="en-US" sz="1300" dirty="0"/>
+          </a:p>
+        </p:txBody>
+      </p:sp>
+      <p:sp>
+        <p:nvSpPr>
+          <p:cNvPr id="17" name="Text 15"/>
+          <p:cNvSpPr/>
+          <p:nvPr/>
+        </p:nvSpPr>
+        <p:spPr>
+          <a:xfrm>
+            <a:off x="2377440" y="1819656"/>
+            <a:ext cx="1920240" cy="658368"/>
+          </a:xfrm>
+          <a:prstGeom prst="rect">
+            <a:avLst/>
+          </a:prstGeom>
+          <a:noFill/>
+          <a:ln/>
+        </p:spPr>
+        <p:txBody>
+          <a:bodyPr wrap="square" lIns="0" tIns="0" rIns="0" bIns="0" rtlCol="0" anchor="ctr"/>
+          <a:lstStyle/>
+          <a:p>
+            <a:pPr indent="0" marL="0">
+              <a:buNone/>
+            </a:pPr>
+            <a:r>
+              <a:rPr lang="en-US" sz="1100" dirty="0">
+                <a:solidFill>
+                  <a:srgbClr val="6B6660"/>
+                </a:solidFill>
+                <a:latin typeface="Calibri" pitchFamily="34" charset="0"/>
+                <a:ea typeface="Calibri" pitchFamily="34" charset="-122"/>
+                <a:cs typeface="Calibri" pitchFamily="34" charset="-120"/>
+              </a:rPr>
+              <a:t>The variable you MEASURE</a:t>
+            </a:r>
+            <a:endParaRPr lang="en-US" sz="1100" dirty="0"/>
+          </a:p>
+        </p:txBody>
+      </p:sp>
+      <p:sp>
+        <p:nvSpPr>
+          <p:cNvPr id="18" name="Shape 16"/>
+          <p:cNvSpPr/>
+          <p:nvPr/>
+        </p:nvSpPr>
+        <p:spPr>
+          <a:xfrm>
+            <a:off x="4754880" y="1819656"/>
+            <a:ext cx="3657600" cy="658368"/>
+          </a:xfrm>
+          <a:prstGeom prst="rect">
+            <a:avLst/>
+          </a:prstGeom>
+          <a:solidFill>
+            <a:srgbClr val="FFFFFF"/>
+          </a:solidFill>
+          <a:ln/>
+          <a:effectLst>
+            <a:outerShdw sx="100000" sy="100000" kx="0" ky="0" algn="bl" rotWithShape="0" blurRad="50800" dist="25400" dir="8100000">
+              <a:srgbClr val="000000">
+                <a:alpha val="10000"/>
+              </a:srgbClr>
+            </a:outerShdw>
+          </a:effectLst>
+        </p:spPr>
+      </p:sp>
+      <p:sp>
+        <p:nvSpPr>
+          <p:cNvPr id="19" name="Shape 17"/>
+          <p:cNvSpPr/>
+          <p:nvPr/>
+        </p:nvSpPr>
+        <p:spPr>
+          <a:xfrm>
+            <a:off x="4754880" y="1819656"/>
+            <a:ext cx="54864" cy="658368"/>
+          </a:xfrm>
+          <a:prstGeom prst="rect">
+            <a:avLst/>
+          </a:prstGeom>
+          <a:solidFill>
+            <a:srgbClr val="2A9D8F"/>
+          </a:solidFill>
+          <a:ln/>
+        </p:spPr>
+      </p:sp>
+      <p:sp>
+        <p:nvSpPr>
+          <p:cNvPr id="20" name="Text 18"/>
+          <p:cNvSpPr/>
+          <p:nvPr/>
+        </p:nvSpPr>
+        <p:spPr>
+          <a:xfrm>
+            <a:off x="4937760" y="1819656"/>
+            <a:ext cx="1463040" cy="658368"/>
+          </a:xfrm>
+          <a:prstGeom prst="rect">
+            <a:avLst/>
+          </a:prstGeom>
+          <a:noFill/>
+          <a:ln/>
+        </p:spPr>
+        <p:txBody>
+          <a:bodyPr wrap="square" lIns="0" tIns="0" rIns="0" bIns="0" rtlCol="0" anchor="ctr"/>
+          <a:lstStyle/>
+          <a:p>
+            <a:pPr indent="0" marL="0">
+              <a:buNone/>
+            </a:pPr>
+            <a:r>
+              <a:rPr lang="en-US" sz="1300" b="1" dirty="0">
+                <a:solidFill>
+                  <a:srgbClr val="1B2A4A"/>
+                </a:solidFill>
+                <a:latin typeface="Georgia" pitchFamily="34" charset="0"/>
+                <a:ea typeface="Georgia" pitchFamily="34" charset="-122"/>
+                <a:cs typeface="Georgia" pitchFamily="34" charset="-120"/>
+              </a:rPr>
+              <a:t>Controlled</a:t>
+            </a:r>
+            <a:endParaRPr lang="en-US" sz="1300" dirty="0"/>
+          </a:p>
+        </p:txBody>
+      </p:sp>
+      <p:sp>
+        <p:nvSpPr>
+          <p:cNvPr id="21" name="Text 19"/>
+          <p:cNvSpPr/>
+          <p:nvPr/>
+        </p:nvSpPr>
+        <p:spPr>
+          <a:xfrm>
+            <a:off x="6400800" y="1819656"/>
+            <a:ext cx="1920240" cy="658368"/>
+          </a:xfrm>
+          <a:prstGeom prst="rect">
+            <a:avLst/>
+          </a:prstGeom>
+          <a:noFill/>
+          <a:ln/>
+        </p:spPr>
+        <p:txBody>
+          <a:bodyPr wrap="square" lIns="0" tIns="0" rIns="0" bIns="0" rtlCol="0" anchor="ctr"/>
+          <a:lstStyle/>
+          <a:p>
+            <a:pPr indent="0" marL="0">
+              <a:buNone/>
+            </a:pPr>
+            <a:r>
+              <a:rPr lang="en-US" sz="1100" dirty="0">
+                <a:solidFill>
+                  <a:srgbClr val="6B6660"/>
+                </a:solidFill>
+                <a:latin typeface="Calibri" pitchFamily="34" charset="0"/>
+                <a:ea typeface="Calibri" pitchFamily="34" charset="-122"/>
+                <a:cs typeface="Calibri" pitchFamily="34" charset="-120"/>
+              </a:rPr>
+              <a:t>Variables you keep the SAME</a:t>
+            </a:r>
+            <a:endParaRPr lang="en-US" sz="1100" dirty="0"/>
+          </a:p>
+        </p:txBody>
+      </p:sp>
+      <p:sp>
+        <p:nvSpPr>
+          <p:cNvPr id="22" name="Shape 20"/>
+          <p:cNvSpPr/>
+          <p:nvPr/>
+        </p:nvSpPr>
+        <p:spPr>
+          <a:xfrm>
+            <a:off x="731520" y="2587752"/>
+            <a:ext cx="3657600" cy="658368"/>
+          </a:xfrm>
+          <a:prstGeom prst="rect">
+            <a:avLst/>
+          </a:prstGeom>
+          <a:solidFill>
+            <a:srgbClr val="FFFFFF"/>
+          </a:solidFill>
+          <a:ln/>
+          <a:effectLst>
+            <a:outerShdw sx="100000" sy="100000" kx="0" ky="0" algn="bl" rotWithShape="0" blurRad="50800" dist="25400" dir="8100000">
+              <a:srgbClr val="000000">
+                <a:alpha val="10000"/>
+              </a:srgbClr>
+            </a:outerShdw>
+          </a:effectLst>
+        </p:spPr>
+      </p:sp>
+      <p:sp>
+        <p:nvSpPr>
+          <p:cNvPr id="23" name="Shape 21"/>
+          <p:cNvSpPr/>
+          <p:nvPr/>
+        </p:nvSpPr>
+        <p:spPr>
+          <a:xfrm>
+            <a:off x="731520" y="2587752"/>
+            <a:ext cx="54864" cy="658368"/>
+          </a:xfrm>
+          <a:prstGeom prst="rect">
+            <a:avLst/>
+          </a:prstGeom>
+          <a:solidFill>
+            <a:srgbClr val="2A9D8F"/>
+          </a:solidFill>
+          <a:ln/>
+        </p:spPr>
+      </p:sp>
+      <p:sp>
+        <p:nvSpPr>
+          <p:cNvPr id="24" name="Text 22"/>
+          <p:cNvSpPr/>
+          <p:nvPr/>
+        </p:nvSpPr>
+        <p:spPr>
+          <a:xfrm>
+            <a:off x="914400" y="2587752"/>
+            <a:ext cx="1463040" cy="658368"/>
+          </a:xfrm>
+          <a:prstGeom prst="rect">
+            <a:avLst/>
+          </a:prstGeom>
+          <a:noFill/>
+          <a:ln/>
+        </p:spPr>
+        <p:txBody>
+          <a:bodyPr wrap="square" lIns="0" tIns="0" rIns="0" bIns="0" rtlCol="0" anchor="ctr"/>
+          <a:lstStyle/>
+          <a:p>
+            <a:pPr indent="0" marL="0">
+              <a:buNone/>
+            </a:pPr>
+            <a:r>
+              <a:rPr lang="en-US" sz="1300" b="1" dirty="0">
+                <a:solidFill>
+                  <a:srgbClr val="1B2A4A"/>
+                </a:solidFill>
+                <a:latin typeface="Georgia" pitchFamily="34" charset="0"/>
+                <a:ea typeface="Georgia" pitchFamily="34" charset="-122"/>
+                <a:cs typeface="Georgia" pitchFamily="34" charset="-120"/>
+              </a:rPr>
+              <a:t>Fair test</a:t>
+            </a:r>
+            <a:endParaRPr lang="en-US" sz="1300" dirty="0"/>
+          </a:p>
+        </p:txBody>
+      </p:sp>
+      <p:sp>
+        <p:nvSpPr>
+          <p:cNvPr id="25" name="Text 23"/>
+          <p:cNvSpPr/>
+          <p:nvPr/>
+        </p:nvSpPr>
+        <p:spPr>
+          <a:xfrm>
+            <a:off x="2377440" y="2587752"/>
+            <a:ext cx="1920240" cy="658368"/>
+          </a:xfrm>
+          <a:prstGeom prst="rect">
+            <a:avLst/>
+          </a:prstGeom>
+          <a:noFill/>
+          <a:ln/>
+        </p:spPr>
+        <p:txBody>
+          <a:bodyPr wrap="square" lIns="0" tIns="0" rIns="0" bIns="0" rtlCol="0" anchor="ctr"/>
+          <a:lstStyle/>
+          <a:p>
+            <a:pPr indent="0" marL="0">
+              <a:buNone/>
+            </a:pPr>
+            <a:r>
+              <a:rPr lang="en-US" sz="1100" dirty="0">
+                <a:solidFill>
+                  <a:srgbClr val="6B6660"/>
+                </a:solidFill>
+                <a:latin typeface="Calibri" pitchFamily="34" charset="0"/>
+                <a:ea typeface="Calibri" pitchFamily="34" charset="-122"/>
+                <a:cs typeface="Calibri" pitchFamily="34" charset="-120"/>
+              </a:rPr>
+              <a:t>Only one variable changes at a time</a:t>
+            </a:r>
+            <a:endParaRPr lang="en-US" sz="1100" dirty="0"/>
+          </a:p>
+        </p:txBody>
+      </p:sp>
+      <p:sp>
+        <p:nvSpPr>
+          <p:cNvPr id="26" name="Shape 24"/>
+          <p:cNvSpPr/>
+          <p:nvPr/>
+        </p:nvSpPr>
+        <p:spPr>
+          <a:xfrm>
+            <a:off x="4754880" y="2587752"/>
+            <a:ext cx="3657600" cy="658368"/>
+          </a:xfrm>
+          <a:prstGeom prst="rect">
+            <a:avLst/>
+          </a:prstGeom>
+          <a:solidFill>
+            <a:srgbClr val="FFFFFF"/>
+          </a:solidFill>
+          <a:ln/>
+          <a:effectLst>
+            <a:outerShdw sx="100000" sy="100000" kx="0" ky="0" algn="bl" rotWithShape="0" blurRad="50800" dist="25400" dir="8100000">
+              <a:srgbClr val="000000">
+                <a:alpha val="10000"/>
+              </a:srgbClr>
+            </a:outerShdw>
+          </a:effectLst>
+        </p:spPr>
+      </p:sp>
+      <p:sp>
+        <p:nvSpPr>
+          <p:cNvPr id="27" name="Shape 25"/>
+          <p:cNvSpPr/>
+          <p:nvPr/>
+        </p:nvSpPr>
+        <p:spPr>
+          <a:xfrm>
+            <a:off x="4754880" y="2587752"/>
+            <a:ext cx="54864" cy="658368"/>
+          </a:xfrm>
+          <a:prstGeom prst="rect">
+            <a:avLst/>
+          </a:prstGeom>
+          <a:solidFill>
+            <a:srgbClr val="2A9D8F"/>
+          </a:solidFill>
+          <a:ln/>
+        </p:spPr>
+      </p:sp>
+      <p:sp>
+        <p:nvSpPr>
+          <p:cNvPr id="28" name="Text 26"/>
+          <p:cNvSpPr/>
+          <p:nvPr/>
+        </p:nvSpPr>
+        <p:spPr>
+          <a:xfrm>
+            <a:off x="4937760" y="2587752"/>
+            <a:ext cx="1463040" cy="658368"/>
+          </a:xfrm>
+          <a:prstGeom prst="rect">
+            <a:avLst/>
+          </a:prstGeom>
+          <a:noFill/>
+          <a:ln/>
+        </p:spPr>
+        <p:txBody>
+          <a:bodyPr wrap="square" lIns="0" tIns="0" rIns="0" bIns="0" rtlCol="0" anchor="ctr"/>
+          <a:lstStyle/>
+          <a:p>
+            <a:pPr indent="0" marL="0">
+              <a:buNone/>
+            </a:pPr>
+            <a:r>
+              <a:rPr lang="en-US" sz="1300" b="1" dirty="0">
+                <a:solidFill>
+                  <a:srgbClr val="1B2A4A"/>
+                </a:solidFill>
+                <a:latin typeface="Georgia" pitchFamily="34" charset="0"/>
+                <a:ea typeface="Georgia" pitchFamily="34" charset="-122"/>
+                <a:cs typeface="Georgia" pitchFamily="34" charset="-120"/>
+              </a:rPr>
+              <a:t>Reliable</a:t>
+            </a:r>
+            <a:endParaRPr lang="en-US" sz="1300" dirty="0"/>
+          </a:p>
+        </p:txBody>
+      </p:sp>
+      <p:sp>
+        <p:nvSpPr>
+          <p:cNvPr id="29" name="Text 27"/>
+          <p:cNvSpPr/>
+          <p:nvPr/>
+        </p:nvSpPr>
+        <p:spPr>
+          <a:xfrm>
+            <a:off x="6400800" y="2587752"/>
+            <a:ext cx="1920240" cy="658368"/>
+          </a:xfrm>
+          <a:prstGeom prst="rect">
+            <a:avLst/>
+          </a:prstGeom>
+          <a:noFill/>
+          <a:ln/>
+        </p:spPr>
+        <p:txBody>
+          <a:bodyPr wrap="square" lIns="0" tIns="0" rIns="0" bIns="0" rtlCol="0" anchor="ctr"/>
+          <a:lstStyle/>
+          <a:p>
+            <a:pPr indent="0" marL="0">
+              <a:buNone/>
+            </a:pPr>
+            <a:r>
+              <a:rPr lang="en-US" sz="1100" dirty="0">
+                <a:solidFill>
+                  <a:srgbClr val="6B6660"/>
+                </a:solidFill>
+                <a:latin typeface="Calibri" pitchFamily="34" charset="0"/>
+                <a:ea typeface="Calibri" pitchFamily="34" charset="-122"/>
+                <a:cs typeface="Calibri" pitchFamily="34" charset="-120"/>
+              </a:rPr>
+              <a:t>Results you can trust (repeatable)</a:t>
+            </a:r>
+            <a:endParaRPr lang="en-US" sz="1100" dirty="0"/>
           </a:p>
         </p:txBody>
       </p:sp>
@@ -1744,7 +2720,47 @@
         <p:spPr>
           <a:xfrm>
             <a:off x="0" y="0"/>
-            <a:ext cx="9144000" cy="54864"/>
+            <a:ext cx="9144000" cy="822960"/>
+          </a:xfrm>
+          <a:prstGeom prst="rect">
+            <a:avLst/>
+          </a:prstGeom>
+          <a:solidFill>
+            <a:srgbClr val="FFFFFF"/>
+          </a:solidFill>
+          <a:ln/>
+        </p:spPr>
+      </p:sp>
+      <p:sp>
+        <p:nvSpPr>
+          <p:cNvPr id="3" name="Shape 1"/>
+          <p:cNvSpPr/>
+          <p:nvPr/>
+        </p:nvSpPr>
+        <p:spPr>
+          <a:xfrm>
+            <a:off x="0" y="804672"/>
+            <a:ext cx="9144000" cy="27432"/>
+          </a:xfrm>
+          <a:prstGeom prst="rect">
+            <a:avLst/>
+          </a:prstGeom>
+          <a:solidFill>
+            <a:srgbClr val="E5E2DC"/>
+          </a:solidFill>
+          <a:ln/>
+        </p:spPr>
+      </p:sp>
+      <p:sp>
+        <p:nvSpPr>
+          <p:cNvPr id="4" name="Shape 2"/>
+          <p:cNvSpPr/>
+          <p:nvPr/>
+        </p:nvSpPr>
+        <p:spPr>
+          <a:xfrm>
+            <a:off x="548640" y="201168"/>
+            <a:ext cx="54864" cy="420624"/>
           </a:xfrm>
           <a:prstGeom prst="rect">
             <a:avLst/>
@@ -1757,14 +2773,14 @@
       </p:sp>
       <p:sp>
         <p:nvSpPr>
-          <p:cNvPr id="3" name="Text 1"/>
-          <p:cNvSpPr/>
-          <p:nvPr/>
-        </p:nvSpPr>
-        <p:spPr>
-          <a:xfrm>
-            <a:off x="7772400" y="4709160"/>
-            <a:ext cx="1097280" cy="320040"/>
+          <p:cNvPr id="5" name="Text 3"/>
+          <p:cNvSpPr/>
+          <p:nvPr/>
+        </p:nvSpPr>
+        <p:spPr>
+          <a:xfrm>
+            <a:off x="777240" y="137160"/>
+            <a:ext cx="7772400" cy="548640"/>
           </a:xfrm>
           <a:prstGeom prst="rect">
             <a:avLst/>
@@ -1773,53 +2789,14 @@
           <a:ln/>
         </p:spPr>
         <p:txBody>
-          <a:bodyPr wrap="square" rtlCol="0" anchor="ctr"/>
-          <a:lstStyle/>
-          <a:p>
-            <a:pPr algn="r" indent="0" marL="0">
-              <a:buNone/>
-            </a:pPr>
-            <a:r>
-              <a:rPr lang="en-US" sz="900" dirty="0">
-                <a:solidFill>
-                  <a:srgbClr val="6B6660"/>
-                </a:solidFill>
-                <a:latin typeface="Calibri" pitchFamily="34" charset="0"/>
-                <a:ea typeface="Calibri" pitchFamily="34" charset="-122"/>
-                <a:cs typeface="Calibri" pitchFamily="34" charset="-120"/>
-              </a:rPr>
-              <a:t>3 / 6</a:t>
-            </a:r>
-            <a:endParaRPr lang="en-US" sz="900" dirty="0"/>
-          </a:p>
-        </p:txBody>
-      </p:sp>
-      <p:sp>
-        <p:nvSpPr>
-          <p:cNvPr id="4" name="Text 2"/>
-          <p:cNvSpPr/>
-          <p:nvPr/>
-        </p:nvSpPr>
-        <p:spPr>
-          <a:xfrm>
-            <a:off x="457200" y="274320"/>
-            <a:ext cx="8229600" cy="640080"/>
-          </a:xfrm>
-          <a:prstGeom prst="rect">
-            <a:avLst/>
-          </a:prstGeom>
-          <a:noFill/>
-          <a:ln/>
-        </p:spPr>
-        <p:txBody>
-          <a:bodyPr wrap="square" rtlCol="0" anchor="ctr"/>
+          <a:bodyPr wrap="square" lIns="0" tIns="0" rIns="0" bIns="0" rtlCol="0" anchor="ctr"/>
           <a:lstStyle/>
           <a:p>
             <a:pPr indent="0" marL="0">
               <a:buNone/>
             </a:pPr>
             <a:r>
-              <a:rPr lang="en-US" sz="2600" b="1" dirty="0">
+              <a:rPr lang="en-US" sz="2000" b="1" dirty="0">
                 <a:solidFill>
                   <a:srgbClr val="1B2A4A"/>
                 </a:solidFill>
@@ -1829,20 +2806,20 @@
               </a:rPr>
               <a:t>Three Types of Variables</a:t>
             </a:r>
-            <a:endParaRPr lang="en-US" sz="2600" dirty="0"/>
-          </a:p>
-        </p:txBody>
-      </p:sp>
-      <p:sp>
-        <p:nvSpPr>
-          <p:cNvPr id="5" name="Shape 3"/>
-          <p:cNvSpPr/>
-          <p:nvPr/>
-        </p:nvSpPr>
-        <p:spPr>
-          <a:xfrm>
-            <a:off x="457200" y="1188720"/>
-            <a:ext cx="2560320" cy="1828800"/>
+            <a:endParaRPr lang="en-US" sz="2000" dirty="0"/>
+          </a:p>
+        </p:txBody>
+      </p:sp>
+      <p:sp>
+        <p:nvSpPr>
+          <p:cNvPr id="6" name="Shape 4"/>
+          <p:cNvSpPr/>
+          <p:nvPr/>
+        </p:nvSpPr>
+        <p:spPr>
+          <a:xfrm>
+            <a:off x="640080" y="1051560"/>
+            <a:ext cx="2468880" cy="3657600"/>
           </a:xfrm>
           <a:prstGeom prst="rect">
             <a:avLst/>
@@ -1850,12 +2827,7 @@
           <a:solidFill>
             <a:srgbClr val="FFFFFF"/>
           </a:solidFill>
-          <a:ln w="12700">
-            <a:solidFill>
-              <a:srgbClr val="E5E2DC"/>
-            </a:solidFill>
-            <a:prstDash val="solid"/>
-          </a:ln>
+          <a:ln/>
           <a:effectLst>
             <a:outerShdw sx="100000" sy="100000" kx="0" ky="0" algn="bl" rotWithShape="0" blurRad="50800" dist="25400" dir="8100000">
               <a:srgbClr val="000000">
@@ -1867,14 +2839,14 @@
       </p:sp>
       <p:sp>
         <p:nvSpPr>
-          <p:cNvPr id="6" name="Shape 4"/>
-          <p:cNvSpPr/>
-          <p:nvPr/>
-        </p:nvSpPr>
-        <p:spPr>
-          <a:xfrm>
-            <a:off x="457200" y="1188720"/>
-            <a:ext cx="2560320" cy="54864"/>
+          <p:cNvPr id="7" name="Shape 5"/>
+          <p:cNvSpPr/>
+          <p:nvPr/>
+        </p:nvSpPr>
+        <p:spPr>
+          <a:xfrm>
+            <a:off x="640080" y="1051560"/>
+            <a:ext cx="2468880" cy="54864"/>
           </a:xfrm>
           <a:prstGeom prst="rect">
             <a:avLst/>
@@ -1887,14 +2859,14 @@
       </p:sp>
       <p:sp>
         <p:nvSpPr>
-          <p:cNvPr id="7" name="Text 5"/>
-          <p:cNvSpPr/>
-          <p:nvPr/>
-        </p:nvSpPr>
-        <p:spPr>
-          <a:xfrm>
-            <a:off x="594360" y="1325880"/>
-            <a:ext cx="2286000" cy="365760"/>
+          <p:cNvPr id="8" name="Text 6"/>
+          <p:cNvSpPr/>
+          <p:nvPr/>
+        </p:nvSpPr>
+        <p:spPr>
+          <a:xfrm>
+            <a:off x="777240" y="1234440"/>
+            <a:ext cx="2194560" cy="457200"/>
           </a:xfrm>
           <a:prstGeom prst="rect">
             <a:avLst/>
@@ -1906,73 +2878,140 @@
           <a:bodyPr wrap="square" rtlCol="0" anchor="ctr"/>
           <a:lstStyle/>
           <a:p>
-            <a:pPr indent="0" marL="0">
+            <a:pPr algn="ctr" indent="0" marL="0">
               <a:buNone/>
             </a:pPr>
             <a:r>
               <a:rPr lang="en-US" sz="1400" b="1" dirty="0">
                 <a:solidFill>
                   <a:srgbClr val="1B2A4A"/>
+                </a:solidFill>
+                <a:latin typeface="Georgia" pitchFamily="34" charset="0"/>
+                <a:ea typeface="Georgia" pitchFamily="34" charset="-122"/>
+                <a:cs typeface="Georgia" pitchFamily="34" charset="-120"/>
+              </a:rPr>
+              <a:t>Independent</a:t>
+            </a:r>
+            <a:endParaRPr lang="en-US" sz="1400" dirty="0"/>
+          </a:p>
+        </p:txBody>
+      </p:sp>
+      <p:sp>
+        <p:nvSpPr>
+          <p:cNvPr id="9" name="Text 7"/>
+          <p:cNvSpPr/>
+          <p:nvPr/>
+        </p:nvSpPr>
+        <p:spPr>
+          <a:xfrm>
+            <a:off x="777240" y="1737360"/>
+            <a:ext cx="2194560" cy="2834640"/>
+          </a:xfrm>
+          <a:prstGeom prst="rect">
+            <a:avLst/>
+          </a:prstGeom>
+          <a:noFill/>
+          <a:ln/>
+        </p:spPr>
+        <p:txBody>
+          <a:bodyPr wrap="square" rtlCol="0" anchor="t"/>
+          <a:lstStyle/>
+          <a:p>
+            <a:pPr marL="342900" indent="-342900">
+              <a:spcAft>
+                <a:spcPts val="400"/>
+              </a:spcAft>
+              <a:buSzPct val="100000"/>
+              <a:buChar char="•"/>
+            </a:pPr>
+            <a:r>
+              <a:rPr lang="en-US" sz="1100" dirty="0">
+                <a:solidFill>
+                  <a:srgbClr val="6B6660"/>
                 </a:solidFill>
                 <a:latin typeface="Calibri" pitchFamily="34" charset="0"/>
                 <a:ea typeface="Calibri" pitchFamily="34" charset="-122"/>
                 <a:cs typeface="Calibri" pitchFamily="34" charset="-120"/>
               </a:rPr>
-              <a:t>Independent Variable</a:t>
-            </a:r>
-            <a:endParaRPr lang="en-US" sz="1400" dirty="0"/>
-          </a:p>
-        </p:txBody>
-      </p:sp>
-      <p:sp>
-        <p:nvSpPr>
-          <p:cNvPr id="8" name="Text 6"/>
-          <p:cNvSpPr/>
-          <p:nvPr/>
-        </p:nvSpPr>
-        <p:spPr>
-          <a:xfrm>
-            <a:off x="594360" y="1737360"/>
-            <a:ext cx="2286000" cy="1097280"/>
-          </a:xfrm>
-          <a:prstGeom prst="rect">
-            <a:avLst/>
-          </a:prstGeom>
-          <a:noFill/>
-          <a:ln/>
-        </p:spPr>
-        <p:txBody>
-          <a:bodyPr wrap="square" rtlCol="0" anchor="t"/>
-          <a:lstStyle/>
-          <a:p>
-            <a:pPr indent="0" marL="0">
-              <a:buNone/>
+              <a:t>The variable YOU choose to change</a:t>
+            </a:r>
+            <a:endParaRPr lang="en-US" sz="1100" dirty="0"/>
+          </a:p>
+          <a:p>
+            <a:pPr marL="342900" indent="-342900">
+              <a:spcAft>
+                <a:spcPts val="400"/>
+              </a:spcAft>
+              <a:buSzPct val="100000"/>
+              <a:buChar char="•"/>
             </a:pPr>
             <a:r>
               <a:rPr lang="en-US" sz="1100" dirty="0">
                 <a:solidFill>
-                  <a:srgbClr val="3D3A36"/>
+                  <a:srgbClr val="6B6660"/>
                 </a:solidFill>
                 <a:latin typeface="Calibri" pitchFamily="34" charset="0"/>
                 <a:ea typeface="Calibri" pitchFamily="34" charset="-122"/>
                 <a:cs typeface="Calibri" pitchFamily="34" charset="-120"/>
               </a:rPr>
-              <a:t>The ONE thing you deliberately change in the experiment. Example: the amount of water given to a plant each day.</a:t>
+              <a:t>There is only ONE in a fair test</a:t>
             </a:r>
             <a:endParaRPr lang="en-US" sz="1100" dirty="0"/>
           </a:p>
-        </p:txBody>
-      </p:sp>
-      <p:sp>
-        <p:nvSpPr>
-          <p:cNvPr id="9" name="Shape 7"/>
-          <p:cNvSpPr/>
-          <p:nvPr/>
-        </p:nvSpPr>
-        <p:spPr>
-          <a:xfrm>
-            <a:off x="3291840" y="1188720"/>
-            <a:ext cx="2560320" cy="1828800"/>
+          <a:p>
+            <a:pPr marL="342900" indent="-342900">
+              <a:spcAft>
+                <a:spcPts val="400"/>
+              </a:spcAft>
+              <a:buSzPct val="100000"/>
+              <a:buChar char="•"/>
+            </a:pPr>
+            <a:r>
+              <a:rPr lang="en-US" sz="1100" dirty="0">
+                <a:solidFill>
+                  <a:srgbClr val="6B6660"/>
+                </a:solidFill>
+                <a:latin typeface="Calibri" pitchFamily="34" charset="0"/>
+                <a:ea typeface="Calibri" pitchFamily="34" charset="-122"/>
+                <a:cs typeface="Calibri" pitchFamily="34" charset="-120"/>
+              </a:rPr>
+              <a:t>Goes on the x-axis of a graph</a:t>
+            </a:r>
+            <a:endParaRPr lang="en-US" sz="1100" dirty="0"/>
+          </a:p>
+          <a:p>
+            <a:pPr marL="342900" indent="-342900">
+              <a:spcAft>
+                <a:spcPts val="400"/>
+              </a:spcAft>
+              <a:buSzPct val="100000"/>
+              <a:buChar char="•"/>
+            </a:pPr>
+            <a:r>
+              <a:rPr lang="en-US" sz="1100" dirty="0">
+                <a:solidFill>
+                  <a:srgbClr val="6B6660"/>
+                </a:solidFill>
+                <a:latin typeface="Calibri" pitchFamily="34" charset="0"/>
+                <a:ea typeface="Calibri" pitchFamily="34" charset="-122"/>
+                <a:cs typeface="Calibri" pitchFamily="34" charset="-120"/>
+              </a:rPr>
+              <a:t>Example: amount of water given to a plant</a:t>
+            </a:r>
+            <a:endParaRPr lang="en-US" sz="1100" dirty="0"/>
+          </a:p>
+        </p:txBody>
+      </p:sp>
+      <p:sp>
+        <p:nvSpPr>
+          <p:cNvPr id="10" name="Shape 8"/>
+          <p:cNvSpPr/>
+          <p:nvPr/>
+        </p:nvSpPr>
+        <p:spPr>
+          <a:xfrm>
+            <a:off x="3246120" y="1051560"/>
+            <a:ext cx="2468880" cy="3657600"/>
           </a:xfrm>
           <a:prstGeom prst="rect">
             <a:avLst/>
@@ -1980,12 +3019,7 @@
           <a:solidFill>
             <a:srgbClr val="FFFFFF"/>
           </a:solidFill>
-          <a:ln w="12700">
-            <a:solidFill>
-              <a:srgbClr val="E5E2DC"/>
-            </a:solidFill>
-            <a:prstDash val="solid"/>
-          </a:ln>
+          <a:ln/>
           <a:effectLst>
             <a:outerShdw sx="100000" sy="100000" kx="0" ky="0" algn="bl" rotWithShape="0" blurRad="50800" dist="25400" dir="8100000">
               <a:srgbClr val="000000">
@@ -1997,34 +3031,34 @@
       </p:sp>
       <p:sp>
         <p:nvSpPr>
-          <p:cNvPr id="10" name="Shape 8"/>
-          <p:cNvSpPr/>
-          <p:nvPr/>
-        </p:nvSpPr>
-        <p:spPr>
-          <a:xfrm>
-            <a:off x="3291840" y="1188720"/>
-            <a:ext cx="2560320" cy="54864"/>
-          </a:xfrm>
-          <a:prstGeom prst="rect">
-            <a:avLst/>
-          </a:prstGeom>
-          <a:solidFill>
-            <a:srgbClr val="2A9D8F"/>
-          </a:solidFill>
-          <a:ln/>
-        </p:spPr>
-      </p:sp>
-      <p:sp>
-        <p:nvSpPr>
-          <p:cNvPr id="11" name="Text 9"/>
-          <p:cNvSpPr/>
-          <p:nvPr/>
-        </p:nvSpPr>
-        <p:spPr>
-          <a:xfrm>
-            <a:off x="3429000" y="1325880"/>
-            <a:ext cx="2286000" cy="365760"/>
+          <p:cNvPr id="11" name="Shape 9"/>
+          <p:cNvSpPr/>
+          <p:nvPr/>
+        </p:nvSpPr>
+        <p:spPr>
+          <a:xfrm>
+            <a:off x="3246120" y="1051560"/>
+            <a:ext cx="2468880" cy="54864"/>
+          </a:xfrm>
+          <a:prstGeom prst="rect">
+            <a:avLst/>
+          </a:prstGeom>
+          <a:solidFill>
+            <a:srgbClr val="E9C46A"/>
+          </a:solidFill>
+          <a:ln/>
+        </p:spPr>
+      </p:sp>
+      <p:sp>
+        <p:nvSpPr>
+          <p:cNvPr id="12" name="Text 10"/>
+          <p:cNvSpPr/>
+          <p:nvPr/>
+        </p:nvSpPr>
+        <p:spPr>
+          <a:xfrm>
+            <a:off x="3383280" y="1234440"/>
+            <a:ext cx="2194560" cy="457200"/>
           </a:xfrm>
           <a:prstGeom prst="rect">
             <a:avLst/>
@@ -2036,73 +3070,140 @@
           <a:bodyPr wrap="square" rtlCol="0" anchor="ctr"/>
           <a:lstStyle/>
           <a:p>
-            <a:pPr indent="0" marL="0">
+            <a:pPr algn="ctr" indent="0" marL="0">
               <a:buNone/>
             </a:pPr>
             <a:r>
               <a:rPr lang="en-US" sz="1400" b="1" dirty="0">
                 <a:solidFill>
                   <a:srgbClr val="1B2A4A"/>
+                </a:solidFill>
+                <a:latin typeface="Georgia" pitchFamily="34" charset="0"/>
+                <a:ea typeface="Georgia" pitchFamily="34" charset="-122"/>
+                <a:cs typeface="Georgia" pitchFamily="34" charset="-120"/>
+              </a:rPr>
+              <a:t>Dependent</a:t>
+            </a:r>
+            <a:endParaRPr lang="en-US" sz="1400" dirty="0"/>
+          </a:p>
+        </p:txBody>
+      </p:sp>
+      <p:sp>
+        <p:nvSpPr>
+          <p:cNvPr id="13" name="Text 11"/>
+          <p:cNvSpPr/>
+          <p:nvPr/>
+        </p:nvSpPr>
+        <p:spPr>
+          <a:xfrm>
+            <a:off x="3383280" y="1737360"/>
+            <a:ext cx="2194560" cy="2834640"/>
+          </a:xfrm>
+          <a:prstGeom prst="rect">
+            <a:avLst/>
+          </a:prstGeom>
+          <a:noFill/>
+          <a:ln/>
+        </p:spPr>
+        <p:txBody>
+          <a:bodyPr wrap="square" rtlCol="0" anchor="t"/>
+          <a:lstStyle/>
+          <a:p>
+            <a:pPr marL="342900" indent="-342900">
+              <a:spcAft>
+                <a:spcPts val="400"/>
+              </a:spcAft>
+              <a:buSzPct val="100000"/>
+              <a:buChar char="•"/>
+            </a:pPr>
+            <a:r>
+              <a:rPr lang="en-US" sz="1100" dirty="0">
+                <a:solidFill>
+                  <a:srgbClr val="6B6660"/>
                 </a:solidFill>
                 <a:latin typeface="Calibri" pitchFamily="34" charset="0"/>
                 <a:ea typeface="Calibri" pitchFamily="34" charset="-122"/>
                 <a:cs typeface="Calibri" pitchFamily="34" charset="-120"/>
               </a:rPr>
-              <a:t>Dependent Variable</a:t>
-            </a:r>
-            <a:endParaRPr lang="en-US" sz="1400" dirty="0"/>
-          </a:p>
-        </p:txBody>
-      </p:sp>
-      <p:sp>
-        <p:nvSpPr>
-          <p:cNvPr id="12" name="Text 10"/>
-          <p:cNvSpPr/>
-          <p:nvPr/>
-        </p:nvSpPr>
-        <p:spPr>
-          <a:xfrm>
-            <a:off x="3429000" y="1737360"/>
-            <a:ext cx="2286000" cy="1097280"/>
-          </a:xfrm>
-          <a:prstGeom prst="rect">
-            <a:avLst/>
-          </a:prstGeom>
-          <a:noFill/>
-          <a:ln/>
-        </p:spPr>
-        <p:txBody>
-          <a:bodyPr wrap="square" rtlCol="0" anchor="t"/>
-          <a:lstStyle/>
-          <a:p>
-            <a:pPr indent="0" marL="0">
-              <a:buNone/>
+              <a:t>The variable you MEASURE</a:t>
+            </a:r>
+            <a:endParaRPr lang="en-US" sz="1100" dirty="0"/>
+          </a:p>
+          <a:p>
+            <a:pPr marL="342900" indent="-342900">
+              <a:spcAft>
+                <a:spcPts val="400"/>
+              </a:spcAft>
+              <a:buSzPct val="100000"/>
+              <a:buChar char="•"/>
             </a:pPr>
             <a:r>
               <a:rPr lang="en-US" sz="1100" dirty="0">
                 <a:solidFill>
-                  <a:srgbClr val="3D3A36"/>
+                  <a:srgbClr val="6B6660"/>
                 </a:solidFill>
                 <a:latin typeface="Calibri" pitchFamily="34" charset="0"/>
                 <a:ea typeface="Calibri" pitchFamily="34" charset="-122"/>
                 <a:cs typeface="Calibri" pitchFamily="34" charset="-120"/>
               </a:rPr>
-              <a:t>The thing you MEASURE or observe. It depends on the independent variable. Example: the height the plant grows.</a:t>
+              <a:t>It changes because of the IV</a:t>
             </a:r>
             <a:endParaRPr lang="en-US" sz="1100" dirty="0"/>
           </a:p>
-        </p:txBody>
-      </p:sp>
-      <p:sp>
-        <p:nvSpPr>
-          <p:cNvPr id="13" name="Shape 11"/>
-          <p:cNvSpPr/>
-          <p:nvPr/>
-        </p:nvSpPr>
-        <p:spPr>
-          <a:xfrm>
-            <a:off x="6126480" y="1188720"/>
-            <a:ext cx="2560320" cy="1828800"/>
+          <a:p>
+            <a:pPr marL="342900" indent="-342900">
+              <a:spcAft>
+                <a:spcPts val="400"/>
+              </a:spcAft>
+              <a:buSzPct val="100000"/>
+              <a:buChar char="•"/>
+            </a:pPr>
+            <a:r>
+              <a:rPr lang="en-US" sz="1100" dirty="0">
+                <a:solidFill>
+                  <a:srgbClr val="6B6660"/>
+                </a:solidFill>
+                <a:latin typeface="Calibri" pitchFamily="34" charset="0"/>
+                <a:ea typeface="Calibri" pitchFamily="34" charset="-122"/>
+                <a:cs typeface="Calibri" pitchFamily="34" charset="-120"/>
+              </a:rPr>
+              <a:t>Goes on the y-axis of a graph</a:t>
+            </a:r>
+            <a:endParaRPr lang="en-US" sz="1100" dirty="0"/>
+          </a:p>
+          <a:p>
+            <a:pPr marL="342900" indent="-342900">
+              <a:spcAft>
+                <a:spcPts val="400"/>
+              </a:spcAft>
+              <a:buSzPct val="100000"/>
+              <a:buChar char="•"/>
+            </a:pPr>
+            <a:r>
+              <a:rPr lang="en-US" sz="1100" dirty="0">
+                <a:solidFill>
+                  <a:srgbClr val="6B6660"/>
+                </a:solidFill>
+                <a:latin typeface="Calibri" pitchFamily="34" charset="0"/>
+                <a:ea typeface="Calibri" pitchFamily="34" charset="-122"/>
+                <a:cs typeface="Calibri" pitchFamily="34" charset="-120"/>
+              </a:rPr>
+              <a:t>Example: height of the plant after 2 weeks</a:t>
+            </a:r>
+            <a:endParaRPr lang="en-US" sz="1100" dirty="0"/>
+          </a:p>
+        </p:txBody>
+      </p:sp>
+      <p:sp>
+        <p:nvSpPr>
+          <p:cNvPr id="14" name="Shape 12"/>
+          <p:cNvSpPr/>
+          <p:nvPr/>
+        </p:nvSpPr>
+        <p:spPr>
+          <a:xfrm>
+            <a:off x="5852160" y="1051560"/>
+            <a:ext cx="2468880" cy="3657600"/>
           </a:xfrm>
           <a:prstGeom prst="rect">
             <a:avLst/>
@@ -2110,12 +3211,7 @@
           <a:solidFill>
             <a:srgbClr val="FFFFFF"/>
           </a:solidFill>
-          <a:ln w="12700">
-            <a:solidFill>
-              <a:srgbClr val="E5E2DC"/>
-            </a:solidFill>
-            <a:prstDash val="solid"/>
-          </a:ln>
+          <a:ln/>
           <a:effectLst>
             <a:outerShdw sx="100000" sy="100000" kx="0" ky="0" algn="bl" rotWithShape="0" blurRad="50800" dist="25400" dir="8100000">
               <a:srgbClr val="000000">
@@ -2127,34 +3223,34 @@
       </p:sp>
       <p:sp>
         <p:nvSpPr>
-          <p:cNvPr id="14" name="Shape 12"/>
-          <p:cNvSpPr/>
-          <p:nvPr/>
-        </p:nvSpPr>
-        <p:spPr>
-          <a:xfrm>
-            <a:off x="6126480" y="1188720"/>
-            <a:ext cx="2560320" cy="54864"/>
-          </a:xfrm>
-          <a:prstGeom prst="rect">
-            <a:avLst/>
-          </a:prstGeom>
-          <a:solidFill>
-            <a:srgbClr val="2A9D8F"/>
-          </a:solidFill>
-          <a:ln/>
-        </p:spPr>
-      </p:sp>
-      <p:sp>
-        <p:nvSpPr>
-          <p:cNvPr id="15" name="Text 13"/>
-          <p:cNvSpPr/>
-          <p:nvPr/>
-        </p:nvSpPr>
-        <p:spPr>
-          <a:xfrm>
-            <a:off x="6263640" y="1325880"/>
-            <a:ext cx="2286000" cy="365760"/>
+          <p:cNvPr id="15" name="Shape 13"/>
+          <p:cNvSpPr/>
+          <p:nvPr/>
+        </p:nvSpPr>
+        <p:spPr>
+          <a:xfrm>
+            <a:off x="5852160" y="1051560"/>
+            <a:ext cx="2468880" cy="54864"/>
+          </a:xfrm>
+          <a:prstGeom prst="rect">
+            <a:avLst/>
+          </a:prstGeom>
+          <a:solidFill>
+            <a:srgbClr val="9B9690"/>
+          </a:solidFill>
+          <a:ln/>
+        </p:spPr>
+      </p:sp>
+      <p:sp>
+        <p:nvSpPr>
+          <p:cNvPr id="16" name="Text 14"/>
+          <p:cNvSpPr/>
+          <p:nvPr/>
+        </p:nvSpPr>
+        <p:spPr>
+          <a:xfrm>
+            <a:off x="5989320" y="1234440"/>
+            <a:ext cx="2194560" cy="457200"/>
           </a:xfrm>
           <a:prstGeom prst="rect">
             <a:avLst/>
@@ -2166,58 +3262,125 @@
           <a:bodyPr wrap="square" rtlCol="0" anchor="ctr"/>
           <a:lstStyle/>
           <a:p>
-            <a:pPr indent="0" marL="0">
+            <a:pPr algn="ctr" indent="0" marL="0">
               <a:buNone/>
             </a:pPr>
             <a:r>
               <a:rPr lang="en-US" sz="1400" b="1" dirty="0">
                 <a:solidFill>
                   <a:srgbClr val="1B2A4A"/>
+                </a:solidFill>
+                <a:latin typeface="Georgia" pitchFamily="34" charset="0"/>
+                <a:ea typeface="Georgia" pitchFamily="34" charset="-122"/>
+                <a:cs typeface="Georgia" pitchFamily="34" charset="-120"/>
+              </a:rPr>
+              <a:t>Controlled</a:t>
+            </a:r>
+            <a:endParaRPr lang="en-US" sz="1400" dirty="0"/>
+          </a:p>
+        </p:txBody>
+      </p:sp>
+      <p:sp>
+        <p:nvSpPr>
+          <p:cNvPr id="17" name="Text 15"/>
+          <p:cNvSpPr/>
+          <p:nvPr/>
+        </p:nvSpPr>
+        <p:spPr>
+          <a:xfrm>
+            <a:off x="5989320" y="1737360"/>
+            <a:ext cx="2194560" cy="2834640"/>
+          </a:xfrm>
+          <a:prstGeom prst="rect">
+            <a:avLst/>
+          </a:prstGeom>
+          <a:noFill/>
+          <a:ln/>
+        </p:spPr>
+        <p:txBody>
+          <a:bodyPr wrap="square" rtlCol="0" anchor="t"/>
+          <a:lstStyle/>
+          <a:p>
+            <a:pPr marL="342900" indent="-342900">
+              <a:spcAft>
+                <a:spcPts val="400"/>
+              </a:spcAft>
+              <a:buSzPct val="100000"/>
+              <a:buChar char="•"/>
+            </a:pPr>
+            <a:r>
+              <a:rPr lang="en-US" sz="1100" dirty="0">
+                <a:solidFill>
+                  <a:srgbClr val="6B6660"/>
                 </a:solidFill>
                 <a:latin typeface="Calibri" pitchFamily="34" charset="0"/>
                 <a:ea typeface="Calibri" pitchFamily="34" charset="-122"/>
                 <a:cs typeface="Calibri" pitchFamily="34" charset="-120"/>
               </a:rPr>
-              <a:t>Controlled Variables</a:t>
-            </a:r>
-            <a:endParaRPr lang="en-US" sz="1400" dirty="0"/>
-          </a:p>
-        </p:txBody>
-      </p:sp>
-      <p:sp>
-        <p:nvSpPr>
-          <p:cNvPr id="16" name="Text 14"/>
-          <p:cNvSpPr/>
-          <p:nvPr/>
-        </p:nvSpPr>
-        <p:spPr>
-          <a:xfrm>
-            <a:off x="6263640" y="1737360"/>
-            <a:ext cx="2286000" cy="1097280"/>
-          </a:xfrm>
-          <a:prstGeom prst="rect">
-            <a:avLst/>
-          </a:prstGeom>
-          <a:noFill/>
-          <a:ln/>
-        </p:spPr>
-        <p:txBody>
-          <a:bodyPr wrap="square" rtlCol="0" anchor="t"/>
-          <a:lstStyle/>
-          <a:p>
-            <a:pPr indent="0" marL="0">
-              <a:buNone/>
+              <a:t>Variables you keep the SAME</a:t>
+            </a:r>
+            <a:endParaRPr lang="en-US" sz="1100" dirty="0"/>
+          </a:p>
+          <a:p>
+            <a:pPr marL="342900" indent="-342900">
+              <a:spcAft>
+                <a:spcPts val="400"/>
+              </a:spcAft>
+              <a:buSzPct val="100000"/>
+              <a:buChar char="•"/>
             </a:pPr>
             <a:r>
               <a:rPr lang="en-US" sz="1100" dirty="0">
                 <a:solidFill>
-                  <a:srgbClr val="3D3A36"/>
+                  <a:srgbClr val="6B6660"/>
                 </a:solidFill>
                 <a:latin typeface="Calibri" pitchFamily="34" charset="0"/>
                 <a:ea typeface="Calibri" pitchFamily="34" charset="-122"/>
                 <a:cs typeface="Calibri" pitchFamily="34" charset="-120"/>
               </a:rPr>
-              <a:t>Everything you keep THE SAME to make it a fair test. Example: same soil, same pot size, same sunlight, same plant type.</a:t>
+              <a:t>There can be MANY of these</a:t>
+            </a:r>
+            <a:endParaRPr lang="en-US" sz="1100" dirty="0"/>
+          </a:p>
+          <a:p>
+            <a:pPr marL="342900" indent="-342900">
+              <a:spcAft>
+                <a:spcPts val="400"/>
+              </a:spcAft>
+              <a:buSzPct val="100000"/>
+              <a:buChar char="•"/>
+            </a:pPr>
+            <a:r>
+              <a:rPr lang="en-US" sz="1100" dirty="0">
+                <a:solidFill>
+                  <a:srgbClr val="6B6660"/>
+                </a:solidFill>
+                <a:latin typeface="Calibri" pitchFamily="34" charset="0"/>
+                <a:ea typeface="Calibri" pitchFamily="34" charset="-122"/>
+                <a:cs typeface="Calibri" pitchFamily="34" charset="-120"/>
+              </a:rPr>
+              <a:t>Makes the test fair</a:t>
+            </a:r>
+            <a:endParaRPr lang="en-US" sz="1100" dirty="0"/>
+          </a:p>
+          <a:p>
+            <a:pPr marL="342900" indent="-342900">
+              <a:spcAft>
+                <a:spcPts val="400"/>
+              </a:spcAft>
+              <a:buSzPct val="100000"/>
+              <a:buChar char="•"/>
+            </a:pPr>
+            <a:r>
+              <a:rPr lang="en-US" sz="1100" dirty="0">
+                <a:solidFill>
+                  <a:srgbClr val="6B6660"/>
+                </a:solidFill>
+                <a:latin typeface="Calibri" pitchFamily="34" charset="0"/>
+                <a:ea typeface="Calibri" pitchFamily="34" charset="-122"/>
+                <a:cs typeface="Calibri" pitchFamily="34" charset="-120"/>
+              </a:rPr>
+              <a:t>Example: same soil, same sunlight, same pot size</a:t>
             </a:r>
             <a:endParaRPr lang="en-US" sz="1100" dirty="0"/>
           </a:p>
@@ -2264,7 +3427,47 @@
         <p:spPr>
           <a:xfrm>
             <a:off x="0" y="0"/>
-            <a:ext cx="9144000" cy="54864"/>
+            <a:ext cx="9144000" cy="822960"/>
+          </a:xfrm>
+          <a:prstGeom prst="rect">
+            <a:avLst/>
+          </a:prstGeom>
+          <a:solidFill>
+            <a:srgbClr val="FFFFFF"/>
+          </a:solidFill>
+          <a:ln/>
+        </p:spPr>
+      </p:sp>
+      <p:sp>
+        <p:nvSpPr>
+          <p:cNvPr id="3" name="Shape 1"/>
+          <p:cNvSpPr/>
+          <p:nvPr/>
+        </p:nvSpPr>
+        <p:spPr>
+          <a:xfrm>
+            <a:off x="0" y="804672"/>
+            <a:ext cx="9144000" cy="27432"/>
+          </a:xfrm>
+          <a:prstGeom prst="rect">
+            <a:avLst/>
+          </a:prstGeom>
+          <a:solidFill>
+            <a:srgbClr val="E5E2DC"/>
+          </a:solidFill>
+          <a:ln/>
+        </p:spPr>
+      </p:sp>
+      <p:sp>
+        <p:nvSpPr>
+          <p:cNvPr id="4" name="Shape 2"/>
+          <p:cNvSpPr/>
+          <p:nvPr/>
+        </p:nvSpPr>
+        <p:spPr>
+          <a:xfrm>
+            <a:off x="548640" y="201168"/>
+            <a:ext cx="54864" cy="420624"/>
           </a:xfrm>
           <a:prstGeom prst="rect">
             <a:avLst/>
@@ -2277,14 +3480,14 @@
       </p:sp>
       <p:sp>
         <p:nvSpPr>
-          <p:cNvPr id="3" name="Text 1"/>
-          <p:cNvSpPr/>
-          <p:nvPr/>
-        </p:nvSpPr>
-        <p:spPr>
-          <a:xfrm>
-            <a:off x="7772400" y="4709160"/>
-            <a:ext cx="1097280" cy="320040"/>
+          <p:cNvPr id="5" name="Text 3"/>
+          <p:cNvSpPr/>
+          <p:nvPr/>
+        </p:nvSpPr>
+        <p:spPr>
+          <a:xfrm>
+            <a:off x="777240" y="137160"/>
+            <a:ext cx="7772400" cy="548640"/>
           </a:xfrm>
           <a:prstGeom prst="rect">
             <a:avLst/>
@@ -2293,96 +3496,78 @@
           <a:ln/>
         </p:spPr>
         <p:txBody>
-          <a:bodyPr wrap="square" rtlCol="0" anchor="ctr"/>
-          <a:lstStyle/>
-          <a:p>
-            <a:pPr algn="r" indent="0" marL="0">
+          <a:bodyPr wrap="square" lIns="0" tIns="0" rIns="0" bIns="0" rtlCol="0" anchor="ctr"/>
+          <a:lstStyle/>
+          <a:p>
+            <a:pPr indent="0" marL="0">
               <a:buNone/>
             </a:pPr>
             <a:r>
-              <a:rPr lang="en-US" sz="900" dirty="0">
-                <a:solidFill>
-                  <a:srgbClr val="6B6660"/>
+              <a:rPr lang="en-US" sz="2000" b="1" dirty="0">
+                <a:solidFill>
+                  <a:srgbClr val="1B2A4A"/>
+                </a:solidFill>
+                <a:latin typeface="Georgia" pitchFamily="34" charset="0"/>
+                <a:ea typeface="Georgia" pitchFamily="34" charset="-122"/>
+                <a:cs typeface="Georgia" pitchFamily="34" charset="-120"/>
+              </a:rPr>
+              <a:t>Example: How Does Temperature Affect Dissolving?</a:t>
+            </a:r>
+            <a:endParaRPr lang="en-US" sz="2000" dirty="0"/>
+          </a:p>
+        </p:txBody>
+      </p:sp>
+      <p:sp>
+        <p:nvSpPr>
+          <p:cNvPr id="6" name="Text 4"/>
+          <p:cNvSpPr/>
+          <p:nvPr/>
+        </p:nvSpPr>
+        <p:spPr>
+          <a:xfrm>
+            <a:off x="731520" y="1051560"/>
+            <a:ext cx="7680960" cy="3108960"/>
+          </a:xfrm>
+          <a:prstGeom prst="rect">
+            <a:avLst/>
+          </a:prstGeom>
+          <a:noFill/>
+          <a:ln/>
+        </p:spPr>
+        <p:txBody>
+          <a:bodyPr wrap="square" rtlCol="0" anchor="t"/>
+          <a:lstStyle/>
+          <a:p>
+            <a:pPr marL="342900" indent="-342900">
+              <a:spcAft>
+                <a:spcPts val="800"/>
+              </a:spcAft>
+              <a:buSzPct val="100000"/>
+              <a:buChar char="•"/>
+            </a:pPr>
+            <a:r>
+              <a:rPr lang="en-US" sz="1500" dirty="0">
+                <a:solidFill>
+                  <a:srgbClr val="3D3A36"/>
                 </a:solidFill>
                 <a:latin typeface="Calibri" pitchFamily="34" charset="0"/>
                 <a:ea typeface="Calibri" pitchFamily="34" charset="-122"/>
                 <a:cs typeface="Calibri" pitchFamily="34" charset="-120"/>
               </a:rPr>
-              <a:t>4 / 6</a:t>
-            </a:r>
-            <a:endParaRPr lang="en-US" sz="900" dirty="0"/>
-          </a:p>
-        </p:txBody>
-      </p:sp>
-      <p:sp>
-        <p:nvSpPr>
-          <p:cNvPr id="4" name="Text 2"/>
-          <p:cNvSpPr/>
-          <p:nvPr/>
-        </p:nvSpPr>
-        <p:spPr>
-          <a:xfrm>
-            <a:off x="457200" y="274320"/>
-            <a:ext cx="8229600" cy="640080"/>
-          </a:xfrm>
-          <a:prstGeom prst="rect">
-            <a:avLst/>
-          </a:prstGeom>
-          <a:noFill/>
-          <a:ln/>
-        </p:spPr>
-        <p:txBody>
-          <a:bodyPr wrap="square" rtlCol="0" anchor="ctr"/>
-          <a:lstStyle/>
-          <a:p>
-            <a:pPr indent="0" marL="0">
-              <a:buNone/>
-            </a:pPr>
-            <a:r>
-              <a:rPr lang="en-US" sz="2600" b="1" dirty="0">
-                <a:solidFill>
-                  <a:srgbClr val="1B2A4A"/>
-                </a:solidFill>
-                <a:latin typeface="Georgia" pitchFamily="34" charset="0"/>
-                <a:ea typeface="Georgia" pitchFamily="34" charset="-122"/>
-                <a:cs typeface="Georgia" pitchFamily="34" charset="-120"/>
-              </a:rPr>
-              <a:t>Fair Tests</a:t>
-            </a:r>
-            <a:endParaRPr lang="en-US" sz="2600" dirty="0"/>
-          </a:p>
-        </p:txBody>
-      </p:sp>
-      <p:sp>
-        <p:nvSpPr>
-          <p:cNvPr id="5" name="Text 3"/>
-          <p:cNvSpPr/>
-          <p:nvPr/>
-        </p:nvSpPr>
-        <p:spPr>
-          <a:xfrm>
-            <a:off x="457200" y="1188720"/>
-            <a:ext cx="3840480" cy="3474720"/>
-          </a:xfrm>
-          <a:prstGeom prst="rect">
-            <a:avLst/>
-          </a:prstGeom>
-          <a:noFill/>
-          <a:ln/>
-        </p:spPr>
-        <p:txBody>
-          <a:bodyPr wrap="square" rtlCol="0" anchor="t"/>
-          <a:lstStyle/>
+              <a:t>Question: Does sugar dissolve faster in hot water?</a:t>
+            </a:r>
+            <a:endParaRPr lang="en-US" sz="1500" dirty="0"/>
+          </a:p>
           <a:p>
             <a:pPr marL="342900" indent="-342900">
               <a:spcAft>
-                <a:spcPts val="600"/>
+                <a:spcPts val="800"/>
               </a:spcAft>
               <a:buSzPct val="100000"/>
               <a:buChar char="•"/>
             </a:pPr>
             <a:r>
-              <a:rPr lang="en-US" sz="1400" dirty="0">
+              <a:rPr lang="en-US" sz="1500" dirty="0">
                 <a:solidFill>
                   <a:srgbClr val="3D3A36"/>
                 </a:solidFill>
@@ -2390,20 +3575,20 @@
                 <a:ea typeface="Calibri" pitchFamily="34" charset="-122"/>
                 <a:cs typeface="Calibri" pitchFamily="34" charset="-120"/>
               </a:rPr>
-              <a:t>A fair test changes ONLY the independent variable</a:t>
-            </a:r>
-            <a:endParaRPr lang="en-US" sz="1400" dirty="0"/>
+              <a:t>Independent variable (I change): Temperature of water</a:t>
+            </a:r>
+            <a:endParaRPr lang="en-US" sz="1500" dirty="0"/>
           </a:p>
           <a:p>
             <a:pPr marL="342900" indent="-342900">
               <a:spcAft>
-                <a:spcPts val="600"/>
+                <a:spcPts val="800"/>
               </a:spcAft>
               <a:buSzPct val="100000"/>
               <a:buChar char="•"/>
             </a:pPr>
             <a:r>
-              <a:rPr lang="en-US" sz="1400" dirty="0">
+              <a:rPr lang="en-US" sz="1500" dirty="0">
                 <a:solidFill>
                   <a:srgbClr val="3D3A36"/>
                 </a:solidFill>
@@ -2411,20 +3596,20 @@
                 <a:ea typeface="Calibri" pitchFamily="34" charset="-122"/>
                 <a:cs typeface="Calibri" pitchFamily="34" charset="-120"/>
               </a:rPr>
-              <a:t>If you change more than one thing, you cannot tell which caused the result</a:t>
-            </a:r>
-            <a:endParaRPr lang="en-US" sz="1400" dirty="0"/>
+              <a:t>Dependent variable (I measure): Time for sugar to dissolve</a:t>
+            </a:r>
+            <a:endParaRPr lang="en-US" sz="1500" dirty="0"/>
           </a:p>
           <a:p>
             <a:pPr marL="342900" indent="-342900">
               <a:spcAft>
-                <a:spcPts val="600"/>
+                <a:spcPts val="800"/>
               </a:spcAft>
               <a:buSzPct val="100000"/>
               <a:buChar char="•"/>
             </a:pPr>
             <a:r>
-              <a:rPr lang="en-US" sz="1400" dirty="0">
+              <a:rPr lang="en-US" sz="1500" dirty="0">
                 <a:solidFill>
                   <a:srgbClr val="3D3A36"/>
                 </a:solidFill>
@@ -2432,20 +3617,20 @@
                 <a:ea typeface="Calibri" pitchFamily="34" charset="-122"/>
                 <a:cs typeface="Calibri" pitchFamily="34" charset="-120"/>
               </a:rPr>
-              <a:t>Controlled variables make the comparison valid</a:t>
-            </a:r>
-            <a:endParaRPr lang="en-US" sz="1400" dirty="0"/>
+              <a:t>Controlled variables (I keep same): Amount of water, amount of sugar, stirring speed, type of sugar</a:t>
+            </a:r>
+            <a:endParaRPr lang="en-US" sz="1500" dirty="0"/>
           </a:p>
           <a:p>
             <a:pPr marL="342900" indent="-342900">
               <a:spcAft>
-                <a:spcPts val="600"/>
+                <a:spcPts val="800"/>
               </a:spcAft>
               <a:buSzPct val="100000"/>
               <a:buChar char="•"/>
             </a:pPr>
             <a:r>
-              <a:rPr lang="en-US" sz="1400" dirty="0">
+              <a:rPr lang="en-US" sz="1500" dirty="0">
                 <a:solidFill>
                   <a:srgbClr val="3D3A36"/>
                 </a:solidFill>
@@ -2453,35 +3638,30 @@
                 <a:ea typeface="Calibri" pitchFamily="34" charset="-122"/>
                 <a:cs typeface="Calibri" pitchFamily="34" charset="-120"/>
               </a:rPr>
-              <a:t>Example: Testing which fertiliser helps plants grow tallest — you must use the same pot, soil, water, and sunlight for each plant</a:t>
-            </a:r>
-            <a:endParaRPr lang="en-US" sz="1400" dirty="0"/>
-          </a:p>
-        </p:txBody>
-      </p:sp>
-      <p:sp>
-        <p:nvSpPr>
-          <p:cNvPr id="6" name="Shape 4"/>
-          <p:cNvSpPr/>
-          <p:nvPr/>
-        </p:nvSpPr>
-        <p:spPr>
-          <a:xfrm>
-            <a:off x="4846320" y="1188720"/>
-            <a:ext cx="3840480" cy="3474720"/>
-          </a:xfrm>
-          <a:prstGeom prst="rect">
-            <a:avLst/>
-          </a:prstGeom>
-          <a:solidFill>
-            <a:srgbClr val="FFFFFF"/>
-          </a:solidFill>
-          <a:ln w="12700">
-            <a:solidFill>
-              <a:srgbClr val="E5E2DC"/>
-            </a:solidFill>
-            <a:prstDash val="solid"/>
-          </a:ln>
+              <a:t>This is a FAIR TEST because only ONE variable changes.</a:t>
+            </a:r>
+            <a:endParaRPr lang="en-US" sz="1500" dirty="0"/>
+          </a:p>
+        </p:txBody>
+      </p:sp>
+      <p:sp>
+        <p:nvSpPr>
+          <p:cNvPr id="7" name="Shape 5"/>
+          <p:cNvSpPr/>
+          <p:nvPr/>
+        </p:nvSpPr>
+        <p:spPr>
+          <a:xfrm>
+            <a:off x="731520" y="4206240"/>
+            <a:ext cx="7680960" cy="640080"/>
+          </a:xfrm>
+          <a:prstGeom prst="rect">
+            <a:avLst/>
+          </a:prstGeom>
+          <a:solidFill>
+            <a:srgbClr val="E8F5F3"/>
+          </a:solidFill>
+          <a:ln/>
           <a:effectLst>
             <a:outerShdw sx="100000" sy="100000" kx="0" ky="0" algn="bl" rotWithShape="0" blurRad="50800" dist="25400" dir="8100000">
               <a:srgbClr val="000000">
@@ -2493,34 +3673,14 @@
       </p:sp>
       <p:sp>
         <p:nvSpPr>
-          <p:cNvPr id="7" name="Shape 5"/>
-          <p:cNvSpPr/>
-          <p:nvPr/>
-        </p:nvSpPr>
-        <p:spPr>
-          <a:xfrm>
-            <a:off x="4846320" y="1188720"/>
-            <a:ext cx="3840480" cy="54864"/>
-          </a:xfrm>
-          <a:prstGeom prst="rect">
-            <a:avLst/>
-          </a:prstGeom>
-          <a:solidFill>
-            <a:srgbClr val="2A9D8F"/>
-          </a:solidFill>
-          <a:ln/>
-        </p:spPr>
-      </p:sp>
-      <p:sp>
-        <p:nvSpPr>
           <p:cNvPr id="8" name="Text 6"/>
           <p:cNvSpPr/>
           <p:nvPr/>
         </p:nvSpPr>
         <p:spPr>
           <a:xfrm>
-            <a:off x="5120640" y="1371600"/>
-            <a:ext cx="3291840" cy="3108960"/>
+            <a:off x="914400" y="4251960"/>
+            <a:ext cx="7315200" cy="548640"/>
           </a:xfrm>
           <a:prstGeom prst="rect">
             <a:avLst/>
@@ -2529,46 +3689,28 @@
           <a:ln/>
         </p:spPr>
         <p:txBody>
-          <a:bodyPr wrap="square" rtlCol="0" anchor="t"/>
+          <a:bodyPr wrap="square" rtlCol="0" anchor="ctr"/>
           <a:lstStyle/>
           <a:p>
             <a:pPr indent="0" marL="0">
-              <a:spcAft>
-                <a:spcPts val="400"/>
-              </a:spcAft>
               <a:buNone/>
             </a:pPr>
             <a:r>
-              <a:rPr lang="en-US" sz="1600" b="1" dirty="0">
-                <a:solidFill>
-                  <a:srgbClr val="1B2A4A"/>
+              <a:rPr lang="en-US" sz="1200" b="1" dirty="0">
+                <a:solidFill>
+                  <a:srgbClr val="2A9D8F"/>
                 </a:solidFill>
                 <a:latin typeface="Calibri" pitchFamily="34" charset="0"/>
                 <a:ea typeface="Calibri" pitchFamily="34" charset="-122"/>
                 <a:cs typeface="Calibri" pitchFamily="34" charset="-120"/>
               </a:rPr>
-              <a:t>Common Mistakes</a:t>
-            </a:r>
-            <a:endParaRPr lang="en-US" sz="1600" dirty="0"/>
-          </a:p>
-          <a:p>
+              <a:t>Key Idea: </a:t>
+            </a:r>
             <a:pPr indent="0" marL="0">
-              <a:spcAft>
-                <a:spcPts val="400"/>
-              </a:spcAft>
               <a:buNone/>
             </a:pPr>
-            <a:endParaRPr lang="en-US" sz="1600" dirty="0"/>
-          </a:p>
-          <a:p>
-            <a:pPr indent="0" marL="0">
-              <a:spcAft>
-                <a:spcPts val="400"/>
-              </a:spcAft>
-              <a:buNone/>
-            </a:pPr>
-            <a:r>
-              <a:rPr lang="en-US" sz="1300" dirty="0">
+            <a:r>
+              <a:rPr lang="en-US" sz="1200" i="1" dirty="0">
                 <a:solidFill>
                   <a:srgbClr val="3D3A36"/>
                 </a:solidFill>
@@ -2576,89 +3718,9 @@
                 <a:ea typeface="Calibri" pitchFamily="34" charset="-122"/>
                 <a:cs typeface="Calibri" pitchFamily="34" charset="-120"/>
               </a:rPr>
-              <a:t>Changing two things at once (not a fair test)</a:t>
-            </a:r>
-            <a:endParaRPr lang="en-US" sz="1600" dirty="0"/>
-          </a:p>
-          <a:p>
-            <a:pPr indent="0" marL="0">
-              <a:spcAft>
-                <a:spcPts val="400"/>
-              </a:spcAft>
-              <a:buNone/>
-            </a:pPr>
-            <a:r>
-              <a:rPr lang="en-US" sz="1300" dirty="0">
-                <a:solidFill>
-                  <a:srgbClr val="3D3A36"/>
-                </a:solidFill>
-                <a:latin typeface="Calibri" pitchFamily="34" charset="0"/>
-                <a:ea typeface="Calibri" pitchFamily="34" charset="-122"/>
-                <a:cs typeface="Calibri" pitchFamily="34" charset="-120"/>
-              </a:rPr>
-              <a:t>Forgetting to measure the dependent variable</a:t>
-            </a:r>
-            <a:endParaRPr lang="en-US" sz="1600" dirty="0"/>
-          </a:p>
-          <a:p>
-            <a:pPr indent="0" marL="0">
-              <a:spcAft>
-                <a:spcPts val="400"/>
-              </a:spcAft>
-              <a:buNone/>
-            </a:pPr>
-            <a:r>
-              <a:rPr lang="en-US" sz="1300" dirty="0">
-                <a:solidFill>
-                  <a:srgbClr val="3D3A36"/>
-                </a:solidFill>
-                <a:latin typeface="Calibri" pitchFamily="34" charset="0"/>
-                <a:ea typeface="Calibri" pitchFamily="34" charset="-122"/>
-                <a:cs typeface="Calibri" pitchFamily="34" charset="-120"/>
-              </a:rPr>
-              <a:t>Not keeping controlled variables constant</a:t>
-            </a:r>
-            <a:endParaRPr lang="en-US" sz="1600" dirty="0"/>
-          </a:p>
-          <a:p>
-            <a:pPr indent="0" marL="0">
-              <a:spcAft>
-                <a:spcPts val="400"/>
-              </a:spcAft>
-              <a:buNone/>
-            </a:pPr>
-            <a:r>
-              <a:rPr lang="en-US" sz="1300" dirty="0">
-                <a:solidFill>
-                  <a:srgbClr val="3D3A36"/>
-                </a:solidFill>
-                <a:latin typeface="Calibri" pitchFamily="34" charset="0"/>
-                <a:ea typeface="Calibri" pitchFamily="34" charset="-122"/>
-                <a:cs typeface="Calibri" pitchFamily="34" charset="-120"/>
-              </a:rPr>
-              <a:t>Not repeating the experiment for reliability</a:t>
-            </a:r>
-            <a:endParaRPr lang="en-US" sz="1600" dirty="0"/>
-          </a:p>
-          <a:p>
-            <a:pPr indent="0" marL="0">
-              <a:spcAft>
-                <a:spcPts val="400"/>
-              </a:spcAft>
-              <a:buNone/>
-            </a:pPr>
-            <a:r>
-              <a:rPr lang="en-US" sz="1300" dirty="0">
-                <a:solidFill>
-                  <a:srgbClr val="3D3A36"/>
-                </a:solidFill>
-                <a:latin typeface="Calibri" pitchFamily="34" charset="0"/>
-                <a:ea typeface="Calibri" pitchFamily="34" charset="-122"/>
-                <a:cs typeface="Calibri" pitchFamily="34" charset="-120"/>
-              </a:rPr>
-              <a:t>Confusing independent and dependent variables</a:t>
-            </a:r>
-            <a:endParaRPr lang="en-US" sz="1600" dirty="0"/>
+              <a:t>If you change two things at once, you cannot know which one caused the result.</a:t>
+            </a:r>
+            <a:endParaRPr lang="en-US" sz="1200" dirty="0"/>
           </a:p>
         </p:txBody>
       </p:sp>
@@ -2703,7 +3765,47 @@
         <p:spPr>
           <a:xfrm>
             <a:off x="0" y="0"/>
-            <a:ext cx="9144000" cy="54864"/>
+            <a:ext cx="9144000" cy="822960"/>
+          </a:xfrm>
+          <a:prstGeom prst="rect">
+            <a:avLst/>
+          </a:prstGeom>
+          <a:solidFill>
+            <a:srgbClr val="FFFFFF"/>
+          </a:solidFill>
+          <a:ln/>
+        </p:spPr>
+      </p:sp>
+      <p:sp>
+        <p:nvSpPr>
+          <p:cNvPr id="3" name="Shape 1"/>
+          <p:cNvSpPr/>
+          <p:nvPr/>
+        </p:nvSpPr>
+        <p:spPr>
+          <a:xfrm>
+            <a:off x="0" y="804672"/>
+            <a:ext cx="9144000" cy="27432"/>
+          </a:xfrm>
+          <a:prstGeom prst="rect">
+            <a:avLst/>
+          </a:prstGeom>
+          <a:solidFill>
+            <a:srgbClr val="E5E2DC"/>
+          </a:solidFill>
+          <a:ln/>
+        </p:spPr>
+      </p:sp>
+      <p:sp>
+        <p:nvSpPr>
+          <p:cNvPr id="4" name="Shape 2"/>
+          <p:cNvSpPr/>
+          <p:nvPr/>
+        </p:nvSpPr>
+        <p:spPr>
+          <a:xfrm>
+            <a:off x="548640" y="201168"/>
+            <a:ext cx="54864" cy="420624"/>
           </a:xfrm>
           <a:prstGeom prst="rect">
             <a:avLst/>
@@ -2716,14 +3818,14 @@
       </p:sp>
       <p:sp>
         <p:nvSpPr>
-          <p:cNvPr id="3" name="Text 1"/>
-          <p:cNvSpPr/>
-          <p:nvPr/>
-        </p:nvSpPr>
-        <p:spPr>
-          <a:xfrm>
-            <a:off x="7772400" y="4709160"/>
-            <a:ext cx="1097280" cy="320040"/>
+          <p:cNvPr id="5" name="Text 3"/>
+          <p:cNvSpPr/>
+          <p:nvPr/>
+        </p:nvSpPr>
+        <p:spPr>
+          <a:xfrm>
+            <a:off x="777240" y="137160"/>
+            <a:ext cx="7772400" cy="548640"/>
           </a:xfrm>
           <a:prstGeom prst="rect">
             <a:avLst/>
@@ -2732,37 +3834,276 @@
           <a:ln/>
         </p:spPr>
         <p:txBody>
-          <a:bodyPr wrap="square" rtlCol="0" anchor="ctr"/>
-          <a:lstStyle/>
-          <a:p>
-            <a:pPr algn="r" indent="0" marL="0">
+          <a:bodyPr wrap="square" lIns="0" tIns="0" rIns="0" bIns="0" rtlCol="0" anchor="ctr"/>
+          <a:lstStyle/>
+          <a:p>
+            <a:pPr indent="0" marL="0">
               <a:buNone/>
             </a:pPr>
             <a:r>
-              <a:rPr lang="en-US" sz="900" dirty="0">
-                <a:solidFill>
-                  <a:srgbClr val="6B6660"/>
+              <a:rPr lang="en-US" sz="2000" b="1" dirty="0">
+                <a:solidFill>
+                  <a:srgbClr val="1B2A4A"/>
+                </a:solidFill>
+                <a:latin typeface="Georgia" pitchFamily="34" charset="0"/>
+                <a:ea typeface="Georgia" pitchFamily="34" charset="-122"/>
+                <a:cs typeface="Georgia" pitchFamily="34" charset="-120"/>
+              </a:rPr>
+              <a:t>Fair Test vs Unfair Test</a:t>
+            </a:r>
+            <a:endParaRPr lang="en-US" sz="2000" dirty="0"/>
+          </a:p>
+        </p:txBody>
+      </p:sp>
+      <p:sp>
+        <p:nvSpPr>
+          <p:cNvPr id="6" name="Shape 4"/>
+          <p:cNvSpPr/>
+          <p:nvPr/>
+        </p:nvSpPr>
+        <p:spPr>
+          <a:xfrm>
+            <a:off x="548640" y="1051560"/>
+            <a:ext cx="3840480" cy="3474720"/>
+          </a:xfrm>
+          <a:prstGeom prst="rect">
+            <a:avLst/>
+          </a:prstGeom>
+          <a:solidFill>
+            <a:srgbClr val="FFFFFF"/>
+          </a:solidFill>
+          <a:ln/>
+          <a:effectLst>
+            <a:outerShdw sx="100000" sy="100000" kx="0" ky="0" algn="bl" rotWithShape="0" blurRad="50800" dist="25400" dir="8100000">
+              <a:srgbClr val="000000">
+                <a:alpha val="10000"/>
+              </a:srgbClr>
+            </a:outerShdw>
+          </a:effectLst>
+        </p:spPr>
+      </p:sp>
+      <p:sp>
+        <p:nvSpPr>
+          <p:cNvPr id="7" name="Shape 5"/>
+          <p:cNvSpPr/>
+          <p:nvPr/>
+        </p:nvSpPr>
+        <p:spPr>
+          <a:xfrm>
+            <a:off x="548640" y="1051560"/>
+            <a:ext cx="3840480" cy="54864"/>
+          </a:xfrm>
+          <a:prstGeom prst="rect">
+            <a:avLst/>
+          </a:prstGeom>
+          <a:solidFill>
+            <a:srgbClr val="2A9D8F"/>
+          </a:solidFill>
+          <a:ln/>
+        </p:spPr>
+      </p:sp>
+      <p:sp>
+        <p:nvSpPr>
+          <p:cNvPr id="8" name="Text 6"/>
+          <p:cNvSpPr/>
+          <p:nvPr/>
+        </p:nvSpPr>
+        <p:spPr>
+          <a:xfrm>
+            <a:off x="777240" y="1188720"/>
+            <a:ext cx="3383280" cy="457200"/>
+          </a:xfrm>
+          <a:prstGeom prst="rect">
+            <a:avLst/>
+          </a:prstGeom>
+          <a:noFill/>
+          <a:ln/>
+        </p:spPr>
+        <p:txBody>
+          <a:bodyPr wrap="square" lIns="0" tIns="0" rIns="0" bIns="0" rtlCol="0" anchor="ctr"/>
+          <a:lstStyle/>
+          <a:p>
+            <a:pPr indent="0" marL="0">
+              <a:buNone/>
+            </a:pPr>
+            <a:r>
+              <a:rPr lang="en-US" sz="1500" b="1" dirty="0">
+                <a:solidFill>
+                  <a:srgbClr val="1B2A4A"/>
+                </a:solidFill>
+                <a:latin typeface="Georgia" pitchFamily="34" charset="0"/>
+                <a:ea typeface="Georgia" pitchFamily="34" charset="-122"/>
+                <a:cs typeface="Georgia" pitchFamily="34" charset="-120"/>
+              </a:rPr>
+              <a:t>Fair Test ✓</a:t>
+            </a:r>
+            <a:endParaRPr lang="en-US" sz="1500" dirty="0"/>
+          </a:p>
+        </p:txBody>
+      </p:sp>
+      <p:sp>
+        <p:nvSpPr>
+          <p:cNvPr id="9" name="Text 7"/>
+          <p:cNvSpPr/>
+          <p:nvPr/>
+        </p:nvSpPr>
+        <p:spPr>
+          <a:xfrm>
+            <a:off x="777240" y="1691640"/>
+            <a:ext cx="3383280" cy="2651760"/>
+          </a:xfrm>
+          <a:prstGeom prst="rect">
+            <a:avLst/>
+          </a:prstGeom>
+          <a:noFill/>
+          <a:ln/>
+        </p:spPr>
+        <p:txBody>
+          <a:bodyPr wrap="square" rtlCol="0" anchor="t"/>
+          <a:lstStyle/>
+          <a:p>
+            <a:pPr marL="342900" indent="-342900">
+              <a:spcAft>
+                <a:spcPts val="600"/>
+              </a:spcAft>
+              <a:buSzPct val="100000"/>
+              <a:buChar char="•"/>
+            </a:pPr>
+            <a:r>
+              <a:rPr lang="en-US" sz="1300" dirty="0">
+                <a:solidFill>
+                  <a:srgbClr val="3D3A36"/>
                 </a:solidFill>
                 <a:latin typeface="Calibri" pitchFamily="34" charset="0"/>
                 <a:ea typeface="Calibri" pitchFamily="34" charset="-122"/>
                 <a:cs typeface="Calibri" pitchFamily="34" charset="-120"/>
               </a:rPr>
-              <a:t>5 / 6</a:t>
-            </a:r>
-            <a:endParaRPr lang="en-US" sz="900" dirty="0"/>
-          </a:p>
-        </p:txBody>
-      </p:sp>
-      <p:sp>
-        <p:nvSpPr>
-          <p:cNvPr id="4" name="Text 2"/>
-          <p:cNvSpPr/>
-          <p:nvPr/>
-        </p:nvSpPr>
-        <p:spPr>
-          <a:xfrm>
-            <a:off x="457200" y="274320"/>
-            <a:ext cx="8229600" cy="640080"/>
+              <a:t>Only ONE variable changes</a:t>
+            </a:r>
+            <a:endParaRPr lang="en-US" sz="1300" dirty="0"/>
+          </a:p>
+          <a:p>
+            <a:pPr marL="342900" indent="-342900">
+              <a:spcAft>
+                <a:spcPts val="600"/>
+              </a:spcAft>
+              <a:buSzPct val="100000"/>
+              <a:buChar char="•"/>
+            </a:pPr>
+            <a:r>
+              <a:rPr lang="en-US" sz="1300" dirty="0">
+                <a:solidFill>
+                  <a:srgbClr val="3D3A36"/>
+                </a:solidFill>
+                <a:latin typeface="Calibri" pitchFamily="34" charset="0"/>
+                <a:ea typeface="Calibri" pitchFamily="34" charset="-122"/>
+                <a:cs typeface="Calibri" pitchFamily="34" charset="-120"/>
+              </a:rPr>
+              <a:t>All other variables stay the same</a:t>
+            </a:r>
+            <a:endParaRPr lang="en-US" sz="1300" dirty="0"/>
+          </a:p>
+          <a:p>
+            <a:pPr marL="342900" indent="-342900">
+              <a:spcAft>
+                <a:spcPts val="600"/>
+              </a:spcAft>
+              <a:buSzPct val="100000"/>
+              <a:buChar char="•"/>
+            </a:pPr>
+            <a:r>
+              <a:rPr lang="en-US" sz="1300" dirty="0">
+                <a:solidFill>
+                  <a:srgbClr val="3D3A36"/>
+                </a:solidFill>
+                <a:latin typeface="Calibri" pitchFamily="34" charset="0"/>
+                <a:ea typeface="Calibri" pitchFamily="34" charset="-122"/>
+                <a:cs typeface="Calibri" pitchFamily="34" charset="-120"/>
+              </a:rPr>
+              <a:t>Results are valid and reliable</a:t>
+            </a:r>
+            <a:endParaRPr lang="en-US" sz="1300" dirty="0"/>
+          </a:p>
+          <a:p>
+            <a:pPr marL="342900" indent="-342900">
+              <a:spcAft>
+                <a:spcPts val="600"/>
+              </a:spcAft>
+              <a:buSzPct val="100000"/>
+              <a:buChar char="•"/>
+            </a:pPr>
+            <a:r>
+              <a:rPr lang="en-US" sz="1300" dirty="0">
+                <a:solidFill>
+                  <a:srgbClr val="3D3A36"/>
+                </a:solidFill>
+                <a:latin typeface="Calibri" pitchFamily="34" charset="0"/>
+                <a:ea typeface="Calibri" pitchFamily="34" charset="-122"/>
+                <a:cs typeface="Calibri" pitchFamily="34" charset="-120"/>
+              </a:rPr>
+              <a:t>You can draw a trustworthy conclusion</a:t>
+            </a:r>
+            <a:endParaRPr lang="en-US" sz="1300" dirty="0"/>
+          </a:p>
+        </p:txBody>
+      </p:sp>
+      <p:sp>
+        <p:nvSpPr>
+          <p:cNvPr id="10" name="Shape 8"/>
+          <p:cNvSpPr/>
+          <p:nvPr/>
+        </p:nvSpPr>
+        <p:spPr>
+          <a:xfrm>
+            <a:off x="4754880" y="1051560"/>
+            <a:ext cx="3840480" cy="3474720"/>
+          </a:xfrm>
+          <a:prstGeom prst="rect">
+            <a:avLst/>
+          </a:prstGeom>
+          <a:solidFill>
+            <a:srgbClr val="FFFFFF"/>
+          </a:solidFill>
+          <a:ln/>
+          <a:effectLst>
+            <a:outerShdw sx="100000" sy="100000" kx="0" ky="0" algn="bl" rotWithShape="0" blurRad="50800" dist="25400" dir="8100000">
+              <a:srgbClr val="000000">
+                <a:alpha val="10000"/>
+              </a:srgbClr>
+            </a:outerShdw>
+          </a:effectLst>
+        </p:spPr>
+      </p:sp>
+      <p:sp>
+        <p:nvSpPr>
+          <p:cNvPr id="11" name="Shape 9"/>
+          <p:cNvSpPr/>
+          <p:nvPr/>
+        </p:nvSpPr>
+        <p:spPr>
+          <a:xfrm>
+            <a:off x="4754880" y="1051560"/>
+            <a:ext cx="3840480" cy="54864"/>
+          </a:xfrm>
+          <a:prstGeom prst="rect">
+            <a:avLst/>
+          </a:prstGeom>
+          <a:solidFill>
+            <a:srgbClr val="E9C46A"/>
+          </a:solidFill>
+          <a:ln/>
+        </p:spPr>
+      </p:sp>
+      <p:sp>
+        <p:nvSpPr>
+          <p:cNvPr id="12" name="Text 10"/>
+          <p:cNvSpPr/>
+          <p:nvPr/>
+        </p:nvSpPr>
+        <p:spPr>
+          <a:xfrm>
+            <a:off x="4983480" y="1188720"/>
+            <a:ext cx="3383280" cy="457200"/>
           </a:xfrm>
           <a:prstGeom prst="rect">
             <a:avLst/>
@@ -2771,14 +4112,14 @@
           <a:ln/>
         </p:spPr>
         <p:txBody>
-          <a:bodyPr wrap="square" rtlCol="0" anchor="ctr"/>
+          <a:bodyPr wrap="square" lIns="0" tIns="0" rIns="0" bIns="0" rtlCol="0" anchor="ctr"/>
           <a:lstStyle/>
           <a:p>
             <a:pPr indent="0" marL="0">
               <a:buNone/>
             </a:pPr>
             <a:r>
-              <a:rPr lang="en-US" sz="2600" b="1" dirty="0">
+              <a:rPr lang="en-US" sz="1500" b="1" dirty="0">
                 <a:solidFill>
                   <a:srgbClr val="1B2A4A"/>
                 </a:solidFill>
@@ -2786,22 +4127,22 @@
                 <a:ea typeface="Georgia" pitchFamily="34" charset="-122"/>
                 <a:cs typeface="Georgia" pitchFamily="34" charset="-120"/>
               </a:rPr>
-              <a:t>Practice: Identify the Variables</a:t>
-            </a:r>
-            <a:endParaRPr lang="en-US" sz="2600" dirty="0"/>
-          </a:p>
-        </p:txBody>
-      </p:sp>
-      <p:sp>
-        <p:nvSpPr>
-          <p:cNvPr id="5" name="Text 3"/>
-          <p:cNvSpPr/>
-          <p:nvPr/>
-        </p:nvSpPr>
-        <p:spPr>
-          <a:xfrm>
-            <a:off x="457200" y="1097280"/>
-            <a:ext cx="8229600" cy="3657600"/>
+              <a:t>Unfair Test ✗</a:t>
+            </a:r>
+            <a:endParaRPr lang="en-US" sz="1500" dirty="0"/>
+          </a:p>
+        </p:txBody>
+      </p:sp>
+      <p:sp>
+        <p:nvSpPr>
+          <p:cNvPr id="13" name="Text 11"/>
+          <p:cNvSpPr/>
+          <p:nvPr/>
+        </p:nvSpPr>
+        <p:spPr>
+          <a:xfrm>
+            <a:off x="4983480" y="1691640"/>
+            <a:ext cx="3383280" cy="2651760"/>
           </a:xfrm>
           <a:prstGeom prst="rect">
             <a:avLst/>
@@ -2815,13 +4156,13 @@
           <a:p>
             <a:pPr marL="342900" indent="-342900">
               <a:spcAft>
-                <a:spcPts val="800"/>
+                <a:spcPts val="600"/>
               </a:spcAft>
               <a:buSzPct val="100000"/>
               <a:buChar char="•"/>
             </a:pPr>
             <a:r>
-              <a:rPr lang="en-US" sz="1400" dirty="0">
+              <a:rPr lang="en-US" sz="1300" dirty="0">
                 <a:solidFill>
                   <a:srgbClr val="3D3A36"/>
                 </a:solidFill>
@@ -2829,20 +4170,20 @@
                 <a:ea typeface="Calibri" pitchFamily="34" charset="-122"/>
                 <a:cs typeface="Calibri" pitchFamily="34" charset="-120"/>
               </a:rPr>
-              <a:t>'Does the temperature of water affect how fast sugar dissolves?'</a:t>
-            </a:r>
-            <a:endParaRPr lang="en-US" sz="1400" dirty="0"/>
+              <a:t>More than one variable changes</a:t>
+            </a:r>
+            <a:endParaRPr lang="en-US" sz="1300" dirty="0"/>
           </a:p>
           <a:p>
             <a:pPr marL="342900" indent="-342900">
               <a:spcAft>
-                <a:spcPts val="800"/>
+                <a:spcPts val="600"/>
               </a:spcAft>
               <a:buSzPct val="100000"/>
               <a:buChar char="•"/>
             </a:pPr>
             <a:r>
-              <a:rPr lang="en-US" sz="1400" dirty="0">
+              <a:rPr lang="en-US" sz="1300" dirty="0">
                 <a:solidFill>
                   <a:srgbClr val="3D3A36"/>
                 </a:solidFill>
@@ -2850,20 +4191,20 @@
                 <a:ea typeface="Calibri" pitchFamily="34" charset="-122"/>
                 <a:cs typeface="Calibri" pitchFamily="34" charset="-120"/>
               </a:rPr>
-              <a:t>Independent variable: temperature of water</a:t>
-            </a:r>
-            <a:endParaRPr lang="en-US" sz="1400" dirty="0"/>
+              <a:t>You cannot tell what caused the result</a:t>
+            </a:r>
+            <a:endParaRPr lang="en-US" sz="1300" dirty="0"/>
           </a:p>
           <a:p>
             <a:pPr marL="342900" indent="-342900">
               <a:spcAft>
-                <a:spcPts val="800"/>
+                <a:spcPts val="600"/>
               </a:spcAft>
               <a:buSzPct val="100000"/>
               <a:buChar char="•"/>
             </a:pPr>
             <a:r>
-              <a:rPr lang="en-US" sz="1400" dirty="0">
+              <a:rPr lang="en-US" sz="1300" dirty="0">
                 <a:solidFill>
                   <a:srgbClr val="3D3A36"/>
                 </a:solidFill>
@@ -2871,20 +4212,20 @@
                 <a:ea typeface="Calibri" pitchFamily="34" charset="-122"/>
                 <a:cs typeface="Calibri" pitchFamily="34" charset="-120"/>
               </a:rPr>
-              <a:t>Dependent variable: time for sugar to dissolve</a:t>
-            </a:r>
-            <a:endParaRPr lang="en-US" sz="1400" dirty="0"/>
+              <a:t>Results are not valid</a:t>
+            </a:r>
+            <a:endParaRPr lang="en-US" sz="1300" dirty="0"/>
           </a:p>
           <a:p>
             <a:pPr marL="342900" indent="-342900">
               <a:spcAft>
-                <a:spcPts val="800"/>
+                <a:spcPts val="600"/>
               </a:spcAft>
               <a:buSzPct val="100000"/>
               <a:buChar char="•"/>
             </a:pPr>
             <a:r>
-              <a:rPr lang="en-US" sz="1400" dirty="0">
+              <a:rPr lang="en-US" sz="1300" dirty="0">
                 <a:solidFill>
                   <a:srgbClr val="3D3A36"/>
                 </a:solidFill>
@@ -2892,93 +4233,9 @@
                 <a:ea typeface="Calibri" pitchFamily="34" charset="-122"/>
                 <a:cs typeface="Calibri" pitchFamily="34" charset="-120"/>
               </a:rPr>
-              <a:t>Controlled variables: amount of sugar, volume of water, type of sugar, stirring method</a:t>
-            </a:r>
-            <a:endParaRPr lang="en-US" sz="1400" dirty="0"/>
-          </a:p>
-          <a:p>
-            <a:pPr marL="342900" indent="-342900">
-              <a:spcAft>
-                <a:spcPts val="800"/>
-              </a:spcAft>
-              <a:buSzPct val="100000"/>
-              <a:buChar char="•"/>
-            </a:pPr>
-            <a:r>
-              <a:rPr lang="en-US" sz="1400" dirty="0">
-                <a:solidFill>
-                  <a:srgbClr val="3D3A36"/>
-                </a:solidFill>
-                <a:latin typeface="Calibri" pitchFamily="34" charset="0"/>
-                <a:ea typeface="Calibri" pitchFamily="34" charset="-122"/>
-                <a:cs typeface="Calibri" pitchFamily="34" charset="-120"/>
-              </a:rPr>
-              <a:t>'Does the colour of light affect plant growth?'</a:t>
-            </a:r>
-            <a:endParaRPr lang="en-US" sz="1400" dirty="0"/>
-          </a:p>
-          <a:p>
-            <a:pPr marL="342900" indent="-342900">
-              <a:spcAft>
-                <a:spcPts val="800"/>
-              </a:spcAft>
-              <a:buSzPct val="100000"/>
-              <a:buChar char="•"/>
-            </a:pPr>
-            <a:r>
-              <a:rPr lang="en-US" sz="1400" dirty="0">
-                <a:solidFill>
-                  <a:srgbClr val="3D3A36"/>
-                </a:solidFill>
-                <a:latin typeface="Calibri" pitchFamily="34" charset="0"/>
-                <a:ea typeface="Calibri" pitchFamily="34" charset="-122"/>
-                <a:cs typeface="Calibri" pitchFamily="34" charset="-120"/>
-              </a:rPr>
-              <a:t>Independent variable: colour of light</a:t>
-            </a:r>
-            <a:endParaRPr lang="en-US" sz="1400" dirty="0"/>
-          </a:p>
-          <a:p>
-            <a:pPr marL="342900" indent="-342900">
-              <a:spcAft>
-                <a:spcPts val="800"/>
-              </a:spcAft>
-              <a:buSzPct val="100000"/>
-              <a:buChar char="•"/>
-            </a:pPr>
-            <a:r>
-              <a:rPr lang="en-US" sz="1400" dirty="0">
-                <a:solidFill>
-                  <a:srgbClr val="3D3A36"/>
-                </a:solidFill>
-                <a:latin typeface="Calibri" pitchFamily="34" charset="0"/>
-                <a:ea typeface="Calibri" pitchFamily="34" charset="-122"/>
-                <a:cs typeface="Calibri" pitchFamily="34" charset="-120"/>
-              </a:rPr>
-              <a:t>Dependent variable: height of plant</a:t>
-            </a:r>
-            <a:endParaRPr lang="en-US" sz="1400" dirty="0"/>
-          </a:p>
-          <a:p>
-            <a:pPr marL="342900" indent="-342900">
-              <a:spcAft>
-                <a:spcPts val="800"/>
-              </a:spcAft>
-              <a:buSzPct val="100000"/>
-              <a:buChar char="•"/>
-            </a:pPr>
-            <a:r>
-              <a:rPr lang="en-US" sz="1400" dirty="0">
-                <a:solidFill>
-                  <a:srgbClr val="3D3A36"/>
-                </a:solidFill>
-                <a:latin typeface="Calibri" pitchFamily="34" charset="0"/>
-                <a:ea typeface="Calibri" pitchFamily="34" charset="-122"/>
-                <a:cs typeface="Calibri" pitchFamily="34" charset="-120"/>
-              </a:rPr>
-              <a:t>Controlled variables: same plant type, same water, same soil, same duration</a:t>
-            </a:r>
-            <a:endParaRPr lang="en-US" sz="1400" dirty="0"/>
+              <a:t>Your conclusion may be wrong</a:t>
+            </a:r>
+            <a:endParaRPr lang="en-US" sz="1300" dirty="0"/>
           </a:p>
         </p:txBody>
       </p:sp>
@@ -2996,7 +4253,7 @@
     <p:bg>
       <p:bgPr>
         <a:solidFill>
-          <a:srgbClr val="1B2A4A"/>
+          <a:srgbClr val="FAF8F5"/>
         </a:solidFill>
       </p:bgPr>
     </p:bg>
@@ -3023,27 +4280,67 @@
         <p:spPr>
           <a:xfrm>
             <a:off x="0" y="0"/>
-            <a:ext cx="109728" cy="5143500"/>
-          </a:xfrm>
-          <a:prstGeom prst="rect">
-            <a:avLst/>
-          </a:prstGeom>
-          <a:solidFill>
-            <a:srgbClr val="E9C46A"/>
-          </a:solidFill>
-          <a:ln/>
-        </p:spPr>
-      </p:sp>
-      <p:sp>
-        <p:nvSpPr>
-          <p:cNvPr id="3" name="Text 1"/>
-          <p:cNvSpPr/>
-          <p:nvPr/>
-        </p:nvSpPr>
-        <p:spPr>
-          <a:xfrm>
-            <a:off x="731520" y="457200"/>
-            <a:ext cx="7772400" cy="731520"/>
+            <a:ext cx="9144000" cy="822960"/>
+          </a:xfrm>
+          <a:prstGeom prst="rect">
+            <a:avLst/>
+          </a:prstGeom>
+          <a:solidFill>
+            <a:srgbClr val="FFFFFF"/>
+          </a:solidFill>
+          <a:ln/>
+        </p:spPr>
+      </p:sp>
+      <p:sp>
+        <p:nvSpPr>
+          <p:cNvPr id="3" name="Shape 1"/>
+          <p:cNvSpPr/>
+          <p:nvPr/>
+        </p:nvSpPr>
+        <p:spPr>
+          <a:xfrm>
+            <a:off x="0" y="804672"/>
+            <a:ext cx="9144000" cy="27432"/>
+          </a:xfrm>
+          <a:prstGeom prst="rect">
+            <a:avLst/>
+          </a:prstGeom>
+          <a:solidFill>
+            <a:srgbClr val="E5E2DC"/>
+          </a:solidFill>
+          <a:ln/>
+        </p:spPr>
+      </p:sp>
+      <p:sp>
+        <p:nvSpPr>
+          <p:cNvPr id="4" name="Shape 2"/>
+          <p:cNvSpPr/>
+          <p:nvPr/>
+        </p:nvSpPr>
+        <p:spPr>
+          <a:xfrm>
+            <a:off x="548640" y="201168"/>
+            <a:ext cx="54864" cy="420624"/>
+          </a:xfrm>
+          <a:prstGeom prst="rect">
+            <a:avLst/>
+          </a:prstGeom>
+          <a:solidFill>
+            <a:srgbClr val="2A9D8F"/>
+          </a:solidFill>
+          <a:ln/>
+        </p:spPr>
+      </p:sp>
+      <p:sp>
+        <p:nvSpPr>
+          <p:cNvPr id="5" name="Text 3"/>
+          <p:cNvSpPr/>
+          <p:nvPr/>
+        </p:nvSpPr>
+        <p:spPr>
+          <a:xfrm>
+            <a:off x="777240" y="137160"/>
+            <a:ext cx="7772400" cy="548640"/>
           </a:xfrm>
           <a:prstGeom prst="rect">
             <a:avLst/>
@@ -3052,37 +4349,37 @@
           <a:ln/>
         </p:spPr>
         <p:txBody>
-          <a:bodyPr wrap="square" rtlCol="0" anchor="ctr"/>
+          <a:bodyPr wrap="square" lIns="0" tIns="0" rIns="0" bIns="0" rtlCol="0" anchor="ctr"/>
           <a:lstStyle/>
           <a:p>
             <a:pPr indent="0" marL="0">
               <a:buNone/>
             </a:pPr>
             <a:r>
-              <a:rPr lang="en-US" sz="3200" b="1" dirty="0">
-                <a:solidFill>
-                  <a:srgbClr val="FFFFFF"/>
+              <a:rPr lang="en-US" sz="2000" b="1" dirty="0">
+                <a:solidFill>
+                  <a:srgbClr val="1B2A4A"/>
                 </a:solidFill>
                 <a:latin typeface="Georgia" pitchFamily="34" charset="0"/>
                 <a:ea typeface="Georgia" pitchFamily="34" charset="-122"/>
                 <a:cs typeface="Georgia" pitchFamily="34" charset="-120"/>
               </a:rPr>
-              <a:t>Key Takeaways</a:t>
-            </a:r>
-            <a:endParaRPr lang="en-US" sz="3200" dirty="0"/>
-          </a:p>
-        </p:txBody>
-      </p:sp>
-      <p:sp>
-        <p:nvSpPr>
-          <p:cNvPr id="4" name="Text 2"/>
-          <p:cNvSpPr/>
-          <p:nvPr/>
-        </p:nvSpPr>
-        <p:spPr>
-          <a:xfrm>
-            <a:off x="731520" y="1463040"/>
-            <a:ext cx="7772400" cy="3200400"/>
+              <a:t>Spotting Variables in Real Experiments</a:t>
+            </a:r>
+            <a:endParaRPr lang="en-US" sz="2000" dirty="0"/>
+          </a:p>
+        </p:txBody>
+      </p:sp>
+      <p:sp>
+        <p:nvSpPr>
+          <p:cNvPr id="6" name="Text 4"/>
+          <p:cNvSpPr/>
+          <p:nvPr/>
+        </p:nvSpPr>
+        <p:spPr>
+          <a:xfrm>
+            <a:off x="731520" y="1051560"/>
+            <a:ext cx="7680960" cy="3108960"/>
           </a:xfrm>
           <a:prstGeom prst="rect">
             <a:avLst/>
@@ -3096,7 +4393,7 @@
           <a:p>
             <a:pPr marL="342900" indent="-342900">
               <a:spcAft>
-                <a:spcPts val="1000"/>
+                <a:spcPts val="800"/>
               </a:spcAft>
               <a:buSzPct val="100000"/>
               <a:buChar char="•"/>
@@ -3104,20 +4401,20 @@
             <a:r>
               <a:rPr lang="en-US" sz="1500" dirty="0">
                 <a:solidFill>
-                  <a:srgbClr val="CADCFC"/>
+                  <a:srgbClr val="3D3A36"/>
                 </a:solidFill>
                 <a:latin typeface="Calibri" pitchFamily="34" charset="0"/>
                 <a:ea typeface="Calibri" pitchFamily="34" charset="-122"/>
                 <a:cs typeface="Calibri" pitchFamily="34" charset="-120"/>
               </a:rPr>
-              <a:t>Independent variable = what you change</a:t>
+              <a:t>Read the question carefully — what is being investigated?</a:t>
             </a:r>
             <a:endParaRPr lang="en-US" sz="1500" dirty="0"/>
           </a:p>
           <a:p>
             <a:pPr marL="342900" indent="-342900">
               <a:spcAft>
-                <a:spcPts val="1000"/>
+                <a:spcPts val="800"/>
               </a:spcAft>
               <a:buSzPct val="100000"/>
               <a:buChar char="•"/>
@@ -3125,20 +4422,20 @@
             <a:r>
               <a:rPr lang="en-US" sz="1500" dirty="0">
                 <a:solidFill>
-                  <a:srgbClr val="CADCFC"/>
+                  <a:srgbClr val="3D3A36"/>
                 </a:solidFill>
                 <a:latin typeface="Calibri" pitchFamily="34" charset="0"/>
                 <a:ea typeface="Calibri" pitchFamily="34" charset="-122"/>
                 <a:cs typeface="Calibri" pitchFamily="34" charset="-120"/>
               </a:rPr>
-              <a:t>Dependent variable = what you measure</a:t>
+              <a:t>Ask: What is the scientist CHANGING? → That is the IV.</a:t>
             </a:r>
             <a:endParaRPr lang="en-US" sz="1500" dirty="0"/>
           </a:p>
           <a:p>
             <a:pPr marL="342900" indent="-342900">
               <a:spcAft>
-                <a:spcPts val="1000"/>
+                <a:spcPts val="800"/>
               </a:spcAft>
               <a:buSzPct val="100000"/>
               <a:buChar char="•"/>
@@ -3146,20 +4443,20 @@
             <a:r>
               <a:rPr lang="en-US" sz="1500" dirty="0">
                 <a:solidFill>
-                  <a:srgbClr val="CADCFC"/>
+                  <a:srgbClr val="3D3A36"/>
                 </a:solidFill>
                 <a:latin typeface="Calibri" pitchFamily="34" charset="0"/>
                 <a:ea typeface="Calibri" pitchFamily="34" charset="-122"/>
                 <a:cs typeface="Calibri" pitchFamily="34" charset="-120"/>
               </a:rPr>
-              <a:t>Controlled variables = what you keep the same</a:t>
+              <a:t>Ask: What is the scientist MEASURING? → That is the DV.</a:t>
             </a:r>
             <a:endParaRPr lang="en-US" sz="1500" dirty="0"/>
           </a:p>
           <a:p>
             <a:pPr marL="342900" indent="-342900">
               <a:spcAft>
-                <a:spcPts val="1000"/>
+                <a:spcPts val="800"/>
               </a:spcAft>
               <a:buSzPct val="100000"/>
               <a:buChar char="•"/>
@@ -3167,20 +4464,20 @@
             <a:r>
               <a:rPr lang="en-US" sz="1500" dirty="0">
                 <a:solidFill>
-                  <a:srgbClr val="CADCFC"/>
+                  <a:srgbClr val="3D3A36"/>
                 </a:solidFill>
                 <a:latin typeface="Calibri" pitchFamily="34" charset="0"/>
                 <a:ea typeface="Calibri" pitchFamily="34" charset="-122"/>
                 <a:cs typeface="Calibri" pitchFamily="34" charset="-120"/>
               </a:rPr>
-              <a:t>A fair test changes ONLY ONE variable</a:t>
+              <a:t>Ask: What is being KEPT THE SAME? → Those are the CVs.</a:t>
             </a:r>
             <a:endParaRPr lang="en-US" sz="1500" dirty="0"/>
           </a:p>
           <a:p>
             <a:pPr marL="342900" indent="-342900">
               <a:spcAft>
-                <a:spcPts val="1000"/>
+                <a:spcPts val="800"/>
               </a:spcAft>
               <a:buSzPct val="100000"/>
               <a:buChar char="•"/>
@@ -3188,13 +4485,13 @@
             <a:r>
               <a:rPr lang="en-US" sz="1500" dirty="0">
                 <a:solidFill>
-                  <a:srgbClr val="CADCFC"/>
+                  <a:srgbClr val="3D3A36"/>
                 </a:solidFill>
                 <a:latin typeface="Calibri" pitchFamily="34" charset="0"/>
                 <a:ea typeface="Calibri" pitchFamily="34" charset="-122"/>
                 <a:cs typeface="Calibri" pitchFamily="34" charset="-120"/>
               </a:rPr>
-              <a:t>Always repeat experiments for reliability</a:t>
+              <a:t>Practice this skill — it appears in every MYP science assessment.</a:t>
             </a:r>
             <a:endParaRPr lang="en-US" sz="1500" dirty="0"/>
           </a:p>
@@ -3202,14 +4499,41 @@
       </p:sp>
       <p:sp>
         <p:nvSpPr>
-          <p:cNvPr id="5" name="Text 3"/>
-          <p:cNvSpPr/>
-          <p:nvPr/>
-        </p:nvSpPr>
-        <p:spPr>
-          <a:xfrm>
-            <a:off x="731520" y="4572000"/>
-            <a:ext cx="7772400" cy="365760"/>
+          <p:cNvPr id="7" name="Shape 5"/>
+          <p:cNvSpPr/>
+          <p:nvPr/>
+        </p:nvSpPr>
+        <p:spPr>
+          <a:xfrm>
+            <a:off x="731520" y="4206240"/>
+            <a:ext cx="7680960" cy="640080"/>
+          </a:xfrm>
+          <a:prstGeom prst="rect">
+            <a:avLst/>
+          </a:prstGeom>
+          <a:solidFill>
+            <a:srgbClr val="E8F5F3"/>
+          </a:solidFill>
+          <a:ln/>
+          <a:effectLst>
+            <a:outerShdw sx="100000" sy="100000" kx="0" ky="0" algn="bl" rotWithShape="0" blurRad="50800" dist="25400" dir="8100000">
+              <a:srgbClr val="000000">
+                <a:alpha val="10000"/>
+              </a:srgbClr>
+            </a:outerShdw>
+          </a:effectLst>
+        </p:spPr>
+      </p:sp>
+      <p:sp>
+        <p:nvSpPr>
+          <p:cNvPr id="8" name="Text 6"/>
+          <p:cNvSpPr/>
+          <p:nvPr/>
+        </p:nvSpPr>
+        <p:spPr>
+          <a:xfrm>
+            <a:off x="914400" y="4251960"/>
+            <a:ext cx="7315200" cy="548640"/>
           </a:xfrm>
           <a:prstGeom prst="rect">
             <a:avLst/>
@@ -3225,17 +4549,1484 @@
               <a:buNone/>
             </a:pPr>
             <a:r>
-              <a:rPr lang="en-US" sz="1100" dirty="0">
-                <a:solidFill>
-                  <a:srgbClr val="E9C46A"/>
+              <a:rPr lang="en-US" sz="1200" b="1" dirty="0">
+                <a:solidFill>
+                  <a:srgbClr val="2A9D8F"/>
                 </a:solidFill>
                 <a:latin typeface="Calibri" pitchFamily="34" charset="0"/>
                 <a:ea typeface="Calibri" pitchFamily="34" charset="-122"/>
                 <a:cs typeface="Calibri" pitchFamily="34" charset="-120"/>
               </a:rPr>
+              <a:t>Key Idea: </a:t>
+            </a:r>
+            <a:pPr indent="0" marL="0">
+              <a:buNone/>
+            </a:pPr>
+            <a:r>
+              <a:rPr lang="en-US" sz="1200" i="1" dirty="0">
+                <a:solidFill>
+                  <a:srgbClr val="3D3A36"/>
+                </a:solidFill>
+                <a:latin typeface="Calibri" pitchFamily="34" charset="0"/>
+                <a:ea typeface="Calibri" pitchFamily="34" charset="-122"/>
+                <a:cs typeface="Calibri" pitchFamily="34" charset="-120"/>
+              </a:rPr>
+              <a:t>A trick: the independent variable often comes after the word 'affect' in the question.</a:t>
+            </a:r>
+            <a:endParaRPr lang="en-US" sz="1200" dirty="0"/>
+          </a:p>
+        </p:txBody>
+      </p:sp>
+    </p:spTree>
+  </p:cSld>
+  <p:clrMapOvr>
+    <a:masterClrMapping/>
+  </p:clrMapOvr>
+</p:sld>
+</file>
+
+<file path=ppt/slides/slide7.xml><?xml version="1.0" encoding="utf-8"?>
+<p:sld xmlns:a="http://schemas.openxmlformats.org/drawingml/2006/main" xmlns:r="http://schemas.openxmlformats.org/officeDocument/2006/relationships" xmlns:p="http://schemas.openxmlformats.org/presentationml/2006/main">
+  <p:cSld name="Slide 7">
+    <p:bg>
+      <p:bgPr>
+        <a:solidFill>
+          <a:srgbClr val="FAF8F5"/>
+        </a:solidFill>
+      </p:bgPr>
+    </p:bg>
+    <p:spTree>
+      <p:nvGrpSpPr>
+        <p:cNvPr id="1" name=""/>
+        <p:cNvGrpSpPr/>
+        <p:nvPr/>
+      </p:nvGrpSpPr>
+      <p:grpSpPr>
+        <a:xfrm>
+          <a:off x="0" y="0"/>
+          <a:ext cx="0" cy="0"/>
+          <a:chOff x="0" y="0"/>
+          <a:chExt cx="0" cy="0"/>
+        </a:xfrm>
+      </p:grpSpPr>
+      <p:sp>
+        <p:nvSpPr>
+          <p:cNvPr id="2" name="Shape 0"/>
+          <p:cNvSpPr/>
+          <p:nvPr/>
+        </p:nvSpPr>
+        <p:spPr>
+          <a:xfrm>
+            <a:off x="0" y="0"/>
+            <a:ext cx="9144000" cy="822960"/>
+          </a:xfrm>
+          <a:prstGeom prst="rect">
+            <a:avLst/>
+          </a:prstGeom>
+          <a:solidFill>
+            <a:srgbClr val="FFFFFF"/>
+          </a:solidFill>
+          <a:ln/>
+        </p:spPr>
+      </p:sp>
+      <p:sp>
+        <p:nvSpPr>
+          <p:cNvPr id="3" name="Shape 1"/>
+          <p:cNvSpPr/>
+          <p:nvPr/>
+        </p:nvSpPr>
+        <p:spPr>
+          <a:xfrm>
+            <a:off x="0" y="804672"/>
+            <a:ext cx="9144000" cy="27432"/>
+          </a:xfrm>
+          <a:prstGeom prst="rect">
+            <a:avLst/>
+          </a:prstGeom>
+          <a:solidFill>
+            <a:srgbClr val="E5E2DC"/>
+          </a:solidFill>
+          <a:ln/>
+        </p:spPr>
+      </p:sp>
+      <p:sp>
+        <p:nvSpPr>
+          <p:cNvPr id="4" name="Shape 2"/>
+          <p:cNvSpPr/>
+          <p:nvPr/>
+        </p:nvSpPr>
+        <p:spPr>
+          <a:xfrm>
+            <a:off x="548640" y="201168"/>
+            <a:ext cx="54864" cy="420624"/>
+          </a:xfrm>
+          <a:prstGeom prst="rect">
+            <a:avLst/>
+          </a:prstGeom>
+          <a:solidFill>
+            <a:srgbClr val="2A9D8F"/>
+          </a:solidFill>
+          <a:ln/>
+        </p:spPr>
+      </p:sp>
+      <p:sp>
+        <p:nvSpPr>
+          <p:cNvPr id="5" name="Text 3"/>
+          <p:cNvSpPr/>
+          <p:nvPr/>
+        </p:nvSpPr>
+        <p:spPr>
+          <a:xfrm>
+            <a:off x="777240" y="137160"/>
+            <a:ext cx="7772400" cy="548640"/>
+          </a:xfrm>
+          <a:prstGeom prst="rect">
+            <a:avLst/>
+          </a:prstGeom>
+          <a:noFill/>
+          <a:ln/>
+        </p:spPr>
+        <p:txBody>
+          <a:bodyPr wrap="square" lIns="0" tIns="0" rIns="0" bIns="0" rtlCol="0" anchor="ctr"/>
+          <a:lstStyle/>
+          <a:p>
+            <a:pPr indent="0" marL="0">
+              <a:buNone/>
+            </a:pPr>
+            <a:r>
+              <a:rPr lang="en-US" sz="2000" b="1" dirty="0">
+                <a:solidFill>
+                  <a:srgbClr val="1B2A4A"/>
+                </a:solidFill>
+                <a:latin typeface="Georgia" pitchFamily="34" charset="0"/>
+                <a:ea typeface="Georgia" pitchFamily="34" charset="-122"/>
+                <a:cs typeface="Georgia" pitchFamily="34" charset="-120"/>
+              </a:rPr>
+              <a:t>Variables at a Glance</a:t>
+            </a:r>
+            <a:endParaRPr lang="en-US" sz="2000" dirty="0"/>
+          </a:p>
+        </p:txBody>
+      </p:sp>
+      <p:sp>
+        <p:nvSpPr>
+          <p:cNvPr id="6" name="Shape 4"/>
+          <p:cNvSpPr/>
+          <p:nvPr/>
+        </p:nvSpPr>
+        <p:spPr>
+          <a:xfrm>
+            <a:off x="731520" y="1280160"/>
+            <a:ext cx="2377440" cy="2377440"/>
+          </a:xfrm>
+          <a:prstGeom prst="rect">
+            <a:avLst/>
+          </a:prstGeom>
+          <a:solidFill>
+            <a:srgbClr val="FFFFFF"/>
+          </a:solidFill>
+          <a:ln/>
+          <a:effectLst>
+            <a:outerShdw sx="100000" sy="100000" kx="0" ky="0" algn="bl" rotWithShape="0" blurRad="50800" dist="25400" dir="8100000">
+              <a:srgbClr val="000000">
+                <a:alpha val="10000"/>
+              </a:srgbClr>
+            </a:outerShdw>
+          </a:effectLst>
+        </p:spPr>
+      </p:sp>
+      <p:sp>
+        <p:nvSpPr>
+          <p:cNvPr id="7" name="Text 5"/>
+          <p:cNvSpPr/>
+          <p:nvPr/>
+        </p:nvSpPr>
+        <p:spPr>
+          <a:xfrm>
+            <a:off x="731520" y="1463040"/>
+            <a:ext cx="2377440" cy="914400"/>
+          </a:xfrm>
+          <a:prstGeom prst="rect">
+            <a:avLst/>
+          </a:prstGeom>
+          <a:noFill/>
+          <a:ln/>
+        </p:spPr>
+        <p:txBody>
+          <a:bodyPr wrap="square" rtlCol="0" anchor="ctr"/>
+          <a:lstStyle/>
+          <a:p>
+            <a:pPr algn="ctr" indent="0" marL="0">
+              <a:buNone/>
+            </a:pPr>
+            <a:r>
+              <a:rPr lang="en-US" sz="3600" b="1" dirty="0">
+                <a:solidFill>
+                  <a:srgbClr val="2A9D8F"/>
+                </a:solidFill>
+                <a:latin typeface="Georgia" pitchFamily="34" charset="0"/>
+                <a:ea typeface="Georgia" pitchFamily="34" charset="-122"/>
+                <a:cs typeface="Georgia" pitchFamily="34" charset="-120"/>
+              </a:rPr>
+              <a:t>1</a:t>
+            </a:r>
+            <a:endParaRPr lang="en-US" sz="3600" dirty="0"/>
+          </a:p>
+        </p:txBody>
+      </p:sp>
+      <p:sp>
+        <p:nvSpPr>
+          <p:cNvPr id="8" name="Text 6"/>
+          <p:cNvSpPr/>
+          <p:nvPr/>
+        </p:nvSpPr>
+        <p:spPr>
+          <a:xfrm>
+            <a:off x="731520" y="2423160"/>
+            <a:ext cx="2377440" cy="365760"/>
+          </a:xfrm>
+          <a:prstGeom prst="rect">
+            <a:avLst/>
+          </a:prstGeom>
+          <a:noFill/>
+          <a:ln/>
+        </p:spPr>
+        <p:txBody>
+          <a:bodyPr wrap="square" rtlCol="0" anchor="ctr"/>
+          <a:lstStyle/>
+          <a:p>
+            <a:pPr algn="ctr" indent="0" marL="0">
+              <a:buNone/>
+            </a:pPr>
+            <a:r>
+              <a:rPr lang="en-US" sz="1200" b="1" dirty="0">
+                <a:solidFill>
+                  <a:srgbClr val="6B6660"/>
+                </a:solidFill>
+                <a:latin typeface="Calibri" pitchFamily="34" charset="0"/>
+                <a:ea typeface="Calibri" pitchFamily="34" charset="-122"/>
+                <a:cs typeface="Calibri" pitchFamily="34" charset="-120"/>
+              </a:rPr>
+              <a:t>INDEPENDENT</a:t>
+            </a:r>
+            <a:endParaRPr lang="en-US" sz="1200" dirty="0"/>
+          </a:p>
+        </p:txBody>
+      </p:sp>
+      <p:sp>
+        <p:nvSpPr>
+          <p:cNvPr id="9" name="Text 7"/>
+          <p:cNvSpPr/>
+          <p:nvPr/>
+        </p:nvSpPr>
+        <p:spPr>
+          <a:xfrm>
+            <a:off x="822960" y="2834640"/>
+            <a:ext cx="2194560" cy="640080"/>
+          </a:xfrm>
+          <a:prstGeom prst="rect">
+            <a:avLst/>
+          </a:prstGeom>
+          <a:noFill/>
+          <a:ln/>
+        </p:spPr>
+        <p:txBody>
+          <a:bodyPr wrap="square" rtlCol="0" anchor="ctr"/>
+          <a:lstStyle/>
+          <a:p>
+            <a:pPr algn="ctr" indent="0" marL="0">
+              <a:buNone/>
+            </a:pPr>
+            <a:r>
+              <a:rPr lang="en-US" sz="1000" dirty="0">
+                <a:solidFill>
+                  <a:srgbClr val="9B9690"/>
+                </a:solidFill>
+                <a:latin typeface="Calibri" pitchFamily="34" charset="0"/>
+                <a:ea typeface="Calibri" pitchFamily="34" charset="-122"/>
+                <a:cs typeface="Calibri" pitchFamily="34" charset="-120"/>
+              </a:rPr>
+              <a:t>You change ONE thing</a:t>
+            </a:r>
+            <a:endParaRPr lang="en-US" sz="1000" dirty="0"/>
+          </a:p>
+        </p:txBody>
+      </p:sp>
+      <p:sp>
+        <p:nvSpPr>
+          <p:cNvPr id="10" name="Shape 8"/>
+          <p:cNvSpPr/>
+          <p:nvPr/>
+        </p:nvSpPr>
+        <p:spPr>
+          <a:xfrm>
+            <a:off x="3383280" y="1280160"/>
+            <a:ext cx="2377440" cy="2377440"/>
+          </a:xfrm>
+          <a:prstGeom prst="rect">
+            <a:avLst/>
+          </a:prstGeom>
+          <a:solidFill>
+            <a:srgbClr val="FFFFFF"/>
+          </a:solidFill>
+          <a:ln/>
+          <a:effectLst>
+            <a:outerShdw sx="100000" sy="100000" kx="0" ky="0" algn="bl" rotWithShape="0" blurRad="50800" dist="25400" dir="8100000">
+              <a:srgbClr val="000000">
+                <a:alpha val="10000"/>
+              </a:srgbClr>
+            </a:outerShdw>
+          </a:effectLst>
+        </p:spPr>
+      </p:sp>
+      <p:sp>
+        <p:nvSpPr>
+          <p:cNvPr id="11" name="Text 9"/>
+          <p:cNvSpPr/>
+          <p:nvPr/>
+        </p:nvSpPr>
+        <p:spPr>
+          <a:xfrm>
+            <a:off x="3383280" y="1463040"/>
+            <a:ext cx="2377440" cy="914400"/>
+          </a:xfrm>
+          <a:prstGeom prst="rect">
+            <a:avLst/>
+          </a:prstGeom>
+          <a:noFill/>
+          <a:ln/>
+        </p:spPr>
+        <p:txBody>
+          <a:bodyPr wrap="square" rtlCol="0" anchor="ctr"/>
+          <a:lstStyle/>
+          <a:p>
+            <a:pPr algn="ctr" indent="0" marL="0">
+              <a:buNone/>
+            </a:pPr>
+            <a:r>
+              <a:rPr lang="en-US" sz="3600" b="1" dirty="0">
+                <a:solidFill>
+                  <a:srgbClr val="2A9D8F"/>
+                </a:solidFill>
+                <a:latin typeface="Georgia" pitchFamily="34" charset="0"/>
+                <a:ea typeface="Georgia" pitchFamily="34" charset="-122"/>
+                <a:cs typeface="Georgia" pitchFamily="34" charset="-120"/>
+              </a:rPr>
+              <a:t>1</a:t>
+            </a:r>
+            <a:endParaRPr lang="en-US" sz="3600" dirty="0"/>
+          </a:p>
+        </p:txBody>
+      </p:sp>
+      <p:sp>
+        <p:nvSpPr>
+          <p:cNvPr id="12" name="Text 10"/>
+          <p:cNvSpPr/>
+          <p:nvPr/>
+        </p:nvSpPr>
+        <p:spPr>
+          <a:xfrm>
+            <a:off x="3383280" y="2423160"/>
+            <a:ext cx="2377440" cy="365760"/>
+          </a:xfrm>
+          <a:prstGeom prst="rect">
+            <a:avLst/>
+          </a:prstGeom>
+          <a:noFill/>
+          <a:ln/>
+        </p:spPr>
+        <p:txBody>
+          <a:bodyPr wrap="square" rtlCol="0" anchor="ctr"/>
+          <a:lstStyle/>
+          <a:p>
+            <a:pPr algn="ctr" indent="0" marL="0">
+              <a:buNone/>
+            </a:pPr>
+            <a:r>
+              <a:rPr lang="en-US" sz="1200" b="1" dirty="0">
+                <a:solidFill>
+                  <a:srgbClr val="6B6660"/>
+                </a:solidFill>
+                <a:latin typeface="Calibri" pitchFamily="34" charset="0"/>
+                <a:ea typeface="Calibri" pitchFamily="34" charset="-122"/>
+                <a:cs typeface="Calibri" pitchFamily="34" charset="-120"/>
+              </a:rPr>
+              <a:t>DEPENDENT</a:t>
+            </a:r>
+            <a:endParaRPr lang="en-US" sz="1200" dirty="0"/>
+          </a:p>
+        </p:txBody>
+      </p:sp>
+      <p:sp>
+        <p:nvSpPr>
+          <p:cNvPr id="13" name="Text 11"/>
+          <p:cNvSpPr/>
+          <p:nvPr/>
+        </p:nvSpPr>
+        <p:spPr>
+          <a:xfrm>
+            <a:off x="3474720" y="2834640"/>
+            <a:ext cx="2194560" cy="640080"/>
+          </a:xfrm>
+          <a:prstGeom prst="rect">
+            <a:avLst/>
+          </a:prstGeom>
+          <a:noFill/>
+          <a:ln/>
+        </p:spPr>
+        <p:txBody>
+          <a:bodyPr wrap="square" rtlCol="0" anchor="ctr"/>
+          <a:lstStyle/>
+          <a:p>
+            <a:pPr algn="ctr" indent="0" marL="0">
+              <a:buNone/>
+            </a:pPr>
+            <a:r>
+              <a:rPr lang="en-US" sz="1000" dirty="0">
+                <a:solidFill>
+                  <a:srgbClr val="9B9690"/>
+                </a:solidFill>
+                <a:latin typeface="Calibri" pitchFamily="34" charset="0"/>
+                <a:ea typeface="Calibri" pitchFamily="34" charset="-122"/>
+                <a:cs typeface="Calibri" pitchFamily="34" charset="-120"/>
+              </a:rPr>
+              <a:t>You measure ONE thing</a:t>
+            </a:r>
+            <a:endParaRPr lang="en-US" sz="1000" dirty="0"/>
+          </a:p>
+        </p:txBody>
+      </p:sp>
+      <p:sp>
+        <p:nvSpPr>
+          <p:cNvPr id="14" name="Shape 12"/>
+          <p:cNvSpPr/>
+          <p:nvPr/>
+        </p:nvSpPr>
+        <p:spPr>
+          <a:xfrm>
+            <a:off x="6035040" y="1280160"/>
+            <a:ext cx="2377440" cy="2377440"/>
+          </a:xfrm>
+          <a:prstGeom prst="rect">
+            <a:avLst/>
+          </a:prstGeom>
+          <a:solidFill>
+            <a:srgbClr val="FFFFFF"/>
+          </a:solidFill>
+          <a:ln/>
+          <a:effectLst>
+            <a:outerShdw sx="100000" sy="100000" kx="0" ky="0" algn="bl" rotWithShape="0" blurRad="50800" dist="25400" dir="8100000">
+              <a:srgbClr val="000000">
+                <a:alpha val="10000"/>
+              </a:srgbClr>
+            </a:outerShdw>
+          </a:effectLst>
+        </p:spPr>
+      </p:sp>
+      <p:sp>
+        <p:nvSpPr>
+          <p:cNvPr id="15" name="Text 13"/>
+          <p:cNvSpPr/>
+          <p:nvPr/>
+        </p:nvSpPr>
+        <p:spPr>
+          <a:xfrm>
+            <a:off x="6035040" y="1463040"/>
+            <a:ext cx="2377440" cy="914400"/>
+          </a:xfrm>
+          <a:prstGeom prst="rect">
+            <a:avLst/>
+          </a:prstGeom>
+          <a:noFill/>
+          <a:ln/>
+        </p:spPr>
+        <p:txBody>
+          <a:bodyPr wrap="square" rtlCol="0" anchor="ctr"/>
+          <a:lstStyle/>
+          <a:p>
+            <a:pPr algn="ctr" indent="0" marL="0">
+              <a:buNone/>
+            </a:pPr>
+            <a:r>
+              <a:rPr lang="en-US" sz="3600" b="1" dirty="0">
+                <a:solidFill>
+                  <a:srgbClr val="2A9D8F"/>
+                </a:solidFill>
+                <a:latin typeface="Georgia" pitchFamily="34" charset="0"/>
+                <a:ea typeface="Georgia" pitchFamily="34" charset="-122"/>
+                <a:cs typeface="Georgia" pitchFamily="34" charset="-120"/>
+              </a:rPr>
+              <a:t>3+</a:t>
+            </a:r>
+            <a:endParaRPr lang="en-US" sz="3600" dirty="0"/>
+          </a:p>
+        </p:txBody>
+      </p:sp>
+      <p:sp>
+        <p:nvSpPr>
+          <p:cNvPr id="16" name="Text 14"/>
+          <p:cNvSpPr/>
+          <p:nvPr/>
+        </p:nvSpPr>
+        <p:spPr>
+          <a:xfrm>
+            <a:off x="6035040" y="2423160"/>
+            <a:ext cx="2377440" cy="365760"/>
+          </a:xfrm>
+          <a:prstGeom prst="rect">
+            <a:avLst/>
+          </a:prstGeom>
+          <a:noFill/>
+          <a:ln/>
+        </p:spPr>
+        <p:txBody>
+          <a:bodyPr wrap="square" rtlCol="0" anchor="ctr"/>
+          <a:lstStyle/>
+          <a:p>
+            <a:pPr algn="ctr" indent="0" marL="0">
+              <a:buNone/>
+            </a:pPr>
+            <a:r>
+              <a:rPr lang="en-US" sz="1200" b="1" dirty="0">
+                <a:solidFill>
+                  <a:srgbClr val="6B6660"/>
+                </a:solidFill>
+                <a:latin typeface="Calibri" pitchFamily="34" charset="0"/>
+                <a:ea typeface="Calibri" pitchFamily="34" charset="-122"/>
+                <a:cs typeface="Calibri" pitchFamily="34" charset="-120"/>
+              </a:rPr>
+              <a:t>CONTROLLED</a:t>
+            </a:r>
+            <a:endParaRPr lang="en-US" sz="1200" dirty="0"/>
+          </a:p>
+        </p:txBody>
+      </p:sp>
+      <p:sp>
+        <p:nvSpPr>
+          <p:cNvPr id="17" name="Text 15"/>
+          <p:cNvSpPr/>
+          <p:nvPr/>
+        </p:nvSpPr>
+        <p:spPr>
+          <a:xfrm>
+            <a:off x="6126480" y="2834640"/>
+            <a:ext cx="2194560" cy="640080"/>
+          </a:xfrm>
+          <a:prstGeom prst="rect">
+            <a:avLst/>
+          </a:prstGeom>
+          <a:noFill/>
+          <a:ln/>
+        </p:spPr>
+        <p:txBody>
+          <a:bodyPr wrap="square" rtlCol="0" anchor="ctr"/>
+          <a:lstStyle/>
+          <a:p>
+            <a:pPr algn="ctr" indent="0" marL="0">
+              <a:buNone/>
+            </a:pPr>
+            <a:r>
+              <a:rPr lang="en-US" sz="1000" dirty="0">
+                <a:solidFill>
+                  <a:srgbClr val="9B9690"/>
+                </a:solidFill>
+                <a:latin typeface="Calibri" pitchFamily="34" charset="0"/>
+                <a:ea typeface="Calibri" pitchFamily="34" charset="-122"/>
+                <a:cs typeface="Calibri" pitchFamily="34" charset="-120"/>
+              </a:rPr>
+              <a:t>You keep MANY things the same</a:t>
+            </a:r>
+            <a:endParaRPr lang="en-US" sz="1000" dirty="0"/>
+          </a:p>
+        </p:txBody>
+      </p:sp>
+    </p:spTree>
+  </p:cSld>
+  <p:clrMapOvr>
+    <a:masterClrMapping/>
+  </p:clrMapOvr>
+</p:sld>
+</file>
+
+<file path=ppt/slides/slide8.xml><?xml version="1.0" encoding="utf-8"?>
+<p:sld xmlns:a="http://schemas.openxmlformats.org/drawingml/2006/main" xmlns:r="http://schemas.openxmlformats.org/officeDocument/2006/relationships" xmlns:p="http://schemas.openxmlformats.org/presentationml/2006/main">
+  <p:cSld name="Slide 8">
+    <p:bg>
+      <p:bgPr>
+        <a:solidFill>
+          <a:srgbClr val="FAF8F5"/>
+        </a:solidFill>
+      </p:bgPr>
+    </p:bg>
+    <p:spTree>
+      <p:nvGrpSpPr>
+        <p:cNvPr id="1" name=""/>
+        <p:cNvGrpSpPr/>
+        <p:nvPr/>
+      </p:nvGrpSpPr>
+      <p:grpSpPr>
+        <a:xfrm>
+          <a:off x="0" y="0"/>
+          <a:ext cx="0" cy="0"/>
+          <a:chOff x="0" y="0"/>
+          <a:chExt cx="0" cy="0"/>
+        </a:xfrm>
+      </p:grpSpPr>
+      <p:sp>
+        <p:nvSpPr>
+          <p:cNvPr id="2" name="Shape 0"/>
+          <p:cNvSpPr/>
+          <p:nvPr/>
+        </p:nvSpPr>
+        <p:spPr>
+          <a:xfrm>
+            <a:off x="0" y="0"/>
+            <a:ext cx="9144000" cy="822960"/>
+          </a:xfrm>
+          <a:prstGeom prst="rect">
+            <a:avLst/>
+          </a:prstGeom>
+          <a:solidFill>
+            <a:srgbClr val="FFFFFF"/>
+          </a:solidFill>
+          <a:ln/>
+        </p:spPr>
+      </p:sp>
+      <p:sp>
+        <p:nvSpPr>
+          <p:cNvPr id="3" name="Shape 1"/>
+          <p:cNvSpPr/>
+          <p:nvPr/>
+        </p:nvSpPr>
+        <p:spPr>
+          <a:xfrm>
+            <a:off x="0" y="804672"/>
+            <a:ext cx="9144000" cy="27432"/>
+          </a:xfrm>
+          <a:prstGeom prst="rect">
+            <a:avLst/>
+          </a:prstGeom>
+          <a:solidFill>
+            <a:srgbClr val="E5E2DC"/>
+          </a:solidFill>
+          <a:ln/>
+        </p:spPr>
+      </p:sp>
+      <p:sp>
+        <p:nvSpPr>
+          <p:cNvPr id="4" name="Shape 2"/>
+          <p:cNvSpPr/>
+          <p:nvPr/>
+        </p:nvSpPr>
+        <p:spPr>
+          <a:xfrm>
+            <a:off x="548640" y="201168"/>
+            <a:ext cx="54864" cy="420624"/>
+          </a:xfrm>
+          <a:prstGeom prst="rect">
+            <a:avLst/>
+          </a:prstGeom>
+          <a:solidFill>
+            <a:srgbClr val="2A9D8F"/>
+          </a:solidFill>
+          <a:ln/>
+        </p:spPr>
+      </p:sp>
+      <p:sp>
+        <p:nvSpPr>
+          <p:cNvPr id="5" name="Text 3"/>
+          <p:cNvSpPr/>
+          <p:nvPr/>
+        </p:nvSpPr>
+        <p:spPr>
+          <a:xfrm>
+            <a:off x="777240" y="137160"/>
+            <a:ext cx="7772400" cy="548640"/>
+          </a:xfrm>
+          <a:prstGeom prst="rect">
+            <a:avLst/>
+          </a:prstGeom>
+          <a:noFill/>
+          <a:ln/>
+        </p:spPr>
+        <p:txBody>
+          <a:bodyPr wrap="square" lIns="0" tIns="0" rIns="0" bIns="0" rtlCol="0" anchor="ctr"/>
+          <a:lstStyle/>
+          <a:p>
+            <a:pPr indent="0" marL="0">
+              <a:buNone/>
+            </a:pPr>
+            <a:r>
+              <a:rPr lang="en-US" sz="2000" b="1" dirty="0">
+                <a:solidFill>
+                  <a:srgbClr val="1B2A4A"/>
+                </a:solidFill>
+                <a:latin typeface="Georgia" pitchFamily="34" charset="0"/>
+                <a:ea typeface="Georgia" pitchFamily="34" charset="-122"/>
+                <a:cs typeface="Georgia" pitchFamily="34" charset="-120"/>
+              </a:rPr>
+              <a:t>Check Your Understanding</a:t>
+            </a:r>
+            <a:endParaRPr lang="en-US" sz="2000" dirty="0"/>
+          </a:p>
+        </p:txBody>
+      </p:sp>
+      <p:sp>
+        <p:nvSpPr>
+          <p:cNvPr id="6" name="Shape 4"/>
+          <p:cNvSpPr/>
+          <p:nvPr/>
+        </p:nvSpPr>
+        <p:spPr>
+          <a:xfrm>
+            <a:off x="731520" y="1051560"/>
+            <a:ext cx="7680960" cy="438912"/>
+          </a:xfrm>
+          <a:prstGeom prst="rect">
+            <a:avLst/>
+          </a:prstGeom>
+          <a:solidFill>
+            <a:srgbClr val="FFFFFF"/>
+          </a:solidFill>
+          <a:ln/>
+        </p:spPr>
+      </p:sp>
+      <p:sp>
+        <p:nvSpPr>
+          <p:cNvPr id="7" name="Text 5"/>
+          <p:cNvSpPr/>
+          <p:nvPr/>
+        </p:nvSpPr>
+        <p:spPr>
+          <a:xfrm>
+            <a:off x="868680" y="1051560"/>
+            <a:ext cx="320040" cy="438912"/>
+          </a:xfrm>
+          <a:prstGeom prst="rect">
+            <a:avLst/>
+          </a:prstGeom>
+          <a:noFill/>
+          <a:ln/>
+        </p:spPr>
+        <p:txBody>
+          <a:bodyPr wrap="square" rtlCol="0" anchor="ctr"/>
+          <a:lstStyle/>
+          <a:p>
+            <a:pPr indent="0" marL="0">
+              <a:buNone/>
+            </a:pPr>
+            <a:r>
+              <a:rPr lang="en-US" sz="1400" dirty="0">
+                <a:solidFill>
+                  <a:srgbClr val="2A9D8F"/>
+                </a:solidFill>
+              </a:rPr>
+              <a:t>☐</a:t>
+            </a:r>
+            <a:endParaRPr lang="en-US" sz="1400" dirty="0"/>
+          </a:p>
+        </p:txBody>
+      </p:sp>
+      <p:sp>
+        <p:nvSpPr>
+          <p:cNvPr id="8" name="Text 6"/>
+          <p:cNvSpPr/>
+          <p:nvPr/>
+        </p:nvSpPr>
+        <p:spPr>
+          <a:xfrm>
+            <a:off x="1234440" y="1051560"/>
+            <a:ext cx="6949440" cy="438912"/>
+          </a:xfrm>
+          <a:prstGeom prst="rect">
+            <a:avLst/>
+          </a:prstGeom>
+          <a:noFill/>
+          <a:ln/>
+        </p:spPr>
+        <p:txBody>
+          <a:bodyPr wrap="square" rtlCol="0" anchor="ctr"/>
+          <a:lstStyle/>
+          <a:p>
+            <a:pPr indent="0" marL="0">
+              <a:buNone/>
+            </a:pPr>
+            <a:r>
+              <a:rPr lang="en-US" sz="1300" dirty="0">
+                <a:solidFill>
+                  <a:srgbClr val="3D3A36"/>
+                </a:solidFill>
+                <a:latin typeface="Calibri" pitchFamily="34" charset="0"/>
+                <a:ea typeface="Calibri" pitchFamily="34" charset="-122"/>
+                <a:cs typeface="Calibri" pitchFamily="34" charset="-120"/>
+              </a:rPr>
+              <a:t>I can define independent, dependent, and controlled variables</a:t>
+            </a:r>
+            <a:endParaRPr lang="en-US" sz="1300" dirty="0"/>
+          </a:p>
+        </p:txBody>
+      </p:sp>
+      <p:sp>
+        <p:nvSpPr>
+          <p:cNvPr id="9" name="Shape 7"/>
+          <p:cNvSpPr/>
+          <p:nvPr/>
+        </p:nvSpPr>
+        <p:spPr>
+          <a:xfrm>
+            <a:off x="731520" y="1554480"/>
+            <a:ext cx="7680960" cy="438912"/>
+          </a:xfrm>
+          <a:prstGeom prst="rect">
+            <a:avLst/>
+          </a:prstGeom>
+          <a:solidFill>
+            <a:srgbClr val="F8F6F3"/>
+          </a:solidFill>
+          <a:ln/>
+        </p:spPr>
+      </p:sp>
+      <p:sp>
+        <p:nvSpPr>
+          <p:cNvPr id="10" name="Text 8"/>
+          <p:cNvSpPr/>
+          <p:nvPr/>
+        </p:nvSpPr>
+        <p:spPr>
+          <a:xfrm>
+            <a:off x="868680" y="1554480"/>
+            <a:ext cx="320040" cy="438912"/>
+          </a:xfrm>
+          <a:prstGeom prst="rect">
+            <a:avLst/>
+          </a:prstGeom>
+          <a:noFill/>
+          <a:ln/>
+        </p:spPr>
+        <p:txBody>
+          <a:bodyPr wrap="square" rtlCol="0" anchor="ctr"/>
+          <a:lstStyle/>
+          <a:p>
+            <a:pPr indent="0" marL="0">
+              <a:buNone/>
+            </a:pPr>
+            <a:r>
+              <a:rPr lang="en-US" sz="1400" dirty="0">
+                <a:solidFill>
+                  <a:srgbClr val="2A9D8F"/>
+                </a:solidFill>
+              </a:rPr>
+              <a:t>☐</a:t>
+            </a:r>
+            <a:endParaRPr lang="en-US" sz="1400" dirty="0"/>
+          </a:p>
+        </p:txBody>
+      </p:sp>
+      <p:sp>
+        <p:nvSpPr>
+          <p:cNvPr id="11" name="Text 9"/>
+          <p:cNvSpPr/>
+          <p:nvPr/>
+        </p:nvSpPr>
+        <p:spPr>
+          <a:xfrm>
+            <a:off x="1234440" y="1554480"/>
+            <a:ext cx="6949440" cy="438912"/>
+          </a:xfrm>
+          <a:prstGeom prst="rect">
+            <a:avLst/>
+          </a:prstGeom>
+          <a:noFill/>
+          <a:ln/>
+        </p:spPr>
+        <p:txBody>
+          <a:bodyPr wrap="square" rtlCol="0" anchor="ctr"/>
+          <a:lstStyle/>
+          <a:p>
+            <a:pPr indent="0" marL="0">
+              <a:buNone/>
+            </a:pPr>
+            <a:r>
+              <a:rPr lang="en-US" sz="1300" dirty="0">
+                <a:solidFill>
+                  <a:srgbClr val="3D3A36"/>
+                </a:solidFill>
+                <a:latin typeface="Calibri" pitchFamily="34" charset="0"/>
+                <a:ea typeface="Calibri" pitchFamily="34" charset="-122"/>
+                <a:cs typeface="Calibri" pitchFamily="34" charset="-120"/>
+              </a:rPr>
+              <a:t>I can identify all three in an experiment</a:t>
+            </a:r>
+            <a:endParaRPr lang="en-US" sz="1300" dirty="0"/>
+          </a:p>
+        </p:txBody>
+      </p:sp>
+      <p:sp>
+        <p:nvSpPr>
+          <p:cNvPr id="12" name="Shape 10"/>
+          <p:cNvSpPr/>
+          <p:nvPr/>
+        </p:nvSpPr>
+        <p:spPr>
+          <a:xfrm>
+            <a:off x="731520" y="2057400"/>
+            <a:ext cx="7680960" cy="438912"/>
+          </a:xfrm>
+          <a:prstGeom prst="rect">
+            <a:avLst/>
+          </a:prstGeom>
+          <a:solidFill>
+            <a:srgbClr val="FFFFFF"/>
+          </a:solidFill>
+          <a:ln/>
+        </p:spPr>
+      </p:sp>
+      <p:sp>
+        <p:nvSpPr>
+          <p:cNvPr id="13" name="Text 11"/>
+          <p:cNvSpPr/>
+          <p:nvPr/>
+        </p:nvSpPr>
+        <p:spPr>
+          <a:xfrm>
+            <a:off x="868680" y="2057400"/>
+            <a:ext cx="320040" cy="438912"/>
+          </a:xfrm>
+          <a:prstGeom prst="rect">
+            <a:avLst/>
+          </a:prstGeom>
+          <a:noFill/>
+          <a:ln/>
+        </p:spPr>
+        <p:txBody>
+          <a:bodyPr wrap="square" rtlCol="0" anchor="ctr"/>
+          <a:lstStyle/>
+          <a:p>
+            <a:pPr indent="0" marL="0">
+              <a:buNone/>
+            </a:pPr>
+            <a:r>
+              <a:rPr lang="en-US" sz="1400" dirty="0">
+                <a:solidFill>
+                  <a:srgbClr val="2A9D8F"/>
+                </a:solidFill>
+              </a:rPr>
+              <a:t>☐</a:t>
+            </a:r>
+            <a:endParaRPr lang="en-US" sz="1400" dirty="0"/>
+          </a:p>
+        </p:txBody>
+      </p:sp>
+      <p:sp>
+        <p:nvSpPr>
+          <p:cNvPr id="14" name="Text 12"/>
+          <p:cNvSpPr/>
+          <p:nvPr/>
+        </p:nvSpPr>
+        <p:spPr>
+          <a:xfrm>
+            <a:off x="1234440" y="2057400"/>
+            <a:ext cx="6949440" cy="438912"/>
+          </a:xfrm>
+          <a:prstGeom prst="rect">
+            <a:avLst/>
+          </a:prstGeom>
+          <a:noFill/>
+          <a:ln/>
+        </p:spPr>
+        <p:txBody>
+          <a:bodyPr wrap="square" rtlCol="0" anchor="ctr"/>
+          <a:lstStyle/>
+          <a:p>
+            <a:pPr indent="0" marL="0">
+              <a:buNone/>
+            </a:pPr>
+            <a:r>
+              <a:rPr lang="en-US" sz="1300" dirty="0">
+                <a:solidFill>
+                  <a:srgbClr val="3D3A36"/>
+                </a:solidFill>
+                <a:latin typeface="Calibri" pitchFamily="34" charset="0"/>
+                <a:ea typeface="Calibri" pitchFamily="34" charset="-122"/>
+                <a:cs typeface="Calibri" pitchFamily="34" charset="-120"/>
+              </a:rPr>
+              <a:t>I understand why a fair test only changes one variable</a:t>
+            </a:r>
+            <a:endParaRPr lang="en-US" sz="1300" dirty="0"/>
+          </a:p>
+        </p:txBody>
+      </p:sp>
+      <p:sp>
+        <p:nvSpPr>
+          <p:cNvPr id="15" name="Shape 13"/>
+          <p:cNvSpPr/>
+          <p:nvPr/>
+        </p:nvSpPr>
+        <p:spPr>
+          <a:xfrm>
+            <a:off x="731520" y="2560320"/>
+            <a:ext cx="7680960" cy="438912"/>
+          </a:xfrm>
+          <a:prstGeom prst="rect">
+            <a:avLst/>
+          </a:prstGeom>
+          <a:solidFill>
+            <a:srgbClr val="F8F6F3"/>
+          </a:solidFill>
+          <a:ln/>
+        </p:spPr>
+      </p:sp>
+      <p:sp>
+        <p:nvSpPr>
+          <p:cNvPr id="16" name="Text 14"/>
+          <p:cNvSpPr/>
+          <p:nvPr/>
+        </p:nvSpPr>
+        <p:spPr>
+          <a:xfrm>
+            <a:off x="868680" y="2560320"/>
+            <a:ext cx="320040" cy="438912"/>
+          </a:xfrm>
+          <a:prstGeom prst="rect">
+            <a:avLst/>
+          </a:prstGeom>
+          <a:noFill/>
+          <a:ln/>
+        </p:spPr>
+        <p:txBody>
+          <a:bodyPr wrap="square" rtlCol="0" anchor="ctr"/>
+          <a:lstStyle/>
+          <a:p>
+            <a:pPr indent="0" marL="0">
+              <a:buNone/>
+            </a:pPr>
+            <a:r>
+              <a:rPr lang="en-US" sz="1400" dirty="0">
+                <a:solidFill>
+                  <a:srgbClr val="2A9D8F"/>
+                </a:solidFill>
+              </a:rPr>
+              <a:t>☐</a:t>
+            </a:r>
+            <a:endParaRPr lang="en-US" sz="1400" dirty="0"/>
+          </a:p>
+        </p:txBody>
+      </p:sp>
+      <p:sp>
+        <p:nvSpPr>
+          <p:cNvPr id="17" name="Text 15"/>
+          <p:cNvSpPr/>
+          <p:nvPr/>
+        </p:nvSpPr>
+        <p:spPr>
+          <a:xfrm>
+            <a:off x="1234440" y="2560320"/>
+            <a:ext cx="6949440" cy="438912"/>
+          </a:xfrm>
+          <a:prstGeom prst="rect">
+            <a:avLst/>
+          </a:prstGeom>
+          <a:noFill/>
+          <a:ln/>
+        </p:spPr>
+        <p:txBody>
+          <a:bodyPr wrap="square" rtlCol="0" anchor="ctr"/>
+          <a:lstStyle/>
+          <a:p>
+            <a:pPr indent="0" marL="0">
+              <a:buNone/>
+            </a:pPr>
+            <a:r>
+              <a:rPr lang="en-US" sz="1300" dirty="0">
+                <a:solidFill>
+                  <a:srgbClr val="3D3A36"/>
+                </a:solidFill>
+                <a:latin typeface="Calibri" pitchFamily="34" charset="0"/>
+                <a:ea typeface="Calibri" pitchFamily="34" charset="-122"/>
+                <a:cs typeface="Calibri" pitchFamily="34" charset="-120"/>
+              </a:rPr>
+              <a:t>I know which variable goes on which axis</a:t>
+            </a:r>
+            <a:endParaRPr lang="en-US" sz="1300" dirty="0"/>
+          </a:p>
+        </p:txBody>
+      </p:sp>
+      <p:sp>
+        <p:nvSpPr>
+          <p:cNvPr id="18" name="Shape 16"/>
+          <p:cNvSpPr/>
+          <p:nvPr/>
+        </p:nvSpPr>
+        <p:spPr>
+          <a:xfrm>
+            <a:off x="731520" y="3063240"/>
+            <a:ext cx="7680960" cy="438912"/>
+          </a:xfrm>
+          <a:prstGeom prst="rect">
+            <a:avLst/>
+          </a:prstGeom>
+          <a:solidFill>
+            <a:srgbClr val="FFFFFF"/>
+          </a:solidFill>
+          <a:ln/>
+        </p:spPr>
+      </p:sp>
+      <p:sp>
+        <p:nvSpPr>
+          <p:cNvPr id="19" name="Text 17"/>
+          <p:cNvSpPr/>
+          <p:nvPr/>
+        </p:nvSpPr>
+        <p:spPr>
+          <a:xfrm>
+            <a:off x="868680" y="3063240"/>
+            <a:ext cx="320040" cy="438912"/>
+          </a:xfrm>
+          <a:prstGeom prst="rect">
+            <a:avLst/>
+          </a:prstGeom>
+          <a:noFill/>
+          <a:ln/>
+        </p:spPr>
+        <p:txBody>
+          <a:bodyPr wrap="square" rtlCol="0" anchor="ctr"/>
+          <a:lstStyle/>
+          <a:p>
+            <a:pPr indent="0" marL="0">
+              <a:buNone/>
+            </a:pPr>
+            <a:r>
+              <a:rPr lang="en-US" sz="1400" dirty="0">
+                <a:solidFill>
+                  <a:srgbClr val="2A9D8F"/>
+                </a:solidFill>
+              </a:rPr>
+              <a:t>☐</a:t>
+            </a:r>
+            <a:endParaRPr lang="en-US" sz="1400" dirty="0"/>
+          </a:p>
+        </p:txBody>
+      </p:sp>
+      <p:sp>
+        <p:nvSpPr>
+          <p:cNvPr id="20" name="Text 18"/>
+          <p:cNvSpPr/>
+          <p:nvPr/>
+        </p:nvSpPr>
+        <p:spPr>
+          <a:xfrm>
+            <a:off x="1234440" y="3063240"/>
+            <a:ext cx="6949440" cy="438912"/>
+          </a:xfrm>
+          <a:prstGeom prst="rect">
+            <a:avLst/>
+          </a:prstGeom>
+          <a:noFill/>
+          <a:ln/>
+        </p:spPr>
+        <p:txBody>
+          <a:bodyPr wrap="square" rtlCol="0" anchor="ctr"/>
+          <a:lstStyle/>
+          <a:p>
+            <a:pPr indent="0" marL="0">
+              <a:buNone/>
+            </a:pPr>
+            <a:r>
+              <a:rPr lang="en-US" sz="1300" dirty="0">
+                <a:solidFill>
+                  <a:srgbClr val="3D3A36"/>
+                </a:solidFill>
+                <a:latin typeface="Calibri" pitchFamily="34" charset="0"/>
+                <a:ea typeface="Calibri" pitchFamily="34" charset="-122"/>
+                <a:cs typeface="Calibri" pitchFamily="34" charset="-120"/>
+              </a:rPr>
+              <a:t>I can explain why controlled variables matter</a:t>
+            </a:r>
+            <a:endParaRPr lang="en-US" sz="1300" dirty="0"/>
+          </a:p>
+        </p:txBody>
+      </p:sp>
+      <p:sp>
+        <p:nvSpPr>
+          <p:cNvPr id="21" name="Shape 19"/>
+          <p:cNvSpPr/>
+          <p:nvPr/>
+        </p:nvSpPr>
+        <p:spPr>
+          <a:xfrm>
+            <a:off x="731520" y="3749040"/>
+            <a:ext cx="7680960" cy="594360"/>
+          </a:xfrm>
+          <a:prstGeom prst="rect">
+            <a:avLst/>
+          </a:prstGeom>
+          <a:solidFill>
+            <a:srgbClr val="E8F5F3"/>
+          </a:solidFill>
+          <a:ln/>
+          <a:effectLst>
+            <a:outerShdw sx="100000" sy="100000" kx="0" ky="0" algn="bl" rotWithShape="0" blurRad="50800" dist="25400" dir="8100000">
+              <a:srgbClr val="000000">
+                <a:alpha val="10000"/>
+              </a:srgbClr>
+            </a:outerShdw>
+          </a:effectLst>
+        </p:spPr>
+      </p:sp>
+      <p:sp>
+        <p:nvSpPr>
+          <p:cNvPr id="22" name="Text 20"/>
+          <p:cNvSpPr/>
+          <p:nvPr/>
+        </p:nvSpPr>
+        <p:spPr>
+          <a:xfrm>
+            <a:off x="914400" y="3749040"/>
+            <a:ext cx="7315200" cy="594360"/>
+          </a:xfrm>
+          <a:prstGeom prst="rect">
+            <a:avLst/>
+          </a:prstGeom>
+          <a:noFill/>
+          <a:ln/>
+        </p:spPr>
+        <p:txBody>
+          <a:bodyPr wrap="square" rtlCol="0" anchor="ctr"/>
+          <a:lstStyle/>
+          <a:p>
+            <a:pPr indent="0" marL="0">
+              <a:buNone/>
+            </a:pPr>
+            <a:r>
+              <a:rPr lang="en-US" sz="1200" b="1" dirty="0">
+                <a:solidFill>
+                  <a:srgbClr val="2A9D8F"/>
+                </a:solidFill>
+                <a:latin typeface="Calibri" pitchFamily="34" charset="0"/>
+                <a:ea typeface="Calibri" pitchFamily="34" charset="-122"/>
+                <a:cs typeface="Calibri" pitchFamily="34" charset="-120"/>
+              </a:rPr>
+              <a:t>Key Idea: </a:t>
+            </a:r>
+            <a:pPr indent="0" marL="0">
+              <a:buNone/>
+            </a:pPr>
+            <a:r>
+              <a:rPr lang="en-US" sz="1200" i="1" dirty="0">
+                <a:solidFill>
+                  <a:srgbClr val="3D3A36"/>
+                </a:solidFill>
+                <a:latin typeface="Calibri" pitchFamily="34" charset="0"/>
+                <a:ea typeface="Calibri" pitchFamily="34" charset="-122"/>
+                <a:cs typeface="Calibri" pitchFamily="34" charset="-120"/>
+              </a:rPr>
+              <a:t>Variables are the building blocks of every scientific investigation.</a:t>
+            </a:r>
+            <a:endParaRPr lang="en-US" sz="1200" dirty="0"/>
+          </a:p>
+        </p:txBody>
+      </p:sp>
+    </p:spTree>
+  </p:cSld>
+  <p:clrMapOvr>
+    <a:masterClrMapping/>
+  </p:clrMapOvr>
+</p:sld>
+</file>
+
+<file path=ppt/slides/slide9.xml><?xml version="1.0" encoding="utf-8"?>
+<p:sld xmlns:a="http://schemas.openxmlformats.org/drawingml/2006/main" xmlns:r="http://schemas.openxmlformats.org/officeDocument/2006/relationships" xmlns:p="http://schemas.openxmlformats.org/presentationml/2006/main">
+  <p:cSld name="Slide 9">
+    <p:spTree>
+      <p:nvGrpSpPr>
+        <p:cNvPr id="1" name=""/>
+        <p:cNvGrpSpPr/>
+        <p:nvPr/>
+      </p:nvGrpSpPr>
+      <p:grpSpPr>
+        <a:xfrm>
+          <a:off x="0" y="0"/>
+          <a:ext cx="0" cy="0"/>
+          <a:chOff x="0" y="0"/>
+          <a:chExt cx="0" cy="0"/>
+        </a:xfrm>
+      </p:grpSpPr>
+      <p:sp>
+        <p:nvSpPr>
+          <p:cNvPr id="2" name="Shape 0"/>
+          <p:cNvSpPr/>
+          <p:nvPr/>
+        </p:nvSpPr>
+        <p:spPr>
+          <a:xfrm>
+            <a:off x="0" y="0"/>
+            <a:ext cx="9144000" cy="5143500"/>
+          </a:xfrm>
+          <a:prstGeom prst="rect">
+            <a:avLst/>
+          </a:prstGeom>
+          <a:solidFill>
+            <a:srgbClr val="1B2A4A"/>
+          </a:solidFill>
+          <a:ln/>
+        </p:spPr>
+      </p:sp>
+      <p:sp>
+        <p:nvSpPr>
+          <p:cNvPr id="3" name="Shape 1"/>
+          <p:cNvSpPr/>
+          <p:nvPr/>
+        </p:nvSpPr>
+        <p:spPr>
+          <a:xfrm>
+            <a:off x="0" y="4777740"/>
+            <a:ext cx="9144000" cy="365760"/>
+          </a:xfrm>
+          <a:prstGeom prst="rect">
+            <a:avLst/>
+          </a:prstGeom>
+          <a:solidFill>
+            <a:srgbClr val="2A9D8F"/>
+          </a:solidFill>
+          <a:ln/>
+        </p:spPr>
+      </p:sp>
+      <p:sp>
+        <p:nvSpPr>
+          <p:cNvPr id="4" name="Shape 2"/>
+          <p:cNvSpPr/>
+          <p:nvPr/>
+        </p:nvSpPr>
+        <p:spPr>
+          <a:xfrm>
+            <a:off x="-914400" y="-914400"/>
+            <a:ext cx="3657600" cy="3657600"/>
+          </a:xfrm>
+          <a:prstGeom prst="ellipse">
+            <a:avLst/>
+          </a:prstGeom>
+          <a:solidFill>
+            <a:srgbClr val="2A9D8F">
+              <a:alpha val="10000"/>
+            </a:srgbClr>
+          </a:solidFill>
+          <a:ln/>
+        </p:spPr>
+      </p:sp>
+      <p:sp>
+        <p:nvSpPr>
+          <p:cNvPr id="5" name="Text 3"/>
+          <p:cNvSpPr/>
+          <p:nvPr/>
+        </p:nvSpPr>
+        <p:spPr>
+          <a:xfrm>
+            <a:off x="731520" y="1463040"/>
+            <a:ext cx="7680960" cy="822960"/>
+          </a:xfrm>
+          <a:prstGeom prst="rect">
+            <a:avLst/>
+          </a:prstGeom>
+          <a:noFill/>
+          <a:ln/>
+        </p:spPr>
+        <p:txBody>
+          <a:bodyPr wrap="square" rtlCol="0" anchor="ctr"/>
+          <a:lstStyle/>
+          <a:p>
+            <a:pPr algn="ctr" indent="0" marL="0">
+              <a:buNone/>
+            </a:pPr>
+            <a:r>
+              <a:rPr lang="en-US" sz="3400" b="1" dirty="0">
+                <a:solidFill>
+                  <a:srgbClr val="FFFFFF"/>
+                </a:solidFill>
+                <a:latin typeface="Georgia" pitchFamily="34" charset="0"/>
+                <a:ea typeface="Georgia" pitchFamily="34" charset="-122"/>
+                <a:cs typeface="Georgia" pitchFamily="34" charset="-120"/>
+              </a:rPr>
+              <a:t>Review &amp; Practise</a:t>
+            </a:r>
+            <a:endParaRPr lang="en-US" sz="3400" dirty="0"/>
+          </a:p>
+        </p:txBody>
+      </p:sp>
+      <p:sp>
+        <p:nvSpPr>
+          <p:cNvPr id="6" name="Text 4"/>
+          <p:cNvSpPr/>
+          <p:nvPr/>
+        </p:nvSpPr>
+        <p:spPr>
+          <a:xfrm>
+            <a:off x="731520" y="2468880"/>
+            <a:ext cx="7680960" cy="457200"/>
+          </a:xfrm>
+          <a:prstGeom prst="rect">
+            <a:avLst/>
+          </a:prstGeom>
+          <a:noFill/>
+          <a:ln/>
+        </p:spPr>
+        <p:txBody>
+          <a:bodyPr wrap="square" rtlCol="0" anchor="ctr"/>
+          <a:lstStyle/>
+          <a:p>
+            <a:pPr algn="ctr" indent="0" marL="0">
+              <a:buNone/>
+            </a:pPr>
+            <a:r>
+              <a:rPr lang="en-US" sz="1800" dirty="0">
+                <a:solidFill>
+                  <a:srgbClr val="2A9D8F"/>
+                </a:solidFill>
+                <a:latin typeface="Calibri" pitchFamily="34" charset="0"/>
+                <a:ea typeface="Calibri" pitchFamily="34" charset="-122"/>
+                <a:cs typeface="Calibri" pitchFamily="34" charset="-120"/>
+              </a:rPr>
               <a:t>mrzocchi.com</a:t>
             </a:r>
-            <a:endParaRPr lang="en-US" sz="1100" dirty="0"/>
+            <a:endParaRPr lang="en-US" sz="1800" dirty="0"/>
+          </a:p>
+        </p:txBody>
+      </p:sp>
+      <p:sp>
+        <p:nvSpPr>
+          <p:cNvPr id="7" name="Text 5"/>
+          <p:cNvSpPr/>
+          <p:nvPr/>
+        </p:nvSpPr>
+        <p:spPr>
+          <a:xfrm>
+            <a:off x="731520" y="3108960"/>
+            <a:ext cx="7680960" cy="457200"/>
+          </a:xfrm>
+          <a:prstGeom prst="rect">
+            <a:avLst/>
+          </a:prstGeom>
+          <a:noFill/>
+          <a:ln/>
+        </p:spPr>
+        <p:txBody>
+          <a:bodyPr wrap="square" rtlCol="0" anchor="ctr"/>
+          <a:lstStyle/>
+          <a:p>
+            <a:pPr algn="ctr" indent="0" marL="0">
+              <a:buNone/>
+            </a:pPr>
+            <a:r>
+              <a:rPr lang="en-US" sz="1300" dirty="0">
+                <a:solidFill>
+                  <a:srgbClr val="9B9690"/>
+                </a:solidFill>
+                <a:latin typeface="Calibri" pitchFamily="34" charset="0"/>
+                <a:ea typeface="Calibri" pitchFamily="34" charset="-122"/>
+                <a:cs typeface="Calibri" pitchFamily="34" charset="-120"/>
+              </a:rPr>
+              <a:t>Use the Self-Quiz, Review Games, and Practice Builder to test yourself.</a:t>
+            </a:r>
+            <a:endParaRPr lang="en-US" sz="1300" dirty="0"/>
           </a:p>
         </p:txBody>
       </p:sp>
